--- a/manaberu/slides/manaberu-01-orientation.pptx
+++ b/manaberu/slides/manaberu-01-orientation.pptx
@@ -116,13 +116,13 @@
   <p:extLst>
     <p:ext uri="{521415D9-36F7-43E2-AB2F-B90AF26B5E84}">
       <p14:sectionLst xmlns:p14="http://schemas.microsoft.com/office/powerpoint/2010/main">
-        <p14:section name="導入" id="{668d1d84-3e0d-b26b-0793-e6e131a10771}">
+        <p14:section name="導入" id="{477b94c2-a7a6-fdbc-0a82-66f366644478}">
           <p14:sldIdLst>
             <p14:sldId id="256"/>
             <p14:sldId id="257"/>
           </p14:sldIdLst>
         </p14:section>
-        <p14:section name="本編" id="{d6d44121-db1c-85f5-51bb-89d1e1caaa71}">
+        <p14:section name="本編" id="{d15c95e1-45ae-f61f-b68a-282652179297}">
           <p14:sldIdLst>
             <p14:sldId id="258"/>
             <p14:sldId id="259"/>
@@ -132,7 +132,7 @@
             <p14:sldId id="263"/>
           </p14:sldIdLst>
         </p14:section>
-        <p14:section name="まとめ" id="{807fabfd-cd8a-32e1-370b-1e494bb840c4}">
+        <p14:section name="まとめ" id="{1e09d8f6-be26-6c8b-de93-a30592f24d57}">
           <p14:sldIdLst>
             <p14:sldId id="264"/>
             <p14:sldId id="265"/>
@@ -542,7 +542,8 @@
           <a:p>
             <a:r>
               <a:rPr lang="en-US" dirty="0"/>
-              <a:t>第1回「オリエンテーション／作りたいものを言葉にする」。前回の宿題の提出状況を確認してから始める。</a:t>
+              <a:t>【自己紹介（10分）／このスライド 2分】
+みなさん、こんばんは。マナベル1期へようこそ。講師の笹原です。さっさーと呼んでください。鹿児島を拠点に、Lark・AI・LINEを使った業務のしくみづくりをお手伝いしています。これから8週間、全12回、どうぞよろしくお願いします。今日は第1回、オリエンテーションと、作りたいものを言葉にする回です。最初に、みなさんにも自己紹介をお願いします。お名前、会社とお仕事、それから「今いちばん面倒だと感じている業務」を1つ、1人1分くらいでお願いします。</a:t>
             </a:r>
             <a:endParaRPr lang="en-US" dirty="0"/>
           </a:p>
@@ -630,7 +631,8 @@
           <a:p>
             <a:r>
               <a:rPr lang="en-US" dirty="0"/>
-              <a:t>次回までの宿題をもう一度確認して終了。</a:t>
+              <a:t>【共有・質問・宿題（20分）／このスライド 2分】
+次回は「AIと話す型を身につける」です。今日決めたものを、AIと一緒に設計シートに仕上げます。わからないことは、講座グループでいつでも質問してください。平日は24時間以内にお返事します。APIキーやパスワードは送らないでくださいね。今日はお疲れさまでした。</a:t>
             </a:r>
             <a:endParaRPr lang="en-US" dirty="0"/>
           </a:p>
@@ -718,7 +720,8 @@
           <a:p>
             <a:r>
               <a:rPr lang="en-US" dirty="0"/>
-              <a:t>ゴールを読み上げ、今日は「聞く」と「手を動かす」を交互に進めることを伝える。</a:t>
+              <a:t>【自己紹介（10分）／このスライド 8分】
+（自己紹介：1人1分×最大6名。講師は「面倒な業務」をメモしておき、説明②の例に使う）ありがとうございました。今日のゴールは2つです。1つ目は、この講座で目指す「構築者」とは何か、8週間後にどこまで作れるようになるかを知ること。2つ目は、自分の業務から、この講座で作るものを1つに絞ることです。流れは画面の帯のとおりで、黒が聞く時間、オレンジが手を動かす時間です。この講座は、毎回こうして聞くと作るを交互に進めます。</a:t>
             </a:r>
             <a:endParaRPr lang="en-US" dirty="0"/>
           </a:p>
@@ -806,7 +809,8 @@
           <a:p>
             <a:r>
               <a:rPr lang="en-US" dirty="0"/>
-              <a:t>最初に「ツールを覚える講座ではない」ことを伝える。修了時に自社で使うしくみが残ることを強調。</a:t>
+              <a:t>【説明①（10分）／このスライド 5分】
+まず、この講座のゴールです。マナベルは、ツールの使い方を覚える講座ではありません。ゴールは、みなさんが自分の会社の「構築者」になることです。構築者というのは、現場の困りごとを聞き取って、しくみを設計して、LarkとAIで作って、公開して、使われながら直し続けられる人のことです。外注すると、ちょっと直したいだけでも見積もりから始まります。でも社内に構築者がいれば、気づいた人がその日に直せます。8週間後の最終回では、みなさん一人ひとりが、自社で実際に使うしくみを1つ公開して発表します。勉強用のサンプルではなく、本物の業務です。だから今日、何を作るかを決めることが、とても大切です。（対話：「直したいのに自分では直せなかった経験」を2〜3名に聞く）</a:t>
             </a:r>
             <a:endParaRPr lang="en-US" dirty="0"/>
           </a:p>
@@ -894,7 +898,8 @@
           <a:p>
             <a:r>
               <a:rPr lang="en-US" dirty="0"/>
-              <a:t>ささエールの実績の型（店舗の予約管理、社内ポータル、顧客管理）を口頭で1〜2例紹介する。</a:t>
+              <a:t>【説明①（10分）／このスライド 5分】
+使う道具は3つです。Larkは社内の整理役。台帳、通知、マニュアル、承認をまとめます。AIは、作る・考える相棒です。文章も、要件の整理も、最終的にはプログラムのコードも書いてくれます。LINEは、お客様との接点です。予約や問い合わせの入口になります。たとえば、あるパン屋さんでは、お客様がLINEから予約すると、Larkの台帳に自動で入って、スタッフのグループに通知が届くしくみを作りました。進め方の順番も大事です。まずはコードを書かずにLarkで作れるところまで作ります。それでも足りないところだけ、AIにコードを書いてもらいます。いきなりプログラミングから始めないので、未経験の方も安心してください。（デモ：講師デモ版「まなべ食堂」でスマホから予約 → BASEに1件入る → グループに通知が届く、を画面共有で見せる。「8週間後、みなさんはこれを自分の業務で作ります」）</a:t>
             </a:r>
             <a:endParaRPr lang="en-US" dirty="0"/>
           </a:p>
@@ -982,7 +987,8 @@
           <a:p>
             <a:r>
               <a:rPr lang="en-US" dirty="0"/>
-              <a:t>手が止まっている人には「昨日やったことを順番に」と声をかける。</a:t>
+              <a:t>【ハンズオン①（20分）／このスライド 20分】
+では、手を動かしましょう。設計シートの「1. 業務の棚卸し」を開いてください。1週間の仕事を思い出して、くり返している作業を10個書き出します。それぞれに、誰が、どのくらいの頻度で、何を使ってやっているか、紙なのかExcelなのか電話なのかを書いてください。最後に、面倒だな、ミスが起きるな、人に聞かないとわからないな、と思うものに印を付けます。時間は18分です。手が止まったら、昨日やったことを朝から順番に思い出してみてください。（講師は巡回。止まっている人に声をかける。残り3分で声かけ）</a:t>
             </a:r>
             <a:endParaRPr lang="en-US" dirty="0"/>
           </a:p>
@@ -1070,7 +1076,8 @@
           <a:p>
             <a:r>
               <a:rPr lang="en-US" dirty="0"/>
-              <a:t>受講者の棚卸しから1つ例を取り上げ、どの型か一緒に考える。</a:t>
+              <a:t>【説明②（10分）／このスライド 10分】
+お疲れさまでした。書き出した困りごとは、だいたい4つの型に分けられます。1つ目は「集める」。電話や紙やLINEに、バラバラに届いて困っている。これは入力フォームで入口を1つにします。2つ目は「貯める」。Excelが人ごとにあって、どれが最新かわからない。これはLarkのBASEで台帳を1つにします。3つ目は「知らせる・回す」。伝え忘れや、承認待ちで止まってしまう。これは自動化と通知です。4つ目は「見る」。今月の数字がすぐに出ない。これは一覧やダッシュボードです。（対話：自己紹介で出た「面倒な業務」を3つ取り上げ、どの型か全員で分類する）では、最初に作るものはどう選ぶか。おすすめは3つの条件です。毎週くり返していること。関わる人が2人から5人くらいであること。そして、失敗しても大事故にならないこと。いきなりお金や個人情報の中心になる業務を選ぶより、まずは小さく、毎週効くところから始めましょう。</a:t>
             </a:r>
             <a:endParaRPr lang="en-US" dirty="0"/>
           </a:p>
@@ -1158,7 +1165,8 @@
           <a:p>
             <a:r>
               <a:rPr lang="en-US" dirty="0"/>
-              <a:t>大きすぎる題材は「最初に公開する範囲」と「修了後に足す範囲」に分けさせる。</a:t>
+              <a:t>【ハンズオン②（20分）／このスライド 20分】
+では、1つに絞ります。印を付けた作業から候補を3つ選んで、効果の大きさと作りやすさで、丸・三角・バツを付けてください。決まったら、設計シートに一言で書きます。たとえば「電話予約をフォーム受付にして、BASEで管理する」のような書き方です。時間は15分。そのあと5分で、私が一人ずつ、2ヶ月で公開まで届く大きさかを確認します。大きすぎる場合は、最初に公開する範囲と、修了後に足す範囲に分けましょう。（講師は1人1分で題材を確認）</a:t>
             </a:r>
             <a:endParaRPr lang="en-US" dirty="0"/>
           </a:p>
@@ -1246,7 +1254,8 @@
           <a:p>
             <a:r>
               <a:rPr lang="en-US" dirty="0"/>
-              <a:t>個人情報は入れないことを一言添える。</a:t>
+              <a:t>【共有・質問・宿題（20分）／このスライド 15分】
+では、決まったものを1人1分で共有してください。（1人1分×最大6名＋講師コメント）ありがとうございました。どれも8週間で形にできる題材です。最後に、家で試してほしいことです。画面の文章をAIに貼って、棚卸しした業務を渡すと、どれから始めると効果が出やすいかを理由つきで答えてくれます。今日決めたものと答えが違っても大丈夫です。AIは相談相手で、決めるのはみなさんです。ただし、お客様の名前や電話番号は入れないでください。この約束は、これから毎回出てきます。</a:t>
             </a:r>
             <a:endParaRPr lang="en-US" dirty="0"/>
           </a:p>
@@ -1334,7 +1343,8 @@
           <a:p>
             <a:r>
               <a:rPr lang="en-US" dirty="0"/>
-              <a:t>宿題の目安時間を伝える。質問は講座グループへ（24時間以内に返信・土日祝を除く）。</a:t>
+              <a:t>【共有・質問・宿題（20分）／このスライド 3分】
+宿題は1つです。設計シートの「3. 誰が・何に困っているか」を、関係者ごとに書いてきてください。30分くらいが目安です。今日のチェックは2つ。作りたいものが1つ決まったこと、業務の棚卸しが10個書けたこと。できた人は、心の中でチェックを入れてください。</a:t>
             </a:r>
             <a:endParaRPr lang="en-US" dirty="0"/>
           </a:p>
@@ -3389,7 +3399,7 @@
                   <a:srgbClr val="FFD600"/>
                 </a:solidFill>
               </a:rPr>
-              <a:t>共有・宿題</a:t>
+              <a:t>共有・質問・宿題</a:t>
             </a:r>
             <a:endParaRPr lang="en-US" sz="1050" dirty="0"/>
           </a:p>

--- a/manaberu/slides/manaberu-01-orientation.pptx
+++ b/manaberu/slides/manaberu-01-orientation.pptx
@@ -116,13 +116,13 @@
   <p:extLst>
     <p:ext uri="{521415D9-36F7-43E2-AB2F-B90AF26B5E84}">
       <p14:sectionLst xmlns:p14="http://schemas.microsoft.com/office/powerpoint/2010/main">
-        <p14:section name="導入" id="{477b94c2-a7a6-fdbc-0a82-66f366644478}">
+        <p14:section name="導入" id="{40ce3fe8-735e-dab0-9810-686fee2226df}">
           <p14:sldIdLst>
             <p14:sldId id="256"/>
             <p14:sldId id="257"/>
           </p14:sldIdLst>
         </p14:section>
-        <p14:section name="本編" id="{d15c95e1-45ae-f61f-b68a-282652179297}">
+        <p14:section name="本編" id="{754ce756-a2f0-f342-ecb5-7d9903652f24}">
           <p14:sldIdLst>
             <p14:sldId id="258"/>
             <p14:sldId id="259"/>
@@ -132,7 +132,7 @@
             <p14:sldId id="263"/>
           </p14:sldIdLst>
         </p14:section>
-        <p14:section name="まとめ" id="{1e09d8f6-be26-6c8b-de93-a30592f24d57}">
+        <p14:section name="まとめ" id="{f5c28fb1-6367-2c40-c409-0e888ec5d358}">
           <p14:sldIdLst>
             <p14:sldId id="264"/>
             <p14:sldId id="265"/>
@@ -1418,12 +1418,19 @@
 
 <file path=ppt/slideLayouts/slideLayout2.xml><?xml version="1.0" encoding="utf-8"?>
 <p:sldLayout xmlns:a="http://schemas.openxmlformats.org/drawingml/2006/main" xmlns:r="http://schemas.openxmlformats.org/officeDocument/2006/relationships" xmlns:p="http://schemas.openxmlformats.org/presentationml/2006/main" preserve="1">
-  <p:cSld name="MANA_TITLE">
+  <p:cSld name="MANA_COVER">
     <p:bg>
       <p:bgPr>
-        <a:solidFill>
-          <a:srgbClr val="FFD600"/>
-        </a:solidFill>
+        <a:blipFill dpi="0" rotWithShape="1">
+          <a:blip r:embed="rId1">
+            <a:lum/>
+          </a:blip>
+          <a:srcRect/>
+          <a:stretch>
+            <a:fillRect/>
+          </a:stretch>
+        </a:blipFill>
+        <a:effectLst/>
       </p:bgPr>
     </p:bg>
     <p:spTree>
@@ -1440,156 +1447,6 @@
           <a:chExt cx="0" cy="0"/>
         </a:xfrm>
       </p:grpSpPr>
-      <p:sp>
-        <p:nvSpPr>
-          <p:cNvPr id="2" name="Text 0"/>
-          <p:cNvSpPr/>
-          <p:nvPr>
-            <p:ph idx="100" type="title" hasCustomPrompt="1"/>
-          </p:nvPr>
-        </p:nvSpPr>
-        <p:spPr>
-          <a:xfrm>
-            <a:off x="548640" y="1691640"/>
-            <a:ext cx="5852160" cy="1371600"/>
-          </a:xfrm>
-          <a:prstGeom prst="rect">
-            <a:avLst/>
-          </a:prstGeom>
-          <a:noFill/>
-          <a:ln/>
-        </p:spPr>
-        <p:txBody>
-          <a:bodyPr wrap="square" rtlCol="0"/>
-          <a:lstStyle>
-            <a:lvl1pPr algn="l" indent="0" marL="0">
-              <a:buNone/>
-              <a:defRPr lang="en-US" sz="3200" b="1" dirty="0">
-                <a:solidFill>
-                  <a:schemeClr val="tx1"/>
-                </a:solidFill>
-              </a:defRPr>
-            </a:lvl1pPr>
-          </a:lstStyle>
-          <a:p>
-            <a:pPr algn="l" indent="0" marL="0">
-              <a:buNone/>
-            </a:pPr>
-            <a:endParaRPr lang="en-US" sz="3200" dirty="0"/>
-          </a:p>
-        </p:txBody>
-      </p:sp>
-      <p:sp>
-        <p:nvSpPr>
-          <p:cNvPr id="3" name="Text 0"/>
-          <p:cNvSpPr/>
-          <p:nvPr>
-            <p:ph idx="101" type="body" hasCustomPrompt="1"/>
-          </p:nvPr>
-        </p:nvSpPr>
-        <p:spPr>
-          <a:xfrm>
-            <a:off x="548640" y="3246120"/>
-            <a:ext cx="5852160" cy="457200"/>
-          </a:xfrm>
-          <a:prstGeom prst="rect">
-            <a:avLst/>
-          </a:prstGeom>
-          <a:noFill/>
-          <a:ln/>
-        </p:spPr>
-        <p:txBody>
-          <a:bodyPr wrap="square" rtlCol="0"/>
-          <a:lstStyle>
-            <a:lvl1pPr indent="0" marL="0">
-              <a:buNone/>
-              <a:defRPr lang="en-US" sz="1400" dirty="0">
-                <a:solidFill>
-                  <a:schemeClr val="tx1"/>
-                </a:solidFill>
-              </a:defRPr>
-            </a:lvl1pPr>
-          </a:lstStyle>
-          <a:p>
-            <a:pPr indent="0" marL="0">
-              <a:buNone/>
-            </a:pPr>
-            <a:endParaRPr lang="en-US" sz="1400" dirty="0"/>
-          </a:p>
-        </p:txBody>
-      </p:sp>
-      <p:sp>
-        <p:nvSpPr>
-          <p:cNvPr id="4" name="Text 0"/>
-          <p:cNvSpPr/>
-          <p:nvPr/>
-        </p:nvSpPr>
-        <p:spPr>
-          <a:xfrm>
-            <a:off x="548640" y="4526280"/>
-            <a:ext cx="5486400" cy="274320"/>
-          </a:xfrm>
-          <a:prstGeom prst="rect">
-            <a:avLst/>
-          </a:prstGeom>
-          <a:noFill/>
-          <a:ln/>
-        </p:spPr>
-        <p:txBody>
-          <a:bodyPr wrap="square" lIns="0" tIns="0" rIns="0" bIns="0" rtlCol="0" anchor="ctr"/>
-          <a:lstStyle/>
-          <a:p>
-            <a:pPr indent="0" marL="0">
-              <a:buNone/>
-            </a:pPr>
-            <a:r>
-              <a:rPr lang="en-US" sz="1000" dirty="0">
-                <a:solidFill>
-                  <a:schemeClr val="tx1"/>
-                </a:solidFill>
-              </a:rPr>
-              <a:t>マナベル｜AI×Lark 構築者育成講座</a:t>
-            </a:r>
-            <a:endParaRPr lang="en-US" sz="1000" dirty="0"/>
-          </a:p>
-        </p:txBody>
-      </p:sp>
-      <p:sp>
-        <p:nvSpPr>
-          <p:cNvPr id="5" name="Text 1"/>
-          <p:cNvSpPr/>
-          <p:nvPr/>
-        </p:nvSpPr>
-        <p:spPr>
-          <a:xfrm>
-            <a:off x="6766560" y="4526280"/>
-            <a:ext cx="1828800" cy="274320"/>
-          </a:xfrm>
-          <a:prstGeom prst="rect">
-            <a:avLst/>
-          </a:prstGeom>
-          <a:noFill/>
-          <a:ln/>
-        </p:spPr>
-        <p:txBody>
-          <a:bodyPr wrap="square" lIns="0" tIns="0" rIns="0" bIns="0" rtlCol="0" anchor="ctr"/>
-          <a:lstStyle/>
-          <a:p>
-            <a:pPr algn="r" indent="0" marL="0">
-              <a:buNone/>
-            </a:pPr>
-            <a:r>
-              <a:rPr lang="en-US" sz="1000" b="1" dirty="0">
-                <a:solidFill>
-                  <a:schemeClr val="tx1"/>
-                </a:solidFill>
-              </a:rPr>
-              <a:t>ささエール</a:t>
-            </a:r>
-            <a:endParaRPr lang="en-US" sz="1000" dirty="0"/>
-          </a:p>
-        </p:txBody>
-      </p:sp>
     </p:spTree>
   </p:cSld>
   <p:clrMapOvr>
@@ -1603,9 +1460,16 @@
   <p:cSld name="MANA_CONTENT">
     <p:bg>
       <p:bgPr>
-        <a:solidFill>
-          <a:srgbClr val="FFFFFF"/>
-        </a:solidFill>
+        <a:blipFill dpi="0" rotWithShape="1">
+          <a:blip r:embed="rId1">
+            <a:lum/>
+          </a:blip>
+          <a:srcRect/>
+          <a:stretch>
+            <a:fillRect/>
+          </a:stretch>
+        </a:blipFill>
+        <a:effectLst/>
       </p:bgPr>
     </p:bg>
     <p:spTree>
@@ -1624,16 +1488,36 @@
       </p:grpSpPr>
       <p:sp>
         <p:nvSpPr>
-          <p:cNvPr id="2" name="Text 0"/>
+          <p:cNvPr id="2" name="Shape 0"/>
           <p:cNvSpPr/>
-          <p:nvPr>
-            <p:ph idx="100" type="title" hasCustomPrompt="1"/>
-          </p:nvPr>
-        </p:nvSpPr>
-        <p:spPr>
-          <a:xfrm>
-            <a:off x="548640" y="658368"/>
-            <a:ext cx="8046720" cy="566928"/>
+          <p:nvPr/>
+        </p:nvSpPr>
+        <p:spPr>
+          <a:xfrm>
+            <a:off x="6400800" y="4754880"/>
+            <a:ext cx="2423160" cy="274320"/>
+          </a:xfrm>
+          <a:prstGeom prst="rect">
+            <a:avLst>
+              <a:gd name="adj" fmla="val 50000"/>
+            </a:avLst>
+          </a:prstGeom>
+          <a:solidFill>
+            <a:srgbClr val="1A1A1A"/>
+          </a:solidFill>
+          <a:ln/>
+        </p:spPr>
+      </p:sp>
+      <p:sp>
+        <p:nvSpPr>
+          <p:cNvPr id="3" name="Text 1"/>
+          <p:cNvSpPr/>
+          <p:nvPr/>
+        </p:nvSpPr>
+        <p:spPr>
+          <a:xfrm>
+            <a:off x="6510528" y="4754880"/>
+            <a:ext cx="1828800" cy="274320"/>
           </a:xfrm>
           <a:prstGeom prst="rect">
             <a:avLst/>
@@ -1642,35 +1526,37 @@
           <a:ln/>
         </p:spPr>
         <p:txBody>
-          <a:bodyPr wrap="square" rtlCol="0"/>
-          <a:lstStyle>
-            <a:lvl1pPr algn="l" indent="0" marL="0">
-              <a:buNone/>
-              <a:defRPr lang="en-US" sz="2400" b="1" dirty="0">
-                <a:solidFill>
-                  <a:schemeClr val="tx1"/>
-                </a:solidFill>
-              </a:defRPr>
-            </a:lvl1pPr>
-          </a:lstStyle>
-          <a:p>
-            <a:pPr algn="l" indent="0" marL="0">
-              <a:buNone/>
-            </a:pPr>
-            <a:endParaRPr lang="en-US" sz="2400" dirty="0"/>
-          </a:p>
-        </p:txBody>
-      </p:sp>
-      <p:sp>
-        <p:nvSpPr>
-          <p:cNvPr id="3" name="Text 0"/>
+          <a:bodyPr wrap="square" lIns="0" tIns="0" rIns="0" bIns="0" rtlCol="0" anchor="ctr"/>
+          <a:lstStyle/>
+          <a:p>
+            <a:pPr indent="0" marL="0">
+              <a:buNone/>
+            </a:pPr>
+            <a:r>
+              <a:rPr lang="ja-JP" altLang="en-US" sz="850" b="1" dirty="0">
+                <a:solidFill>
+                  <a:srgbClr val="FFFFFF"/>
+                </a:solidFill>
+                <a:latin typeface="Noto Sans JP" pitchFamily="34" charset="0"/>
+                <a:ea typeface="Noto Sans JP" pitchFamily="34" charset="-122"/>
+                <a:cs typeface="Noto Sans JP" pitchFamily="34" charset="-120"/>
+              </a:rPr>
+              <a:t>ささエール｜OFFICE PLATA</a:t>
+            </a:r>
+            <a:endParaRPr lang="ja-JP" sz="850" dirty="0"/>
+          </a:p>
+        </p:txBody>
+      </p:sp>
+      <p:sp>
+        <p:nvSpPr>
+          <p:cNvPr id="4" name="Text 2"/>
           <p:cNvSpPr/>
           <p:nvPr/>
         </p:nvSpPr>
         <p:spPr>
           <a:xfrm>
-            <a:off x="548640" y="4773168"/>
-            <a:ext cx="6400800" cy="228600"/>
+            <a:off x="365760" y="4754880"/>
+            <a:ext cx="5852160" cy="274320"/>
           </a:xfrm>
           <a:prstGeom prst="rect">
             <a:avLst/>
@@ -1686,14 +1572,17 @@
               <a:buNone/>
             </a:pPr>
             <a:r>
-              <a:rPr lang="en-US" sz="900" dirty="0">
-                <a:solidFill>
-                  <a:schemeClr val="tx2"/>
-                </a:solidFill>
+              <a:rPr lang="ja-JP" altLang="en-US" sz="850" dirty="0">
+                <a:solidFill>
+                  <a:srgbClr val="1A1A1A"/>
+                </a:solidFill>
+                <a:latin typeface="Noto Sans JP Medium" pitchFamily="34" charset="0"/>
+                <a:ea typeface="Noto Sans JP Medium" pitchFamily="34" charset="-122"/>
+                <a:cs typeface="Noto Sans JP Medium" pitchFamily="34" charset="-120"/>
               </a:rPr>
               <a:t>マナベル　第1回　オリエンテーション／作りたいものを言葉にする</a:t>
             </a:r>
-            <a:endParaRPr lang="en-US" sz="900" dirty="0"/>
+            <a:endParaRPr lang="ja-JP" sz="850" dirty="0"/>
           </a:p>
         </p:txBody>
       </p:sp>
@@ -1709,8 +1598,8 @@
         </p:nvSpPr>
         <p:spPr>
           <a:xfrm>
-            <a:off x="8229600" y="4773168"/>
-            <a:ext cx="365760" cy="228600"/>
+            <a:off x="8366760" y="4754880"/>
+            <a:ext cx="365760" cy="274320"/>
           </a:xfrm>
           <a:prstGeom prst="rect">
             <a:avLst/>
@@ -1722,169 +1611,26 @@
           </a:extLst>
         </p:spPr>
         <p:txBody>
-          <a:bodyPr/>
+          <a:bodyPr anchor="ctr"/>
           <a:lstStyle>
             <a:lvl1pPr>
-              <a:defRPr sz="900">
-                <a:solidFill>
-                  <a:srgbClr val="5A6872"/>
-                </a:solidFill>
+              <a:defRPr sz="850">
+                <a:solidFill>
+                  <a:srgbClr val="FFFFFF"/>
+                </a:solidFill>
+                <a:latin typeface="Noto Sans JP"/>
+                <a:ea typeface="Noto Sans JP"/>
+                <a:cs typeface="Noto Sans JP"/>
               </a:defRPr>
             </a:lvl1pPr>
           </a:lstStyle>
           <a:p>
             <a:pPr algn="r"/>
             <a:fld id="{F7021451-1387-4CA6-816F-3879F97B5CBC}" type="slidenum">
-              <a:rPr b="0" lang="en-US"/>
+              <a:rPr b="1" lang="en-US"/>
               <a:t>1003</a:t>
             </a:fld>
             <a:endParaRPr lang="en-US"/>
-          </a:p>
-        </p:txBody>
-      </p:sp>
-    </p:spTree>
-  </p:cSld>
-  <p:clrMapOvr>
-    <a:masterClrMapping/>
-  </p:clrMapOvr>
-</p:sldLayout>
-</file>
-
-<file path=ppt/slideLayouts/slideLayout4.xml><?xml version="1.0" encoding="utf-8"?>
-<p:sldLayout xmlns:a="http://schemas.openxmlformats.org/drawingml/2006/main" xmlns:r="http://schemas.openxmlformats.org/officeDocument/2006/relationships" xmlns:p="http://schemas.openxmlformats.org/presentationml/2006/main" preserve="1">
-  <p:cSld name="MANA_DARK">
-    <p:bg>
-      <p:bgPr>
-        <a:solidFill>
-          <a:srgbClr val="1A1A1A"/>
-        </a:solidFill>
-      </p:bgPr>
-    </p:bg>
-    <p:spTree>
-      <p:nvGrpSpPr>
-        <p:cNvPr id="1" name=""/>
-        <p:cNvGrpSpPr/>
-        <p:nvPr/>
-      </p:nvGrpSpPr>
-      <p:grpSpPr>
-        <a:xfrm>
-          <a:off x="0" y="0"/>
-          <a:ext cx="0" cy="0"/>
-          <a:chOff x="0" y="0"/>
-          <a:chExt cx="0" cy="0"/>
-        </a:xfrm>
-      </p:grpSpPr>
-      <p:sp>
-        <p:nvSpPr>
-          <p:cNvPr id="2" name="Text 0"/>
-          <p:cNvSpPr/>
-          <p:nvPr>
-            <p:ph idx="100" type="title" hasCustomPrompt="1"/>
-          </p:nvPr>
-        </p:nvSpPr>
-        <p:spPr>
-          <a:xfrm>
-            <a:off x="548640" y="1463040"/>
-            <a:ext cx="8046720" cy="1005840"/>
-          </a:xfrm>
-          <a:prstGeom prst="rect">
-            <a:avLst/>
-          </a:prstGeom>
-          <a:noFill/>
-          <a:ln/>
-        </p:spPr>
-        <p:txBody>
-          <a:bodyPr wrap="square" rtlCol="0"/>
-          <a:lstStyle>
-            <a:lvl1pPr algn="l" indent="0" marL="0">
-              <a:buNone/>
-              <a:defRPr lang="en-US" sz="3000" b="1" dirty="0">
-                <a:solidFill>
-                  <a:schemeClr val="accent1"/>
-                </a:solidFill>
-              </a:defRPr>
-            </a:lvl1pPr>
-          </a:lstStyle>
-          <a:p>
-            <a:pPr algn="l" indent="0" marL="0">
-              <a:buNone/>
-            </a:pPr>
-            <a:endParaRPr lang="en-US" sz="3000" dirty="0"/>
-          </a:p>
-        </p:txBody>
-      </p:sp>
-      <p:sp>
-        <p:nvSpPr>
-          <p:cNvPr id="3" name="Text 0"/>
-          <p:cNvSpPr/>
-          <p:nvPr>
-            <p:ph idx="101" type="body" hasCustomPrompt="1"/>
-          </p:nvPr>
-        </p:nvSpPr>
-        <p:spPr>
-          <a:xfrm>
-            <a:off x="548640" y="2606040"/>
-            <a:ext cx="8046720" cy="1097280"/>
-          </a:xfrm>
-          <a:prstGeom prst="rect">
-            <a:avLst/>
-          </a:prstGeom>
-          <a:noFill/>
-          <a:ln/>
-        </p:spPr>
-        <p:txBody>
-          <a:bodyPr wrap="square" rtlCol="0"/>
-          <a:lstStyle>
-            <a:lvl1pPr indent="0" marL="0">
-              <a:buNone/>
-              <a:defRPr lang="en-US" sz="1500" dirty="0">
-                <a:solidFill>
-                  <a:schemeClr val="bg1"/>
-                </a:solidFill>
-              </a:defRPr>
-            </a:lvl1pPr>
-          </a:lstStyle>
-          <a:p>
-            <a:pPr indent="0" marL="0">
-              <a:buNone/>
-            </a:pPr>
-            <a:endParaRPr lang="en-US" sz="1500" dirty="0"/>
-          </a:p>
-        </p:txBody>
-      </p:sp>
-      <p:sp>
-        <p:nvSpPr>
-          <p:cNvPr id="4" name="Text 0"/>
-          <p:cNvSpPr/>
-          <p:nvPr/>
-        </p:nvSpPr>
-        <p:spPr>
-          <a:xfrm>
-            <a:off x="548640" y="4526280"/>
-            <a:ext cx="5486400" cy="274320"/>
-          </a:xfrm>
-          <a:prstGeom prst="rect">
-            <a:avLst/>
-          </a:prstGeom>
-          <a:noFill/>
-          <a:ln/>
-        </p:spPr>
-        <p:txBody>
-          <a:bodyPr wrap="square" lIns="0" tIns="0" rIns="0" bIns="0" rtlCol="0" anchor="ctr"/>
-          <a:lstStyle/>
-          <a:p>
-            <a:pPr indent="0" marL="0">
-              <a:buNone/>
-            </a:pPr>
-            <a:r>
-              <a:rPr lang="en-US" sz="1000" dirty="0">
-                <a:solidFill>
-                  <a:schemeClr val="bg1"/>
-                </a:solidFill>
-              </a:rPr>
-              <a:t>マナベル｜AI×Lark 構築者育成講座</a:t>
-            </a:r>
-            <a:endParaRPr lang="en-US" sz="1000" dirty="0"/>
           </a:p>
         </p:txBody>
       </p:sp>
@@ -1925,8 +1671,8 @@
         </p:nvSpPr>
         <p:spPr>
           <a:xfrm>
-            <a:off x="8229600" y="4773168"/>
-            <a:ext cx="365760" cy="228600"/>
+            <a:off x="8366760" y="4754880"/>
+            <a:ext cx="365760" cy="274320"/>
           </a:xfrm>
           <a:prstGeom prst="rect">
             <a:avLst/>
@@ -1938,20 +1684,23 @@
           </a:extLst>
         </p:spPr>
         <p:txBody>
-          <a:bodyPr/>
+          <a:bodyPr anchor="ctr"/>
           <a:lstStyle>
             <a:lvl1pPr>
-              <a:defRPr sz="900">
-                <a:solidFill>
-                  <a:srgbClr val="5A6872"/>
-                </a:solidFill>
+              <a:defRPr sz="850">
+                <a:solidFill>
+                  <a:srgbClr val="FFFFFF"/>
+                </a:solidFill>
+                <a:latin typeface="Noto Sans JP"/>
+                <a:ea typeface="Noto Sans JP"/>
+                <a:cs typeface="Noto Sans JP"/>
               </a:defRPr>
             </a:lvl1pPr>
           </a:lstStyle>
           <a:p>
             <a:pPr algn="r"/>
             <a:fld id="{F7021451-1387-4CA6-816F-3879F97B5CBC}" type="slidenum">
-              <a:rPr b="0" lang="en-US"/>
+              <a:rPr b="1" lang="en-US"/>
               <a:t>null</a:t>
             </a:fld>
             <a:endParaRPr lang="en-US"/>
@@ -1965,7 +1714,6 @@
     <p:sldLayoutId id="2147483649" r:id="rId1"/>
     <p:sldLayoutId id="2147483650" r:id="rId2"/>
     <p:sldLayoutId id="2147483651" r:id="rId3"/>
-    <p:sldLayoutId id="2147483652" r:id="rId4"/>
   </p:sldLayoutIdLst>
   <p:hf sldNum="0" hdr="0" ftr="0" dt="0"/>
   <p:txStyles>
@@ -2238,50 +1986,92 @@
           <a:chExt cx="0" cy="0"/>
         </a:xfrm>
       </p:grpSpPr>
-      <p:sp>
-        <p:nvSpPr>
-          <p:cNvPr id="2" name="lesson-badge"/>
-          <p:cNvSpPr/>
-          <p:nvPr/>
-        </p:nvSpPr>
-        <p:spPr>
-          <a:xfrm>
-            <a:off x="548640" y="822960"/>
-            <a:ext cx="1828800" cy="566928"/>
-          </a:xfrm>
-          <a:prstGeom prst="roundRect">
-            <a:avLst>
-              <a:gd name="adj" fmla="val 50000"/>
-            </a:avLst>
+      <p:pic>
+        <p:nvPicPr>
+          <p:cNvPr id="2" name="portrait" descr="講師 笹原彰朗">    </p:cNvPr>
+          <p:cNvPicPr>
+            <a:picLocks noChangeAspect="1"/>
+          </p:cNvPicPr>
+          <p:nvPr/>
+        </p:nvPicPr>
+        <p:blipFill>
+          <a:blip r:embed="rId1"/>
+          <a:stretch>
+            <a:fillRect/>
+          </a:stretch>
+        </p:blipFill>
+        <p:spPr>
+          <a:xfrm>
+            <a:off x="6003588" y="1211580"/>
+            <a:ext cx="2866092" cy="3931920"/>
+          </a:xfrm>
+          <a:prstGeom prst="rect">
+            <a:avLst/>
+          </a:prstGeom>
+        </p:spPr>
+      </p:pic>
+      <p:sp>
+        <p:nvSpPr>
+          <p:cNvPr id="3" name="Text 0"/>
+          <p:cNvSpPr txBox="1"/>
+          <p:nvPr/>
+        </p:nvSpPr>
+        <p:spPr>
+          <a:xfrm rot="-240000">
+            <a:off x="457200" y="411480"/>
+            <a:ext cx="1600200" cy="603504"/>
+          </a:xfrm>
+          <a:prstGeom prst="rect">
+            <a:avLst/>
           </a:prstGeom>
           <a:solidFill>
             <a:srgbClr val="1A1A1A"/>
           </a:solidFill>
-          <a:ln w="12700">
+          <a:ln>
             <a:solidFill>
               <a:srgbClr val="1A1A1A"/>
             </a:solidFill>
-            <a:prstDash val="solid"/>
           </a:ln>
           <a:effectLst>
             <a:outerShdw sx="100000" sy="100000" kx="0" ky="0" algn="bl" rotWithShape="0" blurRad="101600" dist="38100" dir="2700000">
-              <a:srgbClr val="000000">
-                <a:alpha val="18000"/>
+              <a:srgbClr val="1A1A1A">
+                <a:alpha val="100000"/>
               </a:srgbClr>
             </a:outerShdw>
           </a:effectLst>
         </p:spPr>
-      </p:sp>
-      <p:sp>
-        <p:nvSpPr>
-          <p:cNvPr id="3" name="Text 1"/>
+        <p:txBody>
+          <a:bodyPr wrap="square" lIns="0" tIns="0" rIns="0" bIns="0" rtlCol="0" anchor="ctr"/>
+          <a:lstStyle/>
+          <a:p>
+            <a:pPr algn="ctr" indent="0" marL="0">
+              <a:buNone/>
+            </a:pPr>
+            <a:r>
+              <a:rPr lang="ja-JP" altLang="en-US" sz="2200" dirty="0">
+                <a:solidFill>
+                  <a:srgbClr val="FFD600"/>
+                </a:solidFill>
+                <a:latin typeface="Dela Gothic One" pitchFamily="34" charset="0"/>
+                <a:ea typeface="けいふぉんと" pitchFamily="34" charset="-122"/>
+                <a:cs typeface="Dela Gothic One" pitchFamily="34" charset="-120"/>
+              </a:rPr>
+              <a:t>第1回</a:t>
+            </a:r>
+            <a:endParaRPr lang="ja-JP" sz="2200" dirty="0"/>
+          </a:p>
+        </p:txBody>
+      </p:sp>
+      <p:sp>
+        <p:nvSpPr>
+          <p:cNvPr id="4" name="Text 1"/>
           <p:cNvSpPr txBox="1"/>
           <p:nvPr/>
         </p:nvSpPr>
         <p:spPr>
           <a:xfrm>
-            <a:off x="548640" y="822960"/>
-            <a:ext cx="1828800" cy="566928"/>
+            <a:off x="457200" y="1188720"/>
+            <a:ext cx="6035040" cy="1600200"/>
           </a:xfrm>
           <a:prstGeom prst="rect">
             <a:avLst/>
@@ -2290,6 +2080,83 @@
           <a:ln/>
         </p:spPr>
         <p:txBody>
+          <a:bodyPr wrap="square" lIns="0" tIns="0" rIns="0" bIns="0" rtlCol="0" anchor="ctr">
+            <a:normAutofit/>
+          </a:bodyPr>
+          <a:lstStyle/>
+          <a:p>
+            <a:pPr indent="0" marL="0">
+              <a:lnSpc>
+                <a:spcPct val="105000"/>
+              </a:lnSpc>
+              <a:buNone/>
+            </a:pPr>
+            <a:r>
+              <a:rPr lang="ja-JP" altLang="en-US" sz="3600" dirty="0">
+                <a:solidFill>
+                  <a:srgbClr val="1A1A1A"/>
+                </a:solidFill>
+                <a:latin typeface="Dela Gothic One" pitchFamily="34" charset="0"/>
+                <a:ea typeface="けいふぉんと" pitchFamily="34" charset="-122"/>
+                <a:cs typeface="Dela Gothic One" pitchFamily="34" charset="-120"/>
+              </a:rPr>
+              <a:t>オリエンテーション／</a:t>
+            </a:r>
+            <a:endParaRPr lang="ja-JP" sz="3600" dirty="0"/>
+          </a:p>
+          <a:p>
+            <a:pPr indent="0" marL="0">
+              <a:lnSpc>
+                <a:spcPct val="105000"/>
+              </a:lnSpc>
+              <a:buNone/>
+            </a:pPr>
+            <a:r>
+              <a:rPr lang="ja-JP" altLang="en-US" sz="3600" dirty="0">
+                <a:solidFill>
+                  <a:srgbClr val="1A1A1A"/>
+                </a:solidFill>
+                <a:latin typeface="Dela Gothic One" pitchFamily="34" charset="0"/>
+                <a:ea typeface="けいふぉんと" pitchFamily="34" charset="-122"/>
+                <a:cs typeface="Dela Gothic One" pitchFamily="34" charset="-120"/>
+              </a:rPr>
+              <a:t>作りたいものを言葉にする</a:t>
+            </a:r>
+            <a:endParaRPr lang="ja-JP" sz="3600" dirty="0"/>
+          </a:p>
+        </p:txBody>
+      </p:sp>
+      <p:sp>
+        <p:nvSpPr>
+          <p:cNvPr id="5" name="Text 2"/>
+          <p:cNvSpPr txBox="1"/>
+          <p:nvPr/>
+        </p:nvSpPr>
+        <p:spPr>
+          <a:xfrm rot="-120000">
+            <a:off x="457200" y="2971800"/>
+            <a:ext cx="4937760" cy="502920"/>
+          </a:xfrm>
+          <a:prstGeom prst="rect">
+            <a:avLst/>
+          </a:prstGeom>
+          <a:solidFill>
+            <a:srgbClr val="DD6420"/>
+          </a:solidFill>
+          <a:ln w="19050">
+            <a:solidFill>
+              <a:srgbClr val="1A1A1A"/>
+            </a:solidFill>
+          </a:ln>
+          <a:effectLst>
+            <a:outerShdw sx="100000" sy="100000" kx="0" ky="0" algn="bl" rotWithShape="0" blurRad="101600" dist="38100" dir="2700000">
+              <a:srgbClr val="1A1A1A">
+                <a:alpha val="100000"/>
+              </a:srgbClr>
+            </a:outerShdw>
+          </a:effectLst>
+        </p:spPr>
+        <p:txBody>
           <a:bodyPr wrap="square" lIns="0" tIns="0" rIns="0" bIns="0" rtlCol="0" anchor="ctr"/>
           <a:lstStyle/>
           <a:p>
@@ -2297,123 +2164,38 @@
               <a:buNone/>
             </a:pPr>
             <a:r>
-              <a:rPr lang="en-US" sz="2200" b="1" dirty="0">
-                <a:solidFill>
-                  <a:schemeClr val="accent1"/>
-                </a:solidFill>
-              </a:rPr>
-              <a:t>第1回</a:t>
-            </a:r>
-            <a:endParaRPr lang="en-US" sz="2200" dirty="0"/>
-          </a:p>
-        </p:txBody>
-      </p:sp>
-      <p:sp>
-        <p:nvSpPr>
-          <p:cNvPr id="4" name="Text 0"/>
+              <a:rPr lang="ja-JP" altLang="en-US" sz="1600" b="1" dirty="0">
+                <a:solidFill>
+                  <a:srgbClr val="FFFFFF"/>
+                </a:solidFill>
+                <a:latin typeface="Noto Sans JP" pitchFamily="34" charset="0"/>
+                <a:ea typeface="Noto Sans JP" pitchFamily="34" charset="-122"/>
+                <a:cs typeface="Noto Sans JP" pitchFamily="34" charset="-120"/>
+              </a:rPr>
+              <a:t>フェーズ1 土台をつくる｜第1週</a:t>
+            </a:r>
+            <a:endParaRPr lang="ja-JP" sz="1600" dirty="0"/>
+          </a:p>
+        </p:txBody>
+      </p:sp>
+      <p:sp>
+        <p:nvSpPr>
+          <p:cNvPr id="6" name="card"/>
           <p:cNvSpPr/>
-          <p:nvPr>
-            <p:ph idx="100" type="title" hasCustomPrompt="1"/>
-          </p:nvPr>
-        </p:nvSpPr>
-        <p:spPr>
-          <a:xfrm>
-            <a:off x="548640" y="1691640"/>
-            <a:ext cx="5852160" cy="1371600"/>
-          </a:xfrm>
-          <a:prstGeom prst="rect">
-            <a:avLst/>
-          </a:prstGeom>
-          <a:noFill/>
-          <a:ln/>
-        </p:spPr>
-        <p:txBody>
-          <a:bodyPr wrap="square" lIns="0" tIns="0" rIns="0" bIns="0" rtlCol="0" anchor="t"/>
-          <a:lstStyle/>
-          <a:p>
-            <a:pPr algn="l" indent="0" marL="0">
-              <a:buNone/>
-            </a:pPr>
-            <a:r>
-              <a:rPr lang="en-US" sz="3200" b="1" dirty="0">
-                <a:solidFill>
-                  <a:schemeClr val="tx1"/>
-                </a:solidFill>
-              </a:rPr>
-              <a:t>オリエンテーション／</a:t>
-            </a:r>
-            <a:endParaRPr lang="en-US" sz="3200" dirty="0"/>
-          </a:p>
-          <a:p>
-            <a:pPr algn="l" indent="0" marL="0">
-              <a:buNone/>
-            </a:pPr>
-            <a:r>
-              <a:rPr lang="en-US" sz="3200" b="1" dirty="0">
-                <a:solidFill>
-                  <a:schemeClr val="tx1"/>
-                </a:solidFill>
-              </a:rPr>
-              <a:t>作りたいものを言葉にする</a:t>
-            </a:r>
-            <a:endParaRPr lang="en-US" sz="3200" dirty="0"/>
-          </a:p>
-        </p:txBody>
-      </p:sp>
-      <p:sp>
-        <p:nvSpPr>
-          <p:cNvPr id="5" name="Text 0"/>
-          <p:cNvSpPr/>
-          <p:nvPr>
-            <p:ph idx="101" type="body" hasCustomPrompt="1"/>
-          </p:nvPr>
-        </p:nvSpPr>
-        <p:spPr>
-          <a:xfrm>
-            <a:off x="548640" y="3246120"/>
-            <a:ext cx="5852160" cy="457200"/>
-          </a:xfrm>
-          <a:prstGeom prst="rect">
-            <a:avLst/>
-          </a:prstGeom>
-          <a:noFill/>
-          <a:ln/>
-        </p:spPr>
-        <p:txBody>
-          <a:bodyPr wrap="square" lIns="0" tIns="0" rIns="0" bIns="0" rtlCol="0"/>
-          <a:lstStyle/>
-          <a:p>
-            <a:pPr indent="0" marL="0">
-              <a:buNone/>
-            </a:pPr>
-            <a:r>
-              <a:rPr lang="en-US" sz="1400" dirty="0">
-                <a:solidFill>
-                  <a:schemeClr val="tx1"/>
-                </a:solidFill>
-              </a:rPr>
-              <a:t>フェーズ1 土台をつくる　｜　第1週</a:t>
-            </a:r>
-            <a:endParaRPr lang="en-US" sz="1400" dirty="0"/>
-          </a:p>
-        </p:txBody>
-      </p:sp>
-      <p:sp>
-        <p:nvSpPr>
-          <p:cNvPr id="6" name="title-circle"/>
-          <p:cNvSpPr/>
-          <p:nvPr/>
-        </p:nvSpPr>
-        <p:spPr>
-          <a:xfrm>
-            <a:off x="6537960" y="1188720"/>
-            <a:ext cx="2103120" cy="2103120"/>
-          </a:xfrm>
-          <a:prstGeom prst="ellipse">
-            <a:avLst/>
+          <p:nvPr/>
+        </p:nvSpPr>
+        <p:spPr>
+          <a:xfrm>
+            <a:off x="457200" y="3730752"/>
+            <a:ext cx="4937760" cy="896112"/>
+          </a:xfrm>
+          <a:prstGeom prst="roundRect">
+            <a:avLst>
+              <a:gd name="adj" fmla="val 10204"/>
+            </a:avLst>
           </a:prstGeom>
           <a:solidFill>
-            <a:schemeClr val="bg1"/>
+            <a:srgbClr val="FFFFFF"/>
           </a:solidFill>
           <a:ln w="25400">
             <a:solidFill>
@@ -2422,38 +2204,76 @@
             <a:prstDash val="solid"/>
           </a:ln>
           <a:effectLst>
-            <a:outerShdw sx="100000" sy="100000" kx="0" ky="0" algn="bl" rotWithShape="0" blurRad="101600" dist="38100" dir="2700000">
-              <a:srgbClr val="000000">
-                <a:alpha val="18000"/>
+            <a:outerShdw sx="100000" sy="100000" kx="0" ky="0" algn="bl" rotWithShape="0" blurRad="101600" dist="50800" dir="2700000">
+              <a:srgbClr val="1A1A1A">
+                <a:alpha val="100000"/>
               </a:srgbClr>
             </a:outerShdw>
           </a:effectLst>
         </p:spPr>
       </p:sp>
-      <p:pic>
-        <p:nvPicPr>
-          <p:cNvPr id="7" name="title-icon" descr="preencoded.png">    </p:cNvPr>
-          <p:cNvPicPr>
-            <a:picLocks noChangeAspect="1"/>
-          </p:cNvPicPr>
-          <p:nvPr/>
-        </p:nvPicPr>
-        <p:blipFill>
-          <a:blip r:embed="rId1"/>
-          <a:stretch>
-            <a:fillRect/>
-          </a:stretch>
-        </p:blipFill>
-        <p:spPr>
-          <a:xfrm>
-            <a:off x="7086600" y="1737360"/>
-            <a:ext cx="1005840" cy="1005840"/>
-          </a:xfrm>
-          <a:prstGeom prst="rect">
-            <a:avLst/>
-          </a:prstGeom>
-        </p:spPr>
-      </p:pic>
+      <p:sp>
+        <p:nvSpPr>
+          <p:cNvPr id="7" name="Text 4"/>
+          <p:cNvSpPr txBox="1"/>
+          <p:nvPr/>
+        </p:nvSpPr>
+        <p:spPr>
+          <a:xfrm>
+            <a:off x="658368" y="3767328"/>
+            <a:ext cx="4572000" cy="822960"/>
+          </a:xfrm>
+          <a:prstGeom prst="rect">
+            <a:avLst/>
+          </a:prstGeom>
+          <a:noFill/>
+          <a:ln/>
+        </p:spPr>
+        <p:txBody>
+          <a:bodyPr wrap="square" lIns="0" tIns="0" rIns="0" bIns="0" rtlCol="0" anchor="ctr"/>
+          <a:lstStyle/>
+          <a:p>
+            <a:pPr indent="0" marL="0">
+              <a:spcAft>
+                <a:spcPts val="200"/>
+              </a:spcAft>
+              <a:buNone/>
+            </a:pPr>
+            <a:r>
+              <a:rPr lang="ja-JP" altLang="en-US" sz="1500" b="1" dirty="0">
+                <a:solidFill>
+                  <a:srgbClr val="1A1A1A"/>
+                </a:solidFill>
+                <a:latin typeface="Noto Sans JP" pitchFamily="34" charset="0"/>
+                <a:ea typeface="Noto Sans JP" pitchFamily="34" charset="-122"/>
+                <a:cs typeface="Noto Sans JP" pitchFamily="34" charset="-120"/>
+              </a:rPr>
+              <a:t>マナベル｜AI×Lark 構築者育成講座</a:t>
+            </a:r>
+            <a:endParaRPr lang="ja-JP" sz="1500" dirty="0"/>
+          </a:p>
+          <a:p>
+            <a:pPr indent="0" marL="0">
+              <a:spcAft>
+                <a:spcPts val="200"/>
+              </a:spcAft>
+              <a:buNone/>
+            </a:pPr>
+            <a:r>
+              <a:rPr lang="ja-JP" altLang="en-US" sz="1150" b="1" dirty="0">
+                <a:solidFill>
+                  <a:srgbClr val="DD6420"/>
+                </a:solidFill>
+                <a:latin typeface="Noto Sans JP" pitchFamily="34" charset="0"/>
+                <a:ea typeface="Noto Sans JP" pitchFamily="34" charset="-122"/>
+                <a:cs typeface="Noto Sans JP" pitchFamily="34" charset="-120"/>
+              </a:rPr>
+              <a:t>ささエール ／ OFFICE PLATA　笹原 彰朗</a:t>
+            </a:r>
+            <a:endParaRPr lang="ja-JP" sz="1500" dirty="0"/>
+          </a:p>
+        </p:txBody>
+      </p:sp>
     </p:spTree>
   </p:cSld>
   <p:clrMapOvr>
@@ -2479,18 +2299,92 @@
           <a:chExt cx="0" cy="0"/>
         </a:xfrm>
       </p:grpSpPr>
-      <p:sp>
-        <p:nvSpPr>
-          <p:cNvPr id="2" name="Text 0"/>
-          <p:cNvSpPr/>
-          <p:nvPr>
-            <p:ph idx="100" type="title" hasCustomPrompt="1"/>
-          </p:nvPr>
-        </p:nvSpPr>
-        <p:spPr>
-          <a:xfrm>
-            <a:off x="548640" y="1463040"/>
-            <a:ext cx="8046720" cy="1005840"/>
+      <p:pic>
+        <p:nvPicPr>
+          <p:cNvPr id="2" name="portrait" descr="講師 笹原彰朗">    </p:cNvPr>
+          <p:cNvPicPr>
+            <a:picLocks noChangeAspect="1"/>
+          </p:cNvPicPr>
+          <p:nvPr/>
+        </p:nvPicPr>
+        <p:blipFill>
+          <a:blip r:embed="rId1"/>
+          <a:stretch>
+            <a:fillRect/>
+          </a:stretch>
+        </p:blipFill>
+        <p:spPr>
+          <a:xfrm>
+            <a:off x="6003588" y="1211580"/>
+            <a:ext cx="2866092" cy="3931920"/>
+          </a:xfrm>
+          <a:prstGeom prst="rect">
+            <a:avLst/>
+          </a:prstGeom>
+        </p:spPr>
+      </p:pic>
+      <p:sp>
+        <p:nvSpPr>
+          <p:cNvPr id="3" name="Text 0"/>
+          <p:cNvSpPr txBox="1"/>
+          <p:nvPr/>
+        </p:nvSpPr>
+        <p:spPr>
+          <a:xfrm rot="-240000">
+            <a:off x="457200" y="548640"/>
+            <a:ext cx="1280160" cy="548640"/>
+          </a:xfrm>
+          <a:prstGeom prst="rect">
+            <a:avLst/>
+          </a:prstGeom>
+          <a:solidFill>
+            <a:srgbClr val="1A1A1A"/>
+          </a:solidFill>
+          <a:ln>
+            <a:solidFill>
+              <a:srgbClr val="1A1A1A"/>
+            </a:solidFill>
+          </a:ln>
+          <a:effectLst>
+            <a:outerShdw sx="100000" sy="100000" kx="0" ky="0" algn="bl" rotWithShape="0" blurRad="101600" dist="38100" dir="2700000">
+              <a:srgbClr val="1A1A1A">
+                <a:alpha val="100000"/>
+              </a:srgbClr>
+            </a:outerShdw>
+          </a:effectLst>
+        </p:spPr>
+        <p:txBody>
+          <a:bodyPr wrap="square" lIns="0" tIns="0" rIns="0" bIns="0" rtlCol="0" anchor="ctr"/>
+          <a:lstStyle/>
+          <a:p>
+            <a:pPr algn="ctr" indent="0" marL="0">
+              <a:buNone/>
+            </a:pPr>
+            <a:r>
+              <a:rPr lang="ja-JP" altLang="en-US" sz="2000" dirty="0">
+                <a:solidFill>
+                  <a:srgbClr val="FFD600"/>
+                </a:solidFill>
+                <a:latin typeface="Dela Gothic One" pitchFamily="34" charset="0"/>
+                <a:ea typeface="けいふぉんと" pitchFamily="34" charset="-122"/>
+                <a:cs typeface="Dela Gothic One" pitchFamily="34" charset="-120"/>
+              </a:rPr>
+              <a:t>次回</a:t>
+            </a:r>
+            <a:endParaRPr lang="ja-JP" sz="2000" dirty="0"/>
+          </a:p>
+        </p:txBody>
+      </p:sp>
+      <p:sp>
+        <p:nvSpPr>
+          <p:cNvPr id="4" name="Text 1"/>
+          <p:cNvSpPr txBox="1"/>
+          <p:nvPr/>
+        </p:nvSpPr>
+        <p:spPr>
+          <a:xfrm>
+            <a:off x="457200" y="1280160"/>
+            <a:ext cx="5852160" cy="1554480"/>
           </a:xfrm>
           <a:prstGeom prst="rect">
             <a:avLst/>
@@ -2499,36 +2393,90 @@
           <a:ln/>
         </p:spPr>
         <p:txBody>
-          <a:bodyPr wrap="square" lIns="0" tIns="0" rIns="0" bIns="0" rtlCol="0" anchor="t"/>
-          <a:lstStyle/>
-          <a:p>
-            <a:pPr algn="l" indent="0" marL="0">
-              <a:buNone/>
-            </a:pPr>
-            <a:r>
-              <a:rPr lang="en-US" sz="3000" b="1" dirty="0">
-                <a:solidFill>
-                  <a:schemeClr val="accent1"/>
-                </a:solidFill>
-              </a:rPr>
-              <a:t>次回：第2回 AIと話す型を身につける</a:t>
-            </a:r>
-            <a:endParaRPr lang="en-US" sz="3000" dirty="0"/>
-          </a:p>
-        </p:txBody>
-      </p:sp>
-      <p:sp>
-        <p:nvSpPr>
-          <p:cNvPr id="3" name="Text 0"/>
+          <a:bodyPr wrap="square" lIns="0" tIns="0" rIns="0" bIns="0" rtlCol="0" anchor="ctr">
+            <a:normAutofit/>
+          </a:bodyPr>
+          <a:lstStyle/>
+          <a:p>
+            <a:pPr indent="0" marL="0">
+              <a:buNone/>
+            </a:pPr>
+            <a:r>
+              <a:rPr lang="ja-JP" altLang="en-US" sz="3200" dirty="0">
+                <a:solidFill>
+                  <a:srgbClr val="1A1A1A"/>
+                </a:solidFill>
+                <a:latin typeface="Dela Gothic One" pitchFamily="34" charset="0"/>
+                <a:ea typeface="けいふぉんと" pitchFamily="34" charset="-122"/>
+                <a:cs typeface="Dela Gothic One" pitchFamily="34" charset="-120"/>
+              </a:rPr>
+              <a:t>第2回</a:t>
+            </a:r>
+            <a:endParaRPr lang="ja-JP" sz="3200" dirty="0"/>
+          </a:p>
+          <a:p>
+            <a:pPr indent="0" marL="0">
+              <a:buNone/>
+            </a:pPr>
+            <a:r>
+              <a:rPr lang="ja-JP" altLang="en-US" sz="3200" dirty="0">
+                <a:solidFill>
+                  <a:srgbClr val="1A1A1A"/>
+                </a:solidFill>
+                <a:latin typeface="Dela Gothic One" pitchFamily="34" charset="0"/>
+                <a:ea typeface="けいふぉんと" pitchFamily="34" charset="-122"/>
+                <a:cs typeface="Dela Gothic One" pitchFamily="34" charset="-120"/>
+              </a:rPr>
+              <a:t>AIと話す型を身につける</a:t>
+            </a:r>
+            <a:endParaRPr lang="ja-JP" sz="3200" dirty="0"/>
+          </a:p>
+        </p:txBody>
+      </p:sp>
+      <p:sp>
+        <p:nvSpPr>
+          <p:cNvPr id="5" name="card"/>
           <p:cNvSpPr/>
-          <p:nvPr>
-            <p:ph idx="101" type="body" hasCustomPrompt="1"/>
-          </p:nvPr>
-        </p:nvSpPr>
-        <p:spPr>
-          <a:xfrm>
-            <a:off x="548640" y="2606040"/>
-            <a:ext cx="8046720" cy="1097280"/>
+          <p:nvPr/>
+        </p:nvSpPr>
+        <p:spPr>
+          <a:xfrm>
+            <a:off x="457200" y="3108960"/>
+            <a:ext cx="5394960" cy="1325880"/>
+          </a:xfrm>
+          <a:prstGeom prst="roundRect">
+            <a:avLst>
+              <a:gd name="adj" fmla="val 6897"/>
+            </a:avLst>
+          </a:prstGeom>
+          <a:solidFill>
+            <a:srgbClr val="FFFFFF"/>
+          </a:solidFill>
+          <a:ln w="25400">
+            <a:solidFill>
+              <a:srgbClr val="1A1A1A"/>
+            </a:solidFill>
+            <a:prstDash val="solid"/>
+          </a:ln>
+          <a:effectLst>
+            <a:outerShdw sx="100000" sy="100000" kx="0" ky="0" algn="bl" rotWithShape="0" blurRad="101600" dist="50800" dir="2700000">
+              <a:srgbClr val="1A1A1A">
+                <a:alpha val="100000"/>
+              </a:srgbClr>
+            </a:outerShdw>
+          </a:effectLst>
+        </p:spPr>
+      </p:sp>
+      <p:sp>
+        <p:nvSpPr>
+          <p:cNvPr id="6" name="Text 3"/>
+          <p:cNvSpPr txBox="1"/>
+          <p:nvPr/>
+        </p:nvSpPr>
+        <p:spPr>
+          <a:xfrm>
+            <a:off x="685800" y="3200400"/>
+            <a:ext cx="4937760" cy="1143000"/>
           </a:xfrm>
           <a:prstGeom prst="rect">
             <a:avLst/>
@@ -2537,35 +2485,49 @@
           <a:ln/>
         </p:spPr>
         <p:txBody>
-          <a:bodyPr wrap="square" lIns="0" tIns="0" rIns="0" bIns="0" rtlCol="0" anchor="t"/>
+          <a:bodyPr wrap="square" lIns="0" tIns="0" rIns="0" bIns="0" rtlCol="0" anchor="ctr">
+            <a:normAutofit/>
+          </a:bodyPr>
           <a:lstStyle/>
           <a:p>
             <a:pPr indent="0" marL="0">
-              <a:buNone/>
-            </a:pPr>
-            <a:r>
-              <a:rPr lang="en-US" sz="1500" dirty="0">
-                <a:solidFill>
-                  <a:schemeClr val="bg1"/>
-                </a:solidFill>
+              <a:spcAft>
+                <a:spcPts val="400"/>
+              </a:spcAft>
+              <a:buNone/>
+            </a:pPr>
+            <a:r>
+              <a:rPr lang="ja-JP" altLang="en-US" sz="1400" b="1" dirty="0">
+                <a:solidFill>
+                  <a:srgbClr val="1A1A1A"/>
+                </a:solidFill>
+                <a:latin typeface="Noto Sans JP" pitchFamily="34" charset="0"/>
+                <a:ea typeface="Noto Sans JP" pitchFamily="34" charset="-122"/>
+                <a:cs typeface="Noto Sans JP" pitchFamily="34" charset="-120"/>
               </a:rPr>
               <a:t>わからないところは、講座グループでいつでも質問してください。</a:t>
             </a:r>
-            <a:endParaRPr lang="en-US" sz="1500" dirty="0"/>
+            <a:endParaRPr lang="ja-JP" sz="1400" dirty="0"/>
           </a:p>
           <a:p>
             <a:pPr indent="0" marL="0">
-              <a:buNone/>
-            </a:pPr>
-            <a:r>
-              <a:rPr lang="en-US" sz="1500" dirty="0">
-                <a:solidFill>
-                  <a:schemeClr val="bg1"/>
-                </a:solidFill>
+              <a:spcAft>
+                <a:spcPts val="400"/>
+              </a:spcAft>
+              <a:buNone/>
+            </a:pPr>
+            <a:r>
+              <a:rPr lang="ja-JP" altLang="en-US" sz="1400" b="1" dirty="0">
+                <a:solidFill>
+                  <a:srgbClr val="1A1A1A"/>
+                </a:solidFill>
+                <a:latin typeface="Noto Sans JP" pitchFamily="34" charset="0"/>
+                <a:ea typeface="Noto Sans JP" pitchFamily="34" charset="-122"/>
+                <a:cs typeface="Noto Sans JP" pitchFamily="34" charset="-120"/>
               </a:rPr>
               <a:t>APIキーやパスワードは送らないでください。</a:t>
             </a:r>
-            <a:endParaRPr lang="en-US" sz="1500" dirty="0"/>
+            <a:endParaRPr lang="ja-JP" sz="1400" dirty="0"/>
           </a:p>
         </p:txBody>
       </p:sp>
@@ -2597,15 +2559,58 @@
       <p:sp>
         <p:nvSpPr>
           <p:cNvPr id="2" name="Text 0"/>
-          <p:cNvSpPr/>
-          <p:nvPr>
-            <p:ph idx="100" type="title" hasCustomPrompt="1"/>
-          </p:nvPr>
-        </p:nvSpPr>
-        <p:spPr>
-          <a:xfrm>
-            <a:off x="548640" y="658368"/>
-            <a:ext cx="8046720" cy="566928"/>
+          <p:cNvSpPr txBox="1"/>
+          <p:nvPr/>
+        </p:nvSpPr>
+        <p:spPr>
+          <a:xfrm rot="-180000">
+            <a:off x="411480" y="201168"/>
+            <a:ext cx="1040587" cy="352044"/>
+          </a:xfrm>
+          <a:prstGeom prst="rect">
+            <a:avLst/>
+          </a:prstGeom>
+          <a:solidFill>
+            <a:srgbClr val="1A1A1A"/>
+          </a:solidFill>
+          <a:ln>
+            <a:solidFill>
+              <a:srgbClr val="1A1A1A"/>
+            </a:solidFill>
+          </a:ln>
+        </p:spPr>
+        <p:txBody>
+          <a:bodyPr wrap="square" lIns="0" tIns="0" rIns="0" bIns="0" rtlCol="0" anchor="ctr"/>
+          <a:lstStyle/>
+          <a:p>
+            <a:pPr algn="ctr" indent="0" marL="0">
+              <a:buNone/>
+            </a:pPr>
+            <a:r>
+              <a:rPr lang="ja-JP" altLang="en-US" sz="1100" dirty="0">
+                <a:solidFill>
+                  <a:srgbClr val="FFFFFF"/>
+                </a:solidFill>
+                <a:latin typeface="Dela Gothic One" pitchFamily="34" charset="0"/>
+                <a:ea typeface="けいふぉんと" pitchFamily="34" charset="-122"/>
+                <a:cs typeface="Dela Gothic One" pitchFamily="34" charset="-120"/>
+              </a:rPr>
+              <a:t>はじめに</a:t>
+            </a:r>
+            <a:endParaRPr lang="ja-JP" sz="1100" dirty="0"/>
+          </a:p>
+        </p:txBody>
+      </p:sp>
+      <p:sp>
+        <p:nvSpPr>
+          <p:cNvPr id="3" name="Text 1"/>
+          <p:cNvSpPr txBox="1"/>
+          <p:nvPr/>
+        </p:nvSpPr>
+        <p:spPr>
+          <a:xfrm>
+            <a:off x="411480" y="502920"/>
+            <a:ext cx="8321040" cy="685800"/>
           </a:xfrm>
           <a:prstGeom prst="rect">
             <a:avLst/>
@@ -2614,105 +2619,79 @@
           <a:ln/>
         </p:spPr>
         <p:txBody>
-          <a:bodyPr wrap="square" lIns="0" tIns="0" rIns="0" bIns="0" rtlCol="0" anchor="ctr"/>
-          <a:lstStyle/>
-          <a:p>
-            <a:pPr algn="l" indent="0" marL="0">
-              <a:buNone/>
-            </a:pPr>
-            <a:r>
-              <a:rPr lang="en-US" sz="2400" b="1" dirty="0">
-                <a:solidFill>
-                  <a:schemeClr val="tx1"/>
-                </a:solidFill>
+          <a:bodyPr wrap="square" lIns="0" tIns="0" rIns="0" bIns="0" rtlCol="0" anchor="ctr">
+            <a:normAutofit/>
+          </a:bodyPr>
+          <a:lstStyle/>
+          <a:p>
+            <a:pPr indent="0" marL="0">
+              <a:buNone/>
+            </a:pPr>
+            <a:r>
+              <a:rPr lang="ja-JP" altLang="en-US" sz="2600" dirty="0">
+                <a:solidFill>
+                  <a:srgbClr val="1A1A1A"/>
+                </a:solidFill>
+                <a:latin typeface="Dela Gothic One" pitchFamily="34" charset="0"/>
+                <a:ea typeface="けいふぉんと" pitchFamily="34" charset="-122"/>
+                <a:cs typeface="Dela Gothic One" pitchFamily="34" charset="-120"/>
               </a:rPr>
               <a:t>今日のゴールと流れ</a:t>
             </a:r>
-            <a:endParaRPr lang="en-US" sz="2400" dirty="0"/>
-          </a:p>
-        </p:txBody>
-      </p:sp>
-      <p:sp>
-        <p:nvSpPr>
-          <p:cNvPr id="3" name="chip"/>
+            <a:endParaRPr lang="ja-JP" sz="2600" dirty="0"/>
+          </a:p>
+        </p:txBody>
+      </p:sp>
+      <p:sp>
+        <p:nvSpPr>
+          <p:cNvPr id="4" name="card"/>
           <p:cNvSpPr/>
           <p:nvPr/>
         </p:nvSpPr>
         <p:spPr>
           <a:xfrm>
-            <a:off x="548640" y="292608"/>
-            <a:ext cx="932688" cy="292608"/>
+            <a:off x="502920" y="1371600"/>
+            <a:ext cx="3941064" cy="1280160"/>
           </a:xfrm>
           <a:prstGeom prst="roundRect">
             <a:avLst>
-              <a:gd name="adj" fmla="val 50000"/>
+              <a:gd name="adj" fmla="val 7143"/>
             </a:avLst>
           </a:prstGeom>
           <a:solidFill>
-            <a:schemeClr val="tx1"/>
+            <a:srgbClr val="FFFFFF"/>
           </a:solidFill>
-          <a:ln w="12700">
+          <a:ln w="25400">
             <a:solidFill>
-              <a:schemeClr val="tx1"/>
+              <a:srgbClr val="1A1A1A"/>
             </a:solidFill>
             <a:prstDash val="solid"/>
           </a:ln>
-        </p:spPr>
-      </p:sp>
-      <p:sp>
-        <p:nvSpPr>
-          <p:cNvPr id="4" name="chip-text"/>
-          <p:cNvSpPr txBox="1"/>
-          <p:nvPr/>
-        </p:nvSpPr>
-        <p:spPr>
-          <a:xfrm>
-            <a:off x="548640" y="292608"/>
-            <a:ext cx="932688" cy="292608"/>
-          </a:xfrm>
-          <a:prstGeom prst="rect">
-            <a:avLst/>
-          </a:prstGeom>
-          <a:noFill/>
-          <a:ln/>
-        </p:spPr>
-        <p:txBody>
-          <a:bodyPr wrap="square" lIns="0" tIns="0" rIns="0" bIns="0" rtlCol="0" anchor="ctr"/>
-          <a:lstStyle/>
-          <a:p>
-            <a:pPr algn="ctr" indent="0" marL="0">
-              <a:buNone/>
-            </a:pPr>
-            <a:r>
-              <a:rPr lang="en-US" sz="1100" b="1" dirty="0">
-                <a:solidFill>
-                  <a:schemeClr val="accent1"/>
-                </a:solidFill>
-              </a:rPr>
-              <a:t>はじめに</a:t>
-            </a:r>
-            <a:endParaRPr lang="en-US" sz="1100" dirty="0"/>
-          </a:p>
-        </p:txBody>
-      </p:sp>
-      <p:sp>
-        <p:nvSpPr>
-          <p:cNvPr id="5" name="card"/>
+          <a:effectLst>
+            <a:outerShdw sx="100000" sy="100000" kx="0" ky="0" algn="bl" rotWithShape="0" blurRad="101600" dist="50800" dir="2700000">
+              <a:srgbClr val="1A1A1A">
+                <a:alpha val="100000"/>
+              </a:srgbClr>
+            </a:outerShdw>
+          </a:effectLst>
+        </p:spPr>
+      </p:sp>
+      <p:sp>
+        <p:nvSpPr>
+          <p:cNvPr id="5" name="icon-circle"/>
           <p:cNvSpPr/>
           <p:nvPr/>
         </p:nvSpPr>
         <p:spPr>
           <a:xfrm>
-            <a:off x="548640" y="1417320"/>
-            <a:ext cx="3909060" cy="1280160"/>
-          </a:xfrm>
-          <a:prstGeom prst="roundRect">
-            <a:avLst>
-              <a:gd name="adj" fmla="val 8571"/>
-            </a:avLst>
+            <a:off x="685800" y="1572768"/>
+            <a:ext cx="438912" cy="438912"/>
+          </a:xfrm>
+          <a:prstGeom prst="ellipse">
+            <a:avLst/>
           </a:prstGeom>
           <a:solidFill>
-            <a:schemeClr val="bg2"/>
+            <a:srgbClr val="DD6420"/>
           </a:solidFill>
           <a:ln w="19050">
             <a:solidFill>
@@ -2720,43 +2699,11 @@
             </a:solidFill>
             <a:prstDash val="solid"/>
           </a:ln>
-          <a:effectLst>
-            <a:outerShdw sx="100000" sy="100000" kx="0" ky="0" algn="bl" rotWithShape="0" blurRad="101600" dist="38100" dir="2700000">
-              <a:srgbClr val="000000">
-                <a:alpha val="18000"/>
-              </a:srgbClr>
-            </a:outerShdw>
-          </a:effectLst>
-        </p:spPr>
-      </p:sp>
-      <p:sp>
-        <p:nvSpPr>
-          <p:cNvPr id="6" name="icon-circle"/>
-          <p:cNvSpPr/>
-          <p:nvPr/>
-        </p:nvSpPr>
-        <p:spPr>
-          <a:xfrm>
-            <a:off x="731520" y="1600200"/>
-            <a:ext cx="411480" cy="411480"/>
-          </a:xfrm>
-          <a:prstGeom prst="ellipse">
-            <a:avLst/>
-          </a:prstGeom>
-          <a:solidFill>
-            <a:schemeClr val="accent1"/>
-          </a:solidFill>
-          <a:ln w="15875">
-            <a:solidFill>
-              <a:srgbClr val="1A1A1A"/>
-            </a:solidFill>
-            <a:prstDash val="solid"/>
-          </a:ln>
         </p:spPr>
       </p:sp>
       <p:pic>
         <p:nvPicPr>
-          <p:cNvPr id="7" name="icon" descr="preencoded.png">    </p:cNvPr>
+          <p:cNvPr id="6" name="icon" descr="preencoded.png">    </p:cNvPr>
           <p:cNvPicPr>
             <a:picLocks noChangeAspect="1"/>
           </p:cNvPicPr>
@@ -2770,8 +2717,8 @@
         </p:blipFill>
         <p:spPr>
           <a:xfrm>
-            <a:off x="838505" y="1707185"/>
-            <a:ext cx="197510" cy="197510"/>
+            <a:off x="795528" y="1682496"/>
+            <a:ext cx="219456" cy="219456"/>
           </a:xfrm>
           <a:prstGeom prst="rect">
             <a:avLst/>
@@ -2780,14 +2727,14 @@
       </p:pic>
       <p:sp>
         <p:nvSpPr>
-          <p:cNvPr id="8" name="goal"/>
+          <p:cNvPr id="7" name="goal"/>
           <p:cNvSpPr txBox="1"/>
           <p:nvPr/>
         </p:nvSpPr>
         <p:spPr>
           <a:xfrm>
-            <a:off x="1280160" y="1508760"/>
-            <a:ext cx="2994660" cy="1097280"/>
+            <a:off x="1252728" y="1463040"/>
+            <a:ext cx="3026664" cy="1097280"/>
           </a:xfrm>
           <a:prstGeom prst="rect">
             <a:avLst/>
@@ -2796,42 +2743,79 @@
           <a:ln/>
         </p:spPr>
         <p:txBody>
-          <a:bodyPr wrap="square" lIns="0" tIns="0" rIns="0" bIns="0" rtlCol="0" anchor="ctr"/>
+          <a:bodyPr wrap="square" lIns="0" tIns="0" rIns="0" bIns="0" rtlCol="0" anchor="ctr">
+            <a:normAutofit/>
+          </a:bodyPr>
           <a:lstStyle/>
           <a:p>
             <a:pPr indent="0" marL="0">
               <a:buNone/>
             </a:pPr>
             <a:r>
-              <a:rPr lang="en-US" sz="1400" b="1" dirty="0">
-                <a:solidFill>
-                  <a:schemeClr val="tx1"/>
-                </a:solidFill>
+              <a:rPr lang="ja-JP" altLang="en-US" sz="1400" b="1" dirty="0">
+                <a:solidFill>
+                  <a:srgbClr val="1A1A1A"/>
+                </a:solidFill>
+                <a:latin typeface="Noto Sans JP" pitchFamily="34" charset="0"/>
+                <a:ea typeface="Noto Sans JP" pitchFamily="34" charset="-122"/>
+                <a:cs typeface="Noto Sans JP" pitchFamily="34" charset="-120"/>
               </a:rPr>
               <a:t>「構築者」とは何か、8週間後にどこまで作れるかがわかる</a:t>
             </a:r>
-            <a:endParaRPr lang="en-US" sz="1400" dirty="0"/>
-          </a:p>
-        </p:txBody>
-      </p:sp>
-      <p:sp>
-        <p:nvSpPr>
-          <p:cNvPr id="9" name="card"/>
+            <a:endParaRPr lang="ja-JP" sz="1400" dirty="0"/>
+          </a:p>
+        </p:txBody>
+      </p:sp>
+      <p:sp>
+        <p:nvSpPr>
+          <p:cNvPr id="8" name="card"/>
           <p:cNvSpPr/>
           <p:nvPr/>
         </p:nvSpPr>
         <p:spPr>
           <a:xfrm>
-            <a:off x="4686300" y="1417320"/>
-            <a:ext cx="3909060" cy="1280160"/>
+            <a:off x="4700016" y="1371600"/>
+            <a:ext cx="3941064" cy="1280160"/>
           </a:xfrm>
           <a:prstGeom prst="roundRect">
             <a:avLst>
-              <a:gd name="adj" fmla="val 8571"/>
+              <a:gd name="adj" fmla="val 7143"/>
             </a:avLst>
           </a:prstGeom>
           <a:solidFill>
-            <a:schemeClr val="bg2"/>
+            <a:srgbClr val="FFFFFF"/>
+          </a:solidFill>
+          <a:ln w="25400">
+            <a:solidFill>
+              <a:srgbClr val="1A1A1A"/>
+            </a:solidFill>
+            <a:prstDash val="solid"/>
+          </a:ln>
+          <a:effectLst>
+            <a:outerShdw sx="100000" sy="100000" kx="0" ky="0" algn="bl" rotWithShape="0" blurRad="101600" dist="50800" dir="2700000">
+              <a:srgbClr val="1A1A1A">
+                <a:alpha val="100000"/>
+              </a:srgbClr>
+            </a:outerShdw>
+          </a:effectLst>
+        </p:spPr>
+      </p:sp>
+      <p:sp>
+        <p:nvSpPr>
+          <p:cNvPr id="9" name="icon-circle"/>
+          <p:cNvSpPr/>
+          <p:nvPr/>
+        </p:nvSpPr>
+        <p:spPr>
+          <a:xfrm>
+            <a:off x="4882896" y="1572768"/>
+            <a:ext cx="438912" cy="438912"/>
+          </a:xfrm>
+          <a:prstGeom prst="ellipse">
+            <a:avLst/>
+          </a:prstGeom>
+          <a:solidFill>
+            <a:srgbClr val="DD6420"/>
           </a:solidFill>
           <a:ln w="19050">
             <a:solidFill>
@@ -2839,43 +2823,11 @@
             </a:solidFill>
             <a:prstDash val="solid"/>
           </a:ln>
-          <a:effectLst>
-            <a:outerShdw sx="100000" sy="100000" kx="0" ky="0" algn="bl" rotWithShape="0" blurRad="101600" dist="38100" dir="2700000">
-              <a:srgbClr val="000000">
-                <a:alpha val="18000"/>
-              </a:srgbClr>
-            </a:outerShdw>
-          </a:effectLst>
-        </p:spPr>
-      </p:sp>
-      <p:sp>
-        <p:nvSpPr>
-          <p:cNvPr id="10" name="icon-circle"/>
-          <p:cNvSpPr/>
-          <p:nvPr/>
-        </p:nvSpPr>
-        <p:spPr>
-          <a:xfrm>
-            <a:off x="4869180" y="1600200"/>
-            <a:ext cx="411480" cy="411480"/>
-          </a:xfrm>
-          <a:prstGeom prst="ellipse">
-            <a:avLst/>
-          </a:prstGeom>
-          <a:solidFill>
-            <a:schemeClr val="accent1"/>
-          </a:solidFill>
-          <a:ln w="15875">
-            <a:solidFill>
-              <a:srgbClr val="1A1A1A"/>
-            </a:solidFill>
-            <a:prstDash val="solid"/>
-          </a:ln>
         </p:spPr>
       </p:sp>
       <p:pic>
         <p:nvPicPr>
-          <p:cNvPr id="11" name="icon" descr="preencoded.png">    </p:cNvPr>
+          <p:cNvPr id="10" name="icon" descr="preencoded.png">    </p:cNvPr>
           <p:cNvPicPr>
             <a:picLocks noChangeAspect="1"/>
           </p:cNvPicPr>
@@ -2889,8 +2841,8 @@
         </p:blipFill>
         <p:spPr>
           <a:xfrm>
-            <a:off x="4976165" y="1707185"/>
-            <a:ext cx="197510" cy="197510"/>
+            <a:off x="4992624" y="1682496"/>
+            <a:ext cx="219456" cy="219456"/>
           </a:xfrm>
           <a:prstGeom prst="rect">
             <a:avLst/>
@@ -2899,14 +2851,14 @@
       </p:pic>
       <p:sp>
         <p:nvSpPr>
-          <p:cNvPr id="12" name="goal"/>
+          <p:cNvPr id="11" name="goal"/>
           <p:cNvSpPr txBox="1"/>
           <p:nvPr/>
         </p:nvSpPr>
         <p:spPr>
           <a:xfrm>
-            <a:off x="5417820" y="1508760"/>
-            <a:ext cx="2994660" cy="1097280"/>
+            <a:off x="5449824" y="1463040"/>
+            <a:ext cx="3026664" cy="1097280"/>
           </a:xfrm>
           <a:prstGeom prst="rect">
             <a:avLst/>
@@ -2915,59 +2867,105 @@
           <a:ln/>
         </p:spPr>
         <p:txBody>
+          <a:bodyPr wrap="square" lIns="0" tIns="0" rIns="0" bIns="0" rtlCol="0" anchor="ctr">
+            <a:normAutofit/>
+          </a:bodyPr>
+          <a:lstStyle/>
+          <a:p>
+            <a:pPr indent="0" marL="0">
+              <a:buNone/>
+            </a:pPr>
+            <a:r>
+              <a:rPr lang="ja-JP" altLang="en-US" sz="1400" b="1" dirty="0">
+                <a:solidFill>
+                  <a:srgbClr val="1A1A1A"/>
+                </a:solidFill>
+                <a:latin typeface="Noto Sans JP" pitchFamily="34" charset="0"/>
+                <a:ea typeface="Noto Sans JP" pitchFamily="34" charset="-122"/>
+                <a:cs typeface="Noto Sans JP" pitchFamily="34" charset="-120"/>
+              </a:rPr>
+              <a:t>自分の業務から「作りたいもの」を1つに絞れている</a:t>
+            </a:r>
+            <a:endParaRPr lang="ja-JP" sz="1400" dirty="0"/>
+          </a:p>
+        </p:txBody>
+      </p:sp>
+      <p:sp>
+        <p:nvSpPr>
+          <p:cNvPr id="12" name="Text 8"/>
+          <p:cNvSpPr txBox="1"/>
+          <p:nvPr/>
+        </p:nvSpPr>
+        <p:spPr>
+          <a:xfrm rot="-120000">
+            <a:off x="457200" y="2907792"/>
+            <a:ext cx="1915668" cy="352044"/>
+          </a:xfrm>
+          <a:prstGeom prst="rect">
+            <a:avLst/>
+          </a:prstGeom>
+          <a:solidFill>
+            <a:srgbClr val="1A1A1A"/>
+          </a:solidFill>
+          <a:ln>
+            <a:solidFill>
+              <a:srgbClr val="1A1A1A"/>
+            </a:solidFill>
+          </a:ln>
+        </p:spPr>
+        <p:txBody>
           <a:bodyPr wrap="square" lIns="0" tIns="0" rIns="0" bIns="0" rtlCol="0" anchor="ctr"/>
           <a:lstStyle/>
           <a:p>
-            <a:pPr indent="0" marL="0">
-              <a:buNone/>
-            </a:pPr>
-            <a:r>
-              <a:rPr lang="en-US" sz="1400" b="1" dirty="0">
-                <a:solidFill>
-                  <a:schemeClr val="tx1"/>
-                </a:solidFill>
-              </a:rPr>
-              <a:t>自分の業務から「作りたいもの」を1つに絞れている</a:t>
-            </a:r>
-            <a:endParaRPr lang="en-US" sz="1400" dirty="0"/>
-          </a:p>
-        </p:txBody>
-      </p:sp>
-      <p:sp>
-        <p:nvSpPr>
-          <p:cNvPr id="13" name="Text 9"/>
-          <p:cNvSpPr txBox="1"/>
-          <p:nvPr/>
-        </p:nvSpPr>
-        <p:spPr>
-          <a:xfrm>
-            <a:off x="548640" y="2971800"/>
-            <a:ext cx="3657600" cy="320040"/>
-          </a:xfrm>
-          <a:prstGeom prst="rect">
-            <a:avLst/>
-          </a:prstGeom>
-          <a:noFill/>
-          <a:ln/>
-        </p:spPr>
-        <p:txBody>
-          <a:bodyPr wrap="square" lIns="0" tIns="0" rIns="0" bIns="0" rtlCol="0" anchor="ctr"/>
-          <a:lstStyle/>
-          <a:p>
-            <a:pPr indent="0" marL="0">
-              <a:buNone/>
-            </a:pPr>
-            <a:r>
-              <a:rPr lang="en-US" sz="1300" b="1" dirty="0">
-                <a:solidFill>
-                  <a:schemeClr val="tx1"/>
-                </a:solidFill>
+            <a:pPr algn="ctr" indent="0" marL="0">
+              <a:buNone/>
+            </a:pPr>
+            <a:r>
+              <a:rPr lang="ja-JP" altLang="en-US" sz="1100" dirty="0">
+                <a:solidFill>
+                  <a:srgbClr val="FFFFFF"/>
+                </a:solidFill>
+                <a:latin typeface="Dela Gothic One" pitchFamily="34" charset="0"/>
+                <a:ea typeface="けいふぉんと" pitchFamily="34" charset="-122"/>
+                <a:cs typeface="Dela Gothic One" pitchFamily="34" charset="-120"/>
               </a:rPr>
               <a:t>今日の流れ（90分）</a:t>
             </a:r>
-            <a:endParaRPr lang="en-US" sz="1300" dirty="0"/>
-          </a:p>
-        </p:txBody>
+            <a:endParaRPr lang="ja-JP" sz="1100" dirty="0"/>
+          </a:p>
+        </p:txBody>
+      </p:sp>
+      <p:sp>
+        <p:nvSpPr>
+          <p:cNvPr id="13" name="Shape 9"/>
+          <p:cNvSpPr/>
+          <p:nvPr/>
+        </p:nvSpPr>
+        <p:spPr>
+          <a:xfrm>
+            <a:off x="502920" y="3364992"/>
+            <a:ext cx="8138160" cy="685800"/>
+          </a:xfrm>
+          <a:prstGeom prst="rect">
+            <a:avLst/>
+          </a:prstGeom>
+          <a:solidFill>
+            <a:srgbClr val="FFFFFF"/>
+          </a:solidFill>
+          <a:ln w="25400">
+            <a:solidFill>
+              <a:srgbClr val="1A1A1A"/>
+            </a:solidFill>
+            <a:prstDash val="solid"/>
+          </a:ln>
+          <a:effectLst>
+            <a:outerShdw sx="100000" sy="100000" kx="0" ky="0" algn="bl" rotWithShape="0" blurRad="101600" dist="50800" dir="2700000">
+              <a:srgbClr val="1A1A1A">
+                <a:alpha val="100000"/>
+              </a:srgbClr>
+            </a:outerShdw>
+          </a:effectLst>
+        </p:spPr>
       </p:sp>
       <p:sp>
         <p:nvSpPr>
@@ -2977,8 +2975,8 @@
         </p:nvSpPr>
         <p:spPr>
           <a:xfrm>
-            <a:off x="548640" y="3383280"/>
-            <a:ext cx="894080" cy="685800"/>
+            <a:off x="502920" y="3364992"/>
+            <a:ext cx="904240" cy="685800"/>
           </a:xfrm>
           <a:prstGeom prst="rect">
             <a:avLst/>
@@ -3002,8 +3000,8 @@
         </p:nvSpPr>
         <p:spPr>
           <a:xfrm>
-            <a:off x="548640" y="3383280"/>
-            <a:ext cx="894080" cy="685800"/>
+            <a:off x="502920" y="3364992"/>
+            <a:ext cx="904240" cy="685800"/>
           </a:xfrm>
           <a:prstGeom prst="rect">
             <a:avLst/>
@@ -3019,28 +3017,34 @@
               <a:buNone/>
             </a:pPr>
             <a:r>
-              <a:rPr lang="en-US" sz="1050" b="1" dirty="0">
+              <a:rPr lang="ja-JP" altLang="en-US" sz="1050" b="1" dirty="0">
                 <a:solidFill>
                   <a:srgbClr val="FFD600"/>
                 </a:solidFill>
+                <a:latin typeface="Noto Sans JP" pitchFamily="34" charset="0"/>
+                <a:ea typeface="Noto Sans JP" pitchFamily="34" charset="-122"/>
+                <a:cs typeface="Noto Sans JP" pitchFamily="34" charset="-120"/>
               </a:rPr>
               <a:t>自己紹介</a:t>
             </a:r>
-            <a:endParaRPr lang="en-US" sz="1050" dirty="0"/>
+            <a:endParaRPr lang="ja-JP" sz="1050" dirty="0"/>
           </a:p>
           <a:p>
             <a:pPr algn="ctr" indent="0" marL="0">
               <a:buNone/>
             </a:pPr>
             <a:r>
-              <a:rPr lang="en-US" sz="900" b="1" dirty="0">
+              <a:rPr lang="ja-JP" altLang="en-US" sz="900" b="1" dirty="0">
                 <a:solidFill>
                   <a:srgbClr val="FFD600"/>
                 </a:solidFill>
+                <a:latin typeface="Noto Sans JP" pitchFamily="34" charset="0"/>
+                <a:ea typeface="Noto Sans JP" pitchFamily="34" charset="-122"/>
+                <a:cs typeface="Noto Sans JP" pitchFamily="34" charset="-120"/>
               </a:rPr>
               <a:t>10分</a:t>
             </a:r>
-            <a:endParaRPr lang="en-US" sz="1050" dirty="0"/>
+            <a:endParaRPr lang="ja-JP" sz="1050" dirty="0"/>
           </a:p>
         </p:txBody>
       </p:sp>
@@ -3052,8 +3056,8 @@
         </p:nvSpPr>
         <p:spPr>
           <a:xfrm>
-            <a:off x="1442720" y="3383280"/>
-            <a:ext cx="894080" cy="685800"/>
+            <a:off x="1407160" y="3364992"/>
+            <a:ext cx="904240" cy="685800"/>
           </a:xfrm>
           <a:prstGeom prst="rect">
             <a:avLst/>
@@ -3077,8 +3081,8 @@
         </p:nvSpPr>
         <p:spPr>
           <a:xfrm>
-            <a:off x="1442720" y="3383280"/>
-            <a:ext cx="894080" cy="685800"/>
+            <a:off x="1407160" y="3364992"/>
+            <a:ext cx="904240" cy="685800"/>
           </a:xfrm>
           <a:prstGeom prst="rect">
             <a:avLst/>
@@ -3094,28 +3098,34 @@
               <a:buNone/>
             </a:pPr>
             <a:r>
-              <a:rPr lang="en-US" sz="1050" b="1" dirty="0">
+              <a:rPr lang="ja-JP" altLang="en-US" sz="1050" b="1" dirty="0">
                 <a:solidFill>
                   <a:srgbClr val="FFD600"/>
                 </a:solidFill>
+                <a:latin typeface="Noto Sans JP" pitchFamily="34" charset="0"/>
+                <a:ea typeface="Noto Sans JP" pitchFamily="34" charset="-122"/>
+                <a:cs typeface="Noto Sans JP" pitchFamily="34" charset="-120"/>
               </a:rPr>
               <a:t>説明①</a:t>
             </a:r>
-            <a:endParaRPr lang="en-US" sz="1050" dirty="0"/>
+            <a:endParaRPr lang="ja-JP" sz="1050" dirty="0"/>
           </a:p>
           <a:p>
             <a:pPr algn="ctr" indent="0" marL="0">
               <a:buNone/>
             </a:pPr>
             <a:r>
-              <a:rPr lang="en-US" sz="900" b="1" dirty="0">
+              <a:rPr lang="ja-JP" altLang="en-US" sz="900" b="1" dirty="0">
                 <a:solidFill>
                   <a:srgbClr val="FFD600"/>
                 </a:solidFill>
+                <a:latin typeface="Noto Sans JP" pitchFamily="34" charset="0"/>
+                <a:ea typeface="Noto Sans JP" pitchFamily="34" charset="-122"/>
+                <a:cs typeface="Noto Sans JP" pitchFamily="34" charset="-120"/>
               </a:rPr>
               <a:t>10分</a:t>
             </a:r>
-            <a:endParaRPr lang="en-US" sz="1050" dirty="0"/>
+            <a:endParaRPr lang="ja-JP" sz="1050" dirty="0"/>
           </a:p>
         </p:txBody>
       </p:sp>
@@ -3127,8 +3137,8 @@
         </p:nvSpPr>
         <p:spPr>
           <a:xfrm>
-            <a:off x="2336800" y="3383280"/>
-            <a:ext cx="1788160" cy="685800"/>
+            <a:off x="2311400" y="3364992"/>
+            <a:ext cx="1808480" cy="685800"/>
           </a:xfrm>
           <a:prstGeom prst="rect">
             <a:avLst/>
@@ -3152,8 +3162,8 @@
         </p:nvSpPr>
         <p:spPr>
           <a:xfrm>
-            <a:off x="2336800" y="3383280"/>
-            <a:ext cx="1788160" cy="685800"/>
+            <a:off x="2311400" y="3364992"/>
+            <a:ext cx="1808480" cy="685800"/>
           </a:xfrm>
           <a:prstGeom prst="rect">
             <a:avLst/>
@@ -3169,28 +3179,34 @@
               <a:buNone/>
             </a:pPr>
             <a:r>
-              <a:rPr lang="en-US" sz="1050" b="1" dirty="0">
+              <a:rPr lang="ja-JP" altLang="en-US" sz="1050" b="1" dirty="0">
                 <a:solidFill>
                   <a:srgbClr val="FFFFFF"/>
                 </a:solidFill>
+                <a:latin typeface="Noto Sans JP" pitchFamily="34" charset="0"/>
+                <a:ea typeface="Noto Sans JP" pitchFamily="34" charset="-122"/>
+                <a:cs typeface="Noto Sans JP" pitchFamily="34" charset="-120"/>
               </a:rPr>
               <a:t>ハンズオン①</a:t>
             </a:r>
-            <a:endParaRPr lang="en-US" sz="1050" dirty="0"/>
+            <a:endParaRPr lang="ja-JP" sz="1050" dirty="0"/>
           </a:p>
           <a:p>
             <a:pPr algn="ctr" indent="0" marL="0">
               <a:buNone/>
             </a:pPr>
             <a:r>
-              <a:rPr lang="en-US" sz="900" b="1" dirty="0">
+              <a:rPr lang="ja-JP" altLang="en-US" sz="900" b="1" dirty="0">
                 <a:solidFill>
                   <a:srgbClr val="FFFFFF"/>
                 </a:solidFill>
+                <a:latin typeface="Noto Sans JP" pitchFamily="34" charset="0"/>
+                <a:ea typeface="Noto Sans JP" pitchFamily="34" charset="-122"/>
+                <a:cs typeface="Noto Sans JP" pitchFamily="34" charset="-120"/>
               </a:rPr>
               <a:t>20分</a:t>
             </a:r>
-            <a:endParaRPr lang="en-US" sz="1050" dirty="0"/>
+            <a:endParaRPr lang="ja-JP" sz="1050" dirty="0"/>
           </a:p>
         </p:txBody>
       </p:sp>
@@ -3202,8 +3218,8 @@
         </p:nvSpPr>
         <p:spPr>
           <a:xfrm>
-            <a:off x="4124960" y="3383280"/>
-            <a:ext cx="894080" cy="685800"/>
+            <a:off x="4119880" y="3364992"/>
+            <a:ext cx="904240" cy="685800"/>
           </a:xfrm>
           <a:prstGeom prst="rect">
             <a:avLst/>
@@ -3227,8 +3243,8 @@
         </p:nvSpPr>
         <p:spPr>
           <a:xfrm>
-            <a:off x="4124960" y="3383280"/>
-            <a:ext cx="894080" cy="685800"/>
+            <a:off x="4119880" y="3364992"/>
+            <a:ext cx="904240" cy="685800"/>
           </a:xfrm>
           <a:prstGeom prst="rect">
             <a:avLst/>
@@ -3244,28 +3260,34 @@
               <a:buNone/>
             </a:pPr>
             <a:r>
-              <a:rPr lang="en-US" sz="1050" b="1" dirty="0">
+              <a:rPr lang="ja-JP" altLang="en-US" sz="1050" b="1" dirty="0">
                 <a:solidFill>
                   <a:srgbClr val="FFD600"/>
                 </a:solidFill>
+                <a:latin typeface="Noto Sans JP" pitchFamily="34" charset="0"/>
+                <a:ea typeface="Noto Sans JP" pitchFamily="34" charset="-122"/>
+                <a:cs typeface="Noto Sans JP" pitchFamily="34" charset="-120"/>
               </a:rPr>
               <a:t>説明②</a:t>
             </a:r>
-            <a:endParaRPr lang="en-US" sz="1050" dirty="0"/>
+            <a:endParaRPr lang="ja-JP" sz="1050" dirty="0"/>
           </a:p>
           <a:p>
             <a:pPr algn="ctr" indent="0" marL="0">
               <a:buNone/>
             </a:pPr>
             <a:r>
-              <a:rPr lang="en-US" sz="900" b="1" dirty="0">
+              <a:rPr lang="ja-JP" altLang="en-US" sz="900" b="1" dirty="0">
                 <a:solidFill>
                   <a:srgbClr val="FFD600"/>
                 </a:solidFill>
+                <a:latin typeface="Noto Sans JP" pitchFamily="34" charset="0"/>
+                <a:ea typeface="Noto Sans JP" pitchFamily="34" charset="-122"/>
+                <a:cs typeface="Noto Sans JP" pitchFamily="34" charset="-120"/>
               </a:rPr>
               <a:t>10分</a:t>
             </a:r>
-            <a:endParaRPr lang="en-US" sz="1050" dirty="0"/>
+            <a:endParaRPr lang="ja-JP" sz="1050" dirty="0"/>
           </a:p>
         </p:txBody>
       </p:sp>
@@ -3277,8 +3299,8 @@
         </p:nvSpPr>
         <p:spPr>
           <a:xfrm>
-            <a:off x="5019040" y="3383280"/>
-            <a:ext cx="1788160" cy="685800"/>
+            <a:off x="5024120" y="3364992"/>
+            <a:ext cx="1808480" cy="685800"/>
           </a:xfrm>
           <a:prstGeom prst="rect">
             <a:avLst/>
@@ -3302,8 +3324,8 @@
         </p:nvSpPr>
         <p:spPr>
           <a:xfrm>
-            <a:off x="5019040" y="3383280"/>
-            <a:ext cx="1788160" cy="685800"/>
+            <a:off x="5024120" y="3364992"/>
+            <a:ext cx="1808480" cy="685800"/>
           </a:xfrm>
           <a:prstGeom prst="rect">
             <a:avLst/>
@@ -3319,28 +3341,34 @@
               <a:buNone/>
             </a:pPr>
             <a:r>
-              <a:rPr lang="en-US" sz="1050" b="1" dirty="0">
+              <a:rPr lang="ja-JP" altLang="en-US" sz="1050" b="1" dirty="0">
                 <a:solidFill>
                   <a:srgbClr val="FFFFFF"/>
                 </a:solidFill>
+                <a:latin typeface="Noto Sans JP" pitchFamily="34" charset="0"/>
+                <a:ea typeface="Noto Sans JP" pitchFamily="34" charset="-122"/>
+                <a:cs typeface="Noto Sans JP" pitchFamily="34" charset="-120"/>
               </a:rPr>
               <a:t>ハンズオン②</a:t>
             </a:r>
-            <a:endParaRPr lang="en-US" sz="1050" dirty="0"/>
+            <a:endParaRPr lang="ja-JP" sz="1050" dirty="0"/>
           </a:p>
           <a:p>
             <a:pPr algn="ctr" indent="0" marL="0">
               <a:buNone/>
             </a:pPr>
             <a:r>
-              <a:rPr lang="en-US" sz="900" b="1" dirty="0">
+              <a:rPr lang="ja-JP" altLang="en-US" sz="900" b="1" dirty="0">
                 <a:solidFill>
                   <a:srgbClr val="FFFFFF"/>
                 </a:solidFill>
+                <a:latin typeface="Noto Sans JP" pitchFamily="34" charset="0"/>
+                <a:ea typeface="Noto Sans JP" pitchFamily="34" charset="-122"/>
+                <a:cs typeface="Noto Sans JP" pitchFamily="34" charset="-120"/>
               </a:rPr>
               <a:t>20分</a:t>
             </a:r>
-            <a:endParaRPr lang="en-US" sz="1050" dirty="0"/>
+            <a:endParaRPr lang="ja-JP" sz="1050" dirty="0"/>
           </a:p>
         </p:txBody>
       </p:sp>
@@ -3352,8 +3380,8 @@
         </p:nvSpPr>
         <p:spPr>
           <a:xfrm>
-            <a:off x="6807200" y="3383280"/>
-            <a:ext cx="1788160" cy="685800"/>
+            <a:off x="6832600" y="3364992"/>
+            <a:ext cx="1808480" cy="685800"/>
           </a:xfrm>
           <a:prstGeom prst="rect">
             <a:avLst/>
@@ -3377,8 +3405,8 @@
         </p:nvSpPr>
         <p:spPr>
           <a:xfrm>
-            <a:off x="6807200" y="3383280"/>
-            <a:ext cx="1788160" cy="685800"/>
+            <a:off x="6832600" y="3364992"/>
+            <a:ext cx="1808480" cy="685800"/>
           </a:xfrm>
           <a:prstGeom prst="rect">
             <a:avLst/>
@@ -3394,28 +3422,34 @@
               <a:buNone/>
             </a:pPr>
             <a:r>
-              <a:rPr lang="en-US" sz="1050" b="1" dirty="0">
+              <a:rPr lang="ja-JP" altLang="en-US" sz="1050" b="1" dirty="0">
                 <a:solidFill>
                   <a:srgbClr val="FFD600"/>
                 </a:solidFill>
+                <a:latin typeface="Noto Sans JP" pitchFamily="34" charset="0"/>
+                <a:ea typeface="Noto Sans JP" pitchFamily="34" charset="-122"/>
+                <a:cs typeface="Noto Sans JP" pitchFamily="34" charset="-120"/>
               </a:rPr>
               <a:t>共有・質問・宿題</a:t>
             </a:r>
-            <a:endParaRPr lang="en-US" sz="1050" dirty="0"/>
+            <a:endParaRPr lang="ja-JP" sz="1050" dirty="0"/>
           </a:p>
           <a:p>
             <a:pPr algn="ctr" indent="0" marL="0">
               <a:buNone/>
             </a:pPr>
             <a:r>
-              <a:rPr lang="en-US" sz="900" b="1" dirty="0">
+              <a:rPr lang="ja-JP" altLang="en-US" sz="900" b="1" dirty="0">
                 <a:solidFill>
                   <a:srgbClr val="FFD600"/>
                 </a:solidFill>
+                <a:latin typeface="Noto Sans JP" pitchFamily="34" charset="0"/>
+                <a:ea typeface="Noto Sans JP" pitchFamily="34" charset="-122"/>
+                <a:cs typeface="Noto Sans JP" pitchFamily="34" charset="-120"/>
               </a:rPr>
               <a:t>20分</a:t>
             </a:r>
-            <a:endParaRPr lang="en-US" sz="1050" dirty="0"/>
+            <a:endParaRPr lang="ja-JP" sz="1050" dirty="0"/>
           </a:p>
         </p:txBody>
       </p:sp>
@@ -3427,7 +3461,7 @@
         </p:nvSpPr>
         <p:spPr>
           <a:xfrm>
-            <a:off x="548640" y="4160520"/>
+            <a:off x="502920" y="4187952"/>
             <a:ext cx="3657600" cy="274320"/>
           </a:xfrm>
           <a:prstGeom prst="rect">
@@ -3444,10 +3478,13 @@
               <a:buNone/>
             </a:pPr>
             <a:r>
-              <a:rPr lang="en-US" sz="1000" dirty="0">
+              <a:rPr lang="ja-JP" altLang="en-US" sz="1050" b="1" dirty="0">
                 <a:solidFill>
                   <a:srgbClr val="1A1A1A"/>
                 </a:solidFill>
+                <a:latin typeface="Noto Sans JP" pitchFamily="34" charset="0"/>
+                <a:ea typeface="Noto Sans JP" pitchFamily="34" charset="-122"/>
+                <a:cs typeface="Noto Sans JP" pitchFamily="34" charset="-120"/>
               </a:rPr>
               <a:t>■ </a:t>
             </a:r>
@@ -3455,10 +3492,13 @@
               <a:buNone/>
             </a:pPr>
             <a:r>
-              <a:rPr lang="en-US" sz="1000" dirty="0">
-                <a:solidFill>
-                  <a:schemeClr val="tx2"/>
-                </a:solidFill>
+              <a:rPr lang="ja-JP" altLang="en-US" sz="1050" b="1" dirty="0">
+                <a:solidFill>
+                  <a:srgbClr val="1A1A1A"/>
+                </a:solidFill>
+                <a:latin typeface="Noto Sans JP" pitchFamily="34" charset="0"/>
+                <a:ea typeface="Noto Sans JP" pitchFamily="34" charset="-122"/>
+                <a:cs typeface="Noto Sans JP" pitchFamily="34" charset="-120"/>
               </a:rPr>
               <a:t>聞く　</a:t>
             </a:r>
@@ -3466,10 +3506,13 @@
               <a:buNone/>
             </a:pPr>
             <a:r>
-              <a:rPr lang="en-US" sz="1000" dirty="0">
+              <a:rPr lang="ja-JP" altLang="en-US" sz="1050" b="1" dirty="0">
                 <a:solidFill>
                   <a:srgbClr val="DD6420"/>
                 </a:solidFill>
+                <a:latin typeface="Noto Sans JP" pitchFamily="34" charset="0"/>
+                <a:ea typeface="Noto Sans JP" pitchFamily="34" charset="-122"/>
+                <a:cs typeface="Noto Sans JP" pitchFamily="34" charset="-120"/>
               </a:rPr>
               <a:t>■ </a:t>
             </a:r>
@@ -3477,14 +3520,17 @@
               <a:buNone/>
             </a:pPr>
             <a:r>
-              <a:rPr lang="en-US" sz="1000" dirty="0">
-                <a:solidFill>
-                  <a:schemeClr val="tx2"/>
-                </a:solidFill>
+              <a:rPr lang="ja-JP" altLang="en-US" sz="1050" b="1" dirty="0">
+                <a:solidFill>
+                  <a:srgbClr val="1A1A1A"/>
+                </a:solidFill>
+                <a:latin typeface="Noto Sans JP" pitchFamily="34" charset="0"/>
+                <a:ea typeface="Noto Sans JP" pitchFamily="34" charset="-122"/>
+                <a:cs typeface="Noto Sans JP" pitchFamily="34" charset="-120"/>
               </a:rPr>
               <a:t>手を動かす</a:t>
             </a:r>
-            <a:endParaRPr lang="en-US" sz="1000" dirty="0"/>
+            <a:endParaRPr lang="ja-JP" sz="1050" dirty="0"/>
           </a:p>
         </p:txBody>
       </p:sp>
@@ -3500,8 +3546,8 @@
         </p:nvSpPr>
         <p:spPr>
           <a:xfrm>
-            <a:off x="8229600" y="4773168"/>
-            <a:ext cx="365760" cy="228600"/>
+            <a:off x="8366760" y="4754880"/>
+            <a:ext cx="365760" cy="274320"/>
           </a:xfrm>
           <a:prstGeom prst="rect">
             <a:avLst/>
@@ -3513,20 +3559,23 @@
           </a:extLst>
         </p:spPr>
         <p:txBody>
-          <a:bodyPr/>
+          <a:bodyPr anchor="ctr"/>
           <a:lstStyle>
             <a:lvl1pPr>
-              <a:defRPr sz="900">
-                <a:solidFill>
-                  <a:srgbClr val="5A6872"/>
-                </a:solidFill>
+              <a:defRPr sz="850">
+                <a:solidFill>
+                  <a:srgbClr val="FFFFFF"/>
+                </a:solidFill>
+                <a:latin typeface="Noto Sans JP"/>
+                <a:ea typeface="Noto Sans JP"/>
+                <a:cs typeface="Noto Sans JP"/>
               </a:defRPr>
             </a:lvl1pPr>
           </a:lstStyle>
           <a:p>
             <a:pPr algn="r"/>
             <a:fld id="{F7021451-1387-4CA6-816F-3879F97B5CBC}" type="slidenum">
-              <a:rPr b="0" lang="en-US"/>
+              <a:rPr b="1" lang="en-US"/>
               <a:t>2</a:t>
             </a:fld>
             <a:endParaRPr lang="en-US"/>
@@ -3561,15 +3610,58 @@
       <p:sp>
         <p:nvSpPr>
           <p:cNvPr id="2" name="Text 0"/>
-          <p:cNvSpPr/>
-          <p:nvPr>
-            <p:ph idx="100" type="title" hasCustomPrompt="1"/>
-          </p:nvPr>
-        </p:nvSpPr>
-        <p:spPr>
-          <a:xfrm>
-            <a:off x="548640" y="658368"/>
-            <a:ext cx="8046720" cy="566928"/>
+          <p:cNvSpPr txBox="1"/>
+          <p:nvPr/>
+        </p:nvSpPr>
+        <p:spPr>
+          <a:xfrm rot="-180000">
+            <a:off x="411480" y="201168"/>
+            <a:ext cx="1478128" cy="352044"/>
+          </a:xfrm>
+          <a:prstGeom prst="rect">
+            <a:avLst/>
+          </a:prstGeom>
+          <a:solidFill>
+            <a:srgbClr val="1A1A1A"/>
+          </a:solidFill>
+          <a:ln>
+            <a:solidFill>
+              <a:srgbClr val="1A1A1A"/>
+            </a:solidFill>
+          </a:ln>
+        </p:spPr>
+        <p:txBody>
+          <a:bodyPr wrap="square" lIns="0" tIns="0" rIns="0" bIns="0" rtlCol="0" anchor="ctr"/>
+          <a:lstStyle/>
+          <a:p>
+            <a:pPr algn="ctr" indent="0" marL="0">
+              <a:buNone/>
+            </a:pPr>
+            <a:r>
+              <a:rPr lang="ja-JP" altLang="en-US" sz="1100" dirty="0">
+                <a:solidFill>
+                  <a:srgbClr val="FFFFFF"/>
+                </a:solidFill>
+                <a:latin typeface="Dela Gothic One" pitchFamily="34" charset="0"/>
+                <a:ea typeface="けいふぉんと" pitchFamily="34" charset="-122"/>
+                <a:cs typeface="Dela Gothic One" pitchFamily="34" charset="-120"/>
+              </a:rPr>
+              <a:t>説明① 10分</a:t>
+            </a:r>
+            <a:endParaRPr lang="ja-JP" sz="1100" dirty="0"/>
+          </a:p>
+        </p:txBody>
+      </p:sp>
+      <p:sp>
+        <p:nvSpPr>
+          <p:cNvPr id="3" name="Text 1"/>
+          <p:cNvSpPr txBox="1"/>
+          <p:nvPr/>
+        </p:nvSpPr>
+        <p:spPr>
+          <a:xfrm>
+            <a:off x="411480" y="502920"/>
+            <a:ext cx="8321040" cy="685800"/>
           </a:xfrm>
           <a:prstGeom prst="rect">
             <a:avLst/>
@@ -3578,105 +3670,107 @@
           <a:ln/>
         </p:spPr>
         <p:txBody>
-          <a:bodyPr wrap="square" lIns="0" tIns="0" rIns="0" bIns="0" rtlCol="0" anchor="ctr"/>
-          <a:lstStyle/>
-          <a:p>
-            <a:pPr algn="l" indent="0" marL="0">
-              <a:buNone/>
-            </a:pPr>
-            <a:r>
-              <a:rPr lang="en-US" sz="2400" b="1" dirty="0">
-                <a:solidFill>
-                  <a:schemeClr val="tx1"/>
-                </a:solidFill>
-              </a:rPr>
-              <a:t>この講座のゴールは「構築者」になること</a:t>
-            </a:r>
-            <a:endParaRPr lang="en-US" sz="2400" dirty="0"/>
-          </a:p>
-        </p:txBody>
-      </p:sp>
-      <p:sp>
-        <p:nvSpPr>
-          <p:cNvPr id="3" name="chip"/>
+          <a:bodyPr wrap="square" lIns="0" tIns="0" rIns="0" bIns="0" rtlCol="0" anchor="ctr">
+            <a:normAutofit/>
+          </a:bodyPr>
+          <a:lstStyle/>
+          <a:p>
+            <a:pPr indent="0" marL="0">
+              <a:buNone/>
+            </a:pPr>
+            <a:r>
+              <a:rPr lang="ja-JP" altLang="en-US" sz="2600" dirty="0">
+                <a:solidFill>
+                  <a:srgbClr val="1A1A1A"/>
+                </a:solidFill>
+                <a:latin typeface="Dela Gothic One" pitchFamily="34" charset="0"/>
+                <a:ea typeface="けいふぉんと" pitchFamily="34" charset="-122"/>
+                <a:cs typeface="Dela Gothic One" pitchFamily="34" charset="-120"/>
+              </a:rPr>
+              <a:t>この講座のゴールは</a:t>
+            </a:r>
+            <a:pPr indent="0" marL="0">
+              <a:buNone/>
+            </a:pPr>
+            <a:r>
+              <a:rPr lang="ja-JP" altLang="en-US" sz="2600" dirty="0">
+                <a:solidFill>
+                  <a:srgbClr val="DD6420"/>
+                </a:solidFill>
+                <a:latin typeface="Dela Gothic One" pitchFamily="34" charset="0"/>
+                <a:ea typeface="けいふぉんと" pitchFamily="34" charset="-122"/>
+                <a:cs typeface="Dela Gothic One" pitchFamily="34" charset="-120"/>
+              </a:rPr>
+              <a:t>「構築者」</a:t>
+            </a:r>
+            <a:pPr indent="0" marL="0">
+              <a:buNone/>
+            </a:pPr>
+            <a:r>
+              <a:rPr lang="ja-JP" altLang="en-US" sz="2600" dirty="0">
+                <a:solidFill>
+                  <a:srgbClr val="1A1A1A"/>
+                </a:solidFill>
+                <a:latin typeface="Dela Gothic One" pitchFamily="34" charset="0"/>
+                <a:ea typeface="けいふぉんと" pitchFamily="34" charset="-122"/>
+                <a:cs typeface="Dela Gothic One" pitchFamily="34" charset="-120"/>
+              </a:rPr>
+              <a:t>になること</a:t>
+            </a:r>
+            <a:endParaRPr lang="ja-JP" sz="2600" dirty="0"/>
+          </a:p>
+        </p:txBody>
+      </p:sp>
+      <p:sp>
+        <p:nvSpPr>
+          <p:cNvPr id="5" name="card"/>
           <p:cNvSpPr/>
           <p:nvPr/>
         </p:nvSpPr>
         <p:spPr>
           <a:xfrm>
-            <a:off x="548640" y="292608"/>
-            <a:ext cx="1344168" cy="292608"/>
+            <a:off x="502920" y="1463040"/>
+            <a:ext cx="8138160" cy="2011680"/>
           </a:xfrm>
           <a:prstGeom prst="roundRect">
             <a:avLst>
-              <a:gd name="adj" fmla="val 50000"/>
+              <a:gd name="adj" fmla="val 4545"/>
             </a:avLst>
           </a:prstGeom>
           <a:solidFill>
-            <a:schemeClr val="tx1"/>
+            <a:srgbClr val="FFFFFF"/>
           </a:solidFill>
-          <a:ln w="12700">
+          <a:ln w="25400">
             <a:solidFill>
-              <a:schemeClr val="tx1"/>
+              <a:srgbClr val="1A1A1A"/>
             </a:solidFill>
             <a:prstDash val="solid"/>
           </a:ln>
-        </p:spPr>
-      </p:sp>
-      <p:sp>
-        <p:nvSpPr>
-          <p:cNvPr id="4" name="chip-text"/>
-          <p:cNvSpPr txBox="1"/>
-          <p:nvPr/>
-        </p:nvSpPr>
-        <p:spPr>
-          <a:xfrm>
-            <a:off x="548640" y="292608"/>
-            <a:ext cx="1344168" cy="292608"/>
-          </a:xfrm>
-          <a:prstGeom prst="rect">
-            <a:avLst/>
-          </a:prstGeom>
-          <a:noFill/>
-          <a:ln/>
-        </p:spPr>
-        <p:txBody>
-          <a:bodyPr wrap="square" lIns="0" tIns="0" rIns="0" bIns="0" rtlCol="0" anchor="ctr"/>
-          <a:lstStyle/>
-          <a:p>
-            <a:pPr algn="ctr" indent="0" marL="0">
-              <a:buNone/>
-            </a:pPr>
-            <a:r>
-              <a:rPr lang="en-US" sz="1100" b="1" dirty="0">
-                <a:solidFill>
-                  <a:schemeClr val="accent1"/>
-                </a:solidFill>
-              </a:rPr>
-              <a:t>説明① 10分</a:t>
-            </a:r>
-            <a:endParaRPr lang="en-US" sz="1100" dirty="0"/>
-          </a:p>
-        </p:txBody>
-      </p:sp>
-      <p:sp>
-        <p:nvSpPr>
-          <p:cNvPr id="6" name="card"/>
+          <a:effectLst>
+            <a:outerShdw sx="100000" sy="100000" kx="0" ky="0" algn="bl" rotWithShape="0" blurRad="101600" dist="50800" dir="2700000">
+              <a:srgbClr val="1A1A1A">
+                <a:alpha val="100000"/>
+              </a:srgbClr>
+            </a:outerShdw>
+          </a:effectLst>
+        </p:spPr>
+      </p:sp>
+      <p:sp>
+        <p:nvSpPr>
+          <p:cNvPr id="6" name="icon-circle"/>
           <p:cNvSpPr/>
           <p:nvPr/>
         </p:nvSpPr>
         <p:spPr>
           <a:xfrm>
-            <a:off x="548640" y="1508760"/>
-            <a:ext cx="8046720" cy="1920240"/>
-          </a:xfrm>
-          <a:prstGeom prst="roundRect">
-            <a:avLst>
-              <a:gd name="adj" fmla="val 5714"/>
-            </a:avLst>
+            <a:off x="777240" y="1737360"/>
+            <a:ext cx="566928" cy="566928"/>
+          </a:xfrm>
+          <a:prstGeom prst="ellipse">
+            <a:avLst/>
           </a:prstGeom>
           <a:solidFill>
-            <a:schemeClr val="accent1"/>
+            <a:srgbClr val="DD6420"/>
           </a:solidFill>
           <a:ln w="19050">
             <a:solidFill>
@@ -3684,43 +3778,11 @@
             </a:solidFill>
             <a:prstDash val="solid"/>
           </a:ln>
-          <a:effectLst>
-            <a:outerShdw sx="100000" sy="100000" kx="0" ky="0" algn="bl" rotWithShape="0" blurRad="101600" dist="38100" dir="2700000">
-              <a:srgbClr val="000000">
-                <a:alpha val="18000"/>
-              </a:srgbClr>
-            </a:outerShdw>
-          </a:effectLst>
-        </p:spPr>
-      </p:sp>
-      <p:sp>
-        <p:nvSpPr>
-          <p:cNvPr id="7" name="icon-circle"/>
-          <p:cNvSpPr/>
-          <p:nvPr/>
-        </p:nvSpPr>
-        <p:spPr>
-          <a:xfrm>
-            <a:off x="822960" y="1783080"/>
-            <a:ext cx="548640" cy="548640"/>
-          </a:xfrm>
-          <a:prstGeom prst="ellipse">
-            <a:avLst/>
-          </a:prstGeom>
-          <a:solidFill>
-            <a:schemeClr val="bg1"/>
-          </a:solidFill>
-          <a:ln w="15875">
-            <a:solidFill>
-              <a:srgbClr val="1A1A1A"/>
-            </a:solidFill>
-            <a:prstDash val="solid"/>
-          </a:ln>
         </p:spPr>
       </p:sp>
       <p:pic>
         <p:nvPicPr>
-          <p:cNvPr id="8" name="icon" descr="preencoded.png">    </p:cNvPr>
+          <p:cNvPr id="7" name="icon" descr="preencoded.png">    </p:cNvPr>
           <p:cNvPicPr>
             <a:picLocks noChangeAspect="1"/>
           </p:cNvPicPr>
@@ -3734,8 +3796,8 @@
         </p:blipFill>
         <p:spPr>
           <a:xfrm>
-            <a:off x="965606" y="1925726"/>
-            <a:ext cx="263347" cy="263347"/>
+            <a:off x="918972" y="1879092"/>
+            <a:ext cx="283464" cy="283464"/>
           </a:xfrm>
           <a:prstGeom prst="rect">
             <a:avLst/>
@@ -3744,14 +3806,14 @@
       </p:pic>
       <p:sp>
         <p:nvSpPr>
-          <p:cNvPr id="9" name="big-text"/>
+          <p:cNvPr id="8" name="big-text"/>
           <p:cNvSpPr txBox="1"/>
           <p:nvPr/>
         </p:nvSpPr>
         <p:spPr>
           <a:xfrm>
-            <a:off x="1600200" y="1600200"/>
-            <a:ext cx="6766560" cy="1737360"/>
+            <a:off x="1600200" y="1554480"/>
+            <a:ext cx="6812280" cy="1828800"/>
           </a:xfrm>
           <a:prstGeom prst="rect">
             <a:avLst/>
@@ -3760,71 +3822,97 @@
           <a:ln/>
         </p:spPr>
         <p:txBody>
-          <a:bodyPr wrap="square" lIns="0" tIns="0" rIns="0" bIns="0" rtlCol="0" anchor="ctr"/>
+          <a:bodyPr wrap="square" lIns="0" tIns="0" rIns="0" bIns="0" rtlCol="0" anchor="ctr">
+            <a:normAutofit/>
+          </a:bodyPr>
           <a:lstStyle/>
           <a:p>
             <a:pPr indent="0" marL="0">
               <a:buNone/>
             </a:pPr>
             <a:r>
-              <a:rPr lang="en-US" sz="1800" b="1" dirty="0">
-                <a:solidFill>
-                  <a:schemeClr val="tx1"/>
-                </a:solidFill>
+              <a:rPr lang="ja-JP" altLang="en-US" sz="1900" b="1" dirty="0">
+                <a:solidFill>
+                  <a:srgbClr val="1A1A1A"/>
+                </a:solidFill>
+                <a:latin typeface="Noto Sans JP" pitchFamily="34" charset="0"/>
+                <a:ea typeface="Noto Sans JP" pitchFamily="34" charset="-122"/>
+                <a:cs typeface="Noto Sans JP" pitchFamily="34" charset="-120"/>
               </a:rPr>
               <a:t>構築者＝現場の困りごとを聞き取り、しくみを設計し、</a:t>
             </a:r>
-            <a:endParaRPr lang="en-US" sz="1800" dirty="0"/>
+            <a:endParaRPr lang="ja-JP" sz="1900" dirty="0"/>
           </a:p>
           <a:p>
             <a:pPr indent="0" marL="0">
               <a:buNone/>
             </a:pPr>
             <a:r>
-              <a:rPr lang="en-US" sz="1800" b="1" dirty="0">
-                <a:solidFill>
-                  <a:schemeClr val="tx1"/>
-                </a:solidFill>
+              <a:rPr lang="ja-JP" altLang="en-US" sz="1900" b="1" dirty="0">
+                <a:solidFill>
+                  <a:srgbClr val="1A1A1A"/>
+                </a:solidFill>
+                <a:latin typeface="Noto Sans JP" pitchFamily="34" charset="0"/>
+                <a:ea typeface="Noto Sans JP" pitchFamily="34" charset="-122"/>
+                <a:cs typeface="Noto Sans JP" pitchFamily="34" charset="-120"/>
               </a:rPr>
               <a:t>LarkとAIで作り、公開し、直し続けられる人</a:t>
             </a:r>
-            <a:endParaRPr lang="en-US" sz="1800" dirty="0"/>
-          </a:p>
-        </p:txBody>
-      </p:sp>
-      <p:sp>
-        <p:nvSpPr>
-          <p:cNvPr id="10" name="Text 6"/>
+            <a:endParaRPr lang="ja-JP" sz="1900" dirty="0"/>
+          </a:p>
+        </p:txBody>
+      </p:sp>
+      <p:sp>
+        <p:nvSpPr>
+          <p:cNvPr id="9" name="Text 5"/>
           <p:cNvSpPr txBox="1"/>
           <p:nvPr/>
         </p:nvSpPr>
         <p:spPr>
-          <a:xfrm>
-            <a:off x="548640" y="3749040"/>
-            <a:ext cx="8046720" cy="548640"/>
-          </a:xfrm>
-          <a:prstGeom prst="rect">
-            <a:avLst/>
-          </a:prstGeom>
-          <a:noFill/>
-          <a:ln/>
-        </p:spPr>
-        <p:txBody>
-          <a:bodyPr wrap="square" lIns="0" tIns="0" rIns="0" bIns="0" rtlCol="0" anchor="ctr"/>
-          <a:lstStyle/>
-          <a:p>
-            <a:pPr indent="0" marL="0">
-              <a:buNone/>
-            </a:pPr>
-            <a:r>
-              <a:rPr lang="en-US" sz="1500" dirty="0">
-                <a:solidFill>
-                  <a:schemeClr val="tx1"/>
-                </a:solidFill>
+          <a:xfrm rot="-60000">
+            <a:off x="502920" y="3886200"/>
+            <a:ext cx="8138160" cy="502920"/>
+          </a:xfrm>
+          <a:prstGeom prst="rect">
+            <a:avLst/>
+          </a:prstGeom>
+          <a:solidFill>
+            <a:srgbClr val="DD6420"/>
+          </a:solidFill>
+          <a:ln w="19050">
+            <a:solidFill>
+              <a:srgbClr val="1A1A1A"/>
+            </a:solidFill>
+          </a:ln>
+          <a:effectLst>
+            <a:outerShdw sx="100000" sy="100000" kx="0" ky="0" algn="bl" rotWithShape="0" blurRad="101600" dist="38100" dir="2700000">
+              <a:srgbClr val="1A1A1A">
+                <a:alpha val="100000"/>
+              </a:srgbClr>
+            </a:outerShdw>
+          </a:effectLst>
+        </p:spPr>
+        <p:txBody>
+          <a:bodyPr wrap="square" lIns="0" tIns="1905" rIns="1905" bIns="0" rtlCol="0" anchor="ctr">
+            <a:normAutofit/>
+          </a:bodyPr>
+          <a:lstStyle/>
+          <a:p>
+            <a:pPr algn="ctr" indent="0" marL="0">
+              <a:buNone/>
+            </a:pPr>
+            <a:r>
+              <a:rPr lang="ja-JP" altLang="en-US" sz="1300" b="1" dirty="0">
+                <a:solidFill>
+                  <a:srgbClr val="FFFFFF"/>
+                </a:solidFill>
+                <a:latin typeface="Noto Sans JP" pitchFamily="34" charset="0"/>
+                <a:ea typeface="Noto Sans JP" pitchFamily="34" charset="-122"/>
+                <a:cs typeface="Noto Sans JP" pitchFamily="34" charset="-120"/>
               </a:rPr>
               <a:t>8週間後、自社で実際に使うしくみを1つ公開して発表します。</a:t>
             </a:r>
-            <a:endParaRPr lang="en-US" sz="1500" dirty="0"/>
+            <a:endParaRPr lang="ja-JP" sz="1300" dirty="0"/>
           </a:p>
         </p:txBody>
       </p:sp>
@@ -3840,8 +3928,8 @@
         </p:nvSpPr>
         <p:spPr>
           <a:xfrm>
-            <a:off x="8229600" y="4773168"/>
-            <a:ext cx="365760" cy="228600"/>
+            <a:off x="8366760" y="4754880"/>
+            <a:ext cx="365760" cy="274320"/>
           </a:xfrm>
           <a:prstGeom prst="rect">
             <a:avLst/>
@@ -3853,20 +3941,23 @@
           </a:extLst>
         </p:spPr>
         <p:txBody>
-          <a:bodyPr/>
+          <a:bodyPr anchor="ctr"/>
           <a:lstStyle>
             <a:lvl1pPr>
-              <a:defRPr sz="900">
-                <a:solidFill>
-                  <a:srgbClr val="5A6872"/>
-                </a:solidFill>
+              <a:defRPr sz="850">
+                <a:solidFill>
+                  <a:srgbClr val="FFFFFF"/>
+                </a:solidFill>
+                <a:latin typeface="Noto Sans JP"/>
+                <a:ea typeface="Noto Sans JP"/>
+                <a:cs typeface="Noto Sans JP"/>
               </a:defRPr>
             </a:lvl1pPr>
           </a:lstStyle>
           <a:p>
             <a:pPr algn="r"/>
             <a:fld id="{F7021451-1387-4CA6-816F-3879F97B5CBC}" type="slidenum">
-              <a:rPr b="0" lang="en-US"/>
+              <a:rPr b="1" lang="en-US"/>
               <a:t>3</a:t>
             </a:fld>
             <a:endParaRPr lang="en-US"/>
@@ -3901,15 +3992,58 @@
       <p:sp>
         <p:nvSpPr>
           <p:cNvPr id="2" name="Text 0"/>
-          <p:cNvSpPr/>
-          <p:nvPr>
-            <p:ph idx="100" type="title" hasCustomPrompt="1"/>
-          </p:nvPr>
-        </p:nvSpPr>
-        <p:spPr>
-          <a:xfrm>
-            <a:off x="548640" y="658368"/>
-            <a:ext cx="8046720" cy="566928"/>
+          <p:cNvSpPr txBox="1"/>
+          <p:nvPr/>
+        </p:nvSpPr>
+        <p:spPr>
+          <a:xfrm rot="-180000">
+            <a:off x="411480" y="201168"/>
+            <a:ext cx="1478128" cy="352044"/>
+          </a:xfrm>
+          <a:prstGeom prst="rect">
+            <a:avLst/>
+          </a:prstGeom>
+          <a:solidFill>
+            <a:srgbClr val="1A1A1A"/>
+          </a:solidFill>
+          <a:ln>
+            <a:solidFill>
+              <a:srgbClr val="1A1A1A"/>
+            </a:solidFill>
+          </a:ln>
+        </p:spPr>
+        <p:txBody>
+          <a:bodyPr wrap="square" lIns="0" tIns="0" rIns="0" bIns="0" rtlCol="0" anchor="ctr"/>
+          <a:lstStyle/>
+          <a:p>
+            <a:pPr algn="ctr" indent="0" marL="0">
+              <a:buNone/>
+            </a:pPr>
+            <a:r>
+              <a:rPr lang="ja-JP" altLang="en-US" sz="1100" dirty="0">
+                <a:solidFill>
+                  <a:srgbClr val="FFFFFF"/>
+                </a:solidFill>
+                <a:latin typeface="Dela Gothic One" pitchFamily="34" charset="0"/>
+                <a:ea typeface="けいふぉんと" pitchFamily="34" charset="-122"/>
+                <a:cs typeface="Dela Gothic One" pitchFamily="34" charset="-120"/>
+              </a:rPr>
+              <a:t>説明① 10分</a:t>
+            </a:r>
+            <a:endParaRPr lang="ja-JP" sz="1100" dirty="0"/>
+          </a:p>
+        </p:txBody>
+      </p:sp>
+      <p:sp>
+        <p:nvSpPr>
+          <p:cNvPr id="3" name="Text 1"/>
+          <p:cNvSpPr txBox="1"/>
+          <p:nvPr/>
+        </p:nvSpPr>
+        <p:spPr>
+          <a:xfrm>
+            <a:off x="411480" y="502920"/>
+            <a:ext cx="8321040" cy="685800"/>
           </a:xfrm>
           <a:prstGeom prst="rect">
             <a:avLst/>
@@ -3918,105 +4052,79 @@
           <a:ln/>
         </p:spPr>
         <p:txBody>
-          <a:bodyPr wrap="square" lIns="0" tIns="0" rIns="0" bIns="0" rtlCol="0" anchor="ctr"/>
-          <a:lstStyle/>
-          <a:p>
-            <a:pPr algn="l" indent="0" marL="0">
-              <a:buNone/>
-            </a:pPr>
-            <a:r>
-              <a:rPr lang="en-US" sz="2400" b="1" dirty="0">
-                <a:solidFill>
-                  <a:schemeClr val="tx1"/>
-                </a:solidFill>
+          <a:bodyPr wrap="square" lIns="0" tIns="0" rIns="0" bIns="0" rtlCol="0" anchor="ctr">
+            <a:normAutofit/>
+          </a:bodyPr>
+          <a:lstStyle/>
+          <a:p>
+            <a:pPr indent="0" marL="0">
+              <a:buNone/>
+            </a:pPr>
+            <a:r>
+              <a:rPr lang="ja-JP" altLang="en-US" sz="2600" dirty="0">
+                <a:solidFill>
+                  <a:srgbClr val="1A1A1A"/>
+                </a:solidFill>
+                <a:latin typeface="Dela Gothic One" pitchFamily="34" charset="0"/>
+                <a:ea typeface="けいふぉんと" pitchFamily="34" charset="-122"/>
+                <a:cs typeface="Dela Gothic One" pitchFamily="34" charset="-120"/>
               </a:rPr>
               <a:t>3つの道具の役割</a:t>
             </a:r>
-            <a:endParaRPr lang="en-US" sz="2400" dirty="0"/>
-          </a:p>
-        </p:txBody>
-      </p:sp>
-      <p:sp>
-        <p:nvSpPr>
-          <p:cNvPr id="3" name="chip"/>
+            <a:endParaRPr lang="ja-JP" sz="2600" dirty="0"/>
+          </a:p>
+        </p:txBody>
+      </p:sp>
+      <p:sp>
+        <p:nvSpPr>
+          <p:cNvPr id="5" name="card"/>
           <p:cNvSpPr/>
           <p:nvPr/>
         </p:nvSpPr>
         <p:spPr>
           <a:xfrm>
-            <a:off x="548640" y="292608"/>
-            <a:ext cx="1344168" cy="292608"/>
+            <a:off x="502920" y="1417320"/>
+            <a:ext cx="2542032" cy="2331720"/>
           </a:xfrm>
           <a:prstGeom prst="roundRect">
             <a:avLst>
-              <a:gd name="adj" fmla="val 50000"/>
+              <a:gd name="adj" fmla="val 3922"/>
             </a:avLst>
           </a:prstGeom>
           <a:solidFill>
-            <a:schemeClr val="tx1"/>
+            <a:srgbClr val="FFFFFF"/>
           </a:solidFill>
-          <a:ln w="12700">
+          <a:ln w="25400">
             <a:solidFill>
-              <a:schemeClr val="tx1"/>
+              <a:srgbClr val="1A1A1A"/>
             </a:solidFill>
             <a:prstDash val="solid"/>
           </a:ln>
-        </p:spPr>
-      </p:sp>
-      <p:sp>
-        <p:nvSpPr>
-          <p:cNvPr id="4" name="chip-text"/>
-          <p:cNvSpPr txBox="1"/>
-          <p:nvPr/>
-        </p:nvSpPr>
-        <p:spPr>
-          <a:xfrm>
-            <a:off x="548640" y="292608"/>
-            <a:ext cx="1344168" cy="292608"/>
-          </a:xfrm>
-          <a:prstGeom prst="rect">
-            <a:avLst/>
-          </a:prstGeom>
-          <a:noFill/>
-          <a:ln/>
-        </p:spPr>
-        <p:txBody>
-          <a:bodyPr wrap="square" lIns="0" tIns="0" rIns="0" bIns="0" rtlCol="0" anchor="ctr"/>
-          <a:lstStyle/>
-          <a:p>
-            <a:pPr algn="ctr" indent="0" marL="0">
-              <a:buNone/>
-            </a:pPr>
-            <a:r>
-              <a:rPr lang="en-US" sz="1100" b="1" dirty="0">
-                <a:solidFill>
-                  <a:schemeClr val="accent1"/>
-                </a:solidFill>
-              </a:rPr>
-              <a:t>説明① 10分</a:t>
-            </a:r>
-            <a:endParaRPr lang="en-US" sz="1100" dirty="0"/>
-          </a:p>
-        </p:txBody>
-      </p:sp>
-      <p:sp>
-        <p:nvSpPr>
-          <p:cNvPr id="6" name="card"/>
+          <a:effectLst>
+            <a:outerShdw sx="100000" sy="100000" kx="0" ky="0" algn="bl" rotWithShape="0" blurRad="101600" dist="50800" dir="2700000">
+              <a:srgbClr val="1A1A1A">
+                <a:alpha val="100000"/>
+              </a:srgbClr>
+            </a:outerShdw>
+          </a:effectLst>
+        </p:spPr>
+      </p:sp>
+      <p:sp>
+        <p:nvSpPr>
+          <p:cNvPr id="6" name="icon-circle"/>
           <p:cNvSpPr/>
           <p:nvPr/>
         </p:nvSpPr>
         <p:spPr>
           <a:xfrm>
-            <a:off x="548640" y="1463040"/>
-            <a:ext cx="2529840" cy="2286000"/>
-          </a:xfrm>
-          <a:prstGeom prst="roundRect">
-            <a:avLst>
-              <a:gd name="adj" fmla="val 4800"/>
-            </a:avLst>
+            <a:off x="704088" y="1618488"/>
+            <a:ext cx="548640" cy="548640"/>
+          </a:xfrm>
+          <a:prstGeom prst="ellipse">
+            <a:avLst/>
           </a:prstGeom>
           <a:solidFill>
-            <a:schemeClr val="bg1"/>
+            <a:srgbClr val="DD6420"/>
           </a:solidFill>
           <a:ln w="19050">
             <a:solidFill>
@@ -4024,43 +4132,11 @@
             </a:solidFill>
             <a:prstDash val="solid"/>
           </a:ln>
-          <a:effectLst>
-            <a:outerShdw sx="100000" sy="100000" kx="0" ky="0" algn="bl" rotWithShape="0" blurRad="101600" dist="38100" dir="2700000">
-              <a:srgbClr val="000000">
-                <a:alpha val="18000"/>
-              </a:srgbClr>
-            </a:outerShdw>
-          </a:effectLst>
-        </p:spPr>
-      </p:sp>
-      <p:sp>
-        <p:nvSpPr>
-          <p:cNvPr id="7" name="icon-circle"/>
-          <p:cNvSpPr/>
-          <p:nvPr/>
-        </p:nvSpPr>
-        <p:spPr>
-          <a:xfrm>
-            <a:off x="731520" y="1645920"/>
-            <a:ext cx="502920" cy="502920"/>
-          </a:xfrm>
-          <a:prstGeom prst="ellipse">
-            <a:avLst/>
-          </a:prstGeom>
-          <a:solidFill>
-            <a:schemeClr val="accent1"/>
-          </a:solidFill>
-          <a:ln w="15875">
-            <a:solidFill>
-              <a:srgbClr val="1A1A1A"/>
-            </a:solidFill>
-            <a:prstDash val="solid"/>
-          </a:ln>
         </p:spPr>
       </p:sp>
       <p:pic>
         <p:nvPicPr>
-          <p:cNvPr id="8" name="icon" descr="preencoded.png">    </p:cNvPr>
+          <p:cNvPr id="7" name="icon" descr="preencoded.png">    </p:cNvPr>
           <p:cNvPicPr>
             <a:picLocks noChangeAspect="1"/>
           </p:cNvPicPr>
@@ -4074,8 +4150,8 @@
         </p:blipFill>
         <p:spPr>
           <a:xfrm>
-            <a:off x="862279" y="1776679"/>
-            <a:ext cx="241402" cy="241402"/>
+            <a:off x="841248" y="1755648"/>
+            <a:ext cx="274320" cy="274320"/>
           </a:xfrm>
           <a:prstGeom prst="rect">
             <a:avLst/>
@@ -4084,14 +4160,14 @@
       </p:pic>
       <p:sp>
         <p:nvSpPr>
-          <p:cNvPr id="9" name="card-head"/>
+          <p:cNvPr id="8" name="Text 4"/>
           <p:cNvSpPr txBox="1"/>
           <p:nvPr/>
         </p:nvSpPr>
         <p:spPr>
           <a:xfrm>
-            <a:off x="731520" y="2286000"/>
-            <a:ext cx="2164080" cy="365760"/>
+            <a:off x="1371600" y="1618488"/>
+            <a:ext cx="1490472" cy="548640"/>
           </a:xfrm>
           <a:prstGeom prst="rect">
             <a:avLst/>
@@ -4100,34 +4176,39 @@
           <a:ln/>
         </p:spPr>
         <p:txBody>
-          <a:bodyPr wrap="square" lIns="0" tIns="0" rIns="0" bIns="0" rtlCol="0" anchor="ctr"/>
+          <a:bodyPr wrap="square" lIns="0" tIns="0" rIns="0" bIns="0" rtlCol="0" anchor="ctr">
+            <a:normAutofit/>
+          </a:bodyPr>
           <a:lstStyle/>
           <a:p>
             <a:pPr indent="0" marL="0">
               <a:buNone/>
             </a:pPr>
             <a:r>
-              <a:rPr lang="en-US" sz="1500" b="1" dirty="0">
-                <a:solidFill>
-                  <a:schemeClr val="tx1"/>
-                </a:solidFill>
+              <a:rPr lang="ja-JP" altLang="en-US" sz="1700" dirty="0">
+                <a:solidFill>
+                  <a:srgbClr val="1A1A1A"/>
+                </a:solidFill>
+                <a:latin typeface="Dela Gothic One" pitchFamily="34" charset="0"/>
+                <a:ea typeface="けいふぉんと" pitchFamily="34" charset="-122"/>
+                <a:cs typeface="Dela Gothic One" pitchFamily="34" charset="-120"/>
               </a:rPr>
               <a:t>Lark</a:t>
             </a:r>
-            <a:endParaRPr lang="en-US" sz="1500" dirty="0"/>
-          </a:p>
-        </p:txBody>
-      </p:sp>
-      <p:sp>
-        <p:nvSpPr>
-          <p:cNvPr id="10" name="card-body"/>
+            <a:endParaRPr lang="ja-JP" sz="1700" dirty="0"/>
+          </a:p>
+        </p:txBody>
+      </p:sp>
+      <p:sp>
+        <p:nvSpPr>
+          <p:cNvPr id="9" name="card-body"/>
           <p:cNvSpPr txBox="1"/>
           <p:nvPr/>
         </p:nvSpPr>
         <p:spPr>
           <a:xfrm>
-            <a:off x="731520" y="2697480"/>
-            <a:ext cx="2164080" cy="914400"/>
+            <a:off x="704088" y="2313432"/>
+            <a:ext cx="2139696" cy="1298448"/>
           </a:xfrm>
           <a:prstGeom prst="rect">
             <a:avLst/>
@@ -4136,7 +4217,9 @@
           <a:ln/>
         </p:spPr>
         <p:txBody>
-          <a:bodyPr wrap="square" lIns="0" tIns="0" rIns="0" bIns="0" rtlCol="0" anchor="t"/>
+          <a:bodyPr wrap="square" lIns="0" tIns="0" rIns="0" bIns="0" rtlCol="0" anchor="t">
+            <a:normAutofit/>
+          </a:bodyPr>
           <a:lstStyle/>
           <a:p>
             <a:pPr indent="0" marL="0">
@@ -4146,14 +4229,17 @@
               <a:buNone/>
             </a:pPr>
             <a:r>
-              <a:rPr lang="en-US" sz="1300" dirty="0">
-                <a:solidFill>
-                  <a:schemeClr val="tx1"/>
-                </a:solidFill>
+              <a:rPr lang="ja-JP" altLang="en-US" sz="1350" b="1" dirty="0">
+                <a:solidFill>
+                  <a:srgbClr val="1A1A1A"/>
+                </a:solidFill>
+                <a:latin typeface="Noto Sans JP" pitchFamily="34" charset="0"/>
+                <a:ea typeface="Noto Sans JP" pitchFamily="34" charset="-122"/>
+                <a:cs typeface="Noto Sans JP" pitchFamily="34" charset="-120"/>
               </a:rPr>
               <a:t>社内の整理</a:t>
             </a:r>
-            <a:endParaRPr lang="en-US" sz="1300" dirty="0"/>
+            <a:endParaRPr lang="ja-JP" sz="1350" dirty="0"/>
           </a:p>
           <a:p>
             <a:pPr indent="0" marL="0">
@@ -4163,35 +4249,70 @@
               <a:buNone/>
             </a:pPr>
             <a:r>
-              <a:rPr lang="en-US" sz="1300" dirty="0">
-                <a:solidFill>
-                  <a:schemeClr val="tx1"/>
-                </a:solidFill>
+              <a:rPr lang="ja-JP" altLang="en-US" sz="1350" b="1" dirty="0">
+                <a:solidFill>
+                  <a:srgbClr val="1A1A1A"/>
+                </a:solidFill>
+                <a:latin typeface="Noto Sans JP" pitchFamily="34" charset="0"/>
+                <a:ea typeface="Noto Sans JP" pitchFamily="34" charset="-122"/>
+                <a:cs typeface="Noto Sans JP" pitchFamily="34" charset="-120"/>
               </a:rPr>
               <a:t>台帳・通知・Wiki・承認</a:t>
             </a:r>
-            <a:endParaRPr lang="en-US" sz="1300" dirty="0"/>
-          </a:p>
-        </p:txBody>
-      </p:sp>
-      <p:sp>
-        <p:nvSpPr>
-          <p:cNvPr id="11" name="card"/>
+            <a:endParaRPr lang="ja-JP" sz="1350" dirty="0"/>
+          </a:p>
+        </p:txBody>
+      </p:sp>
+      <p:sp>
+        <p:nvSpPr>
+          <p:cNvPr id="10" name="card"/>
           <p:cNvSpPr/>
           <p:nvPr/>
         </p:nvSpPr>
         <p:spPr>
           <a:xfrm>
-            <a:off x="3307080" y="1463040"/>
-            <a:ext cx="2529840" cy="2286000"/>
+            <a:off x="3300984" y="1417320"/>
+            <a:ext cx="2542032" cy="2331720"/>
           </a:xfrm>
           <a:prstGeom prst="roundRect">
             <a:avLst>
-              <a:gd name="adj" fmla="val 4800"/>
+              <a:gd name="adj" fmla="val 3922"/>
             </a:avLst>
           </a:prstGeom>
           <a:solidFill>
-            <a:schemeClr val="bg1"/>
+            <a:srgbClr val="FFFFFF"/>
+          </a:solidFill>
+          <a:ln w="25400">
+            <a:solidFill>
+              <a:srgbClr val="1A1A1A"/>
+            </a:solidFill>
+            <a:prstDash val="solid"/>
+          </a:ln>
+          <a:effectLst>
+            <a:outerShdw sx="100000" sy="100000" kx="0" ky="0" algn="bl" rotWithShape="0" blurRad="101600" dist="50800" dir="2700000">
+              <a:srgbClr val="1A1A1A">
+                <a:alpha val="100000"/>
+              </a:srgbClr>
+            </a:outerShdw>
+          </a:effectLst>
+        </p:spPr>
+      </p:sp>
+      <p:sp>
+        <p:nvSpPr>
+          <p:cNvPr id="11" name="icon-circle"/>
+          <p:cNvSpPr/>
+          <p:nvPr/>
+        </p:nvSpPr>
+        <p:spPr>
+          <a:xfrm>
+            <a:off x="3502152" y="1618488"/>
+            <a:ext cx="548640" cy="548640"/>
+          </a:xfrm>
+          <a:prstGeom prst="ellipse">
+            <a:avLst/>
+          </a:prstGeom>
+          <a:solidFill>
+            <a:srgbClr val="DD6420"/>
           </a:solidFill>
           <a:ln w="19050">
             <a:solidFill>
@@ -4199,43 +4320,11 @@
             </a:solidFill>
             <a:prstDash val="solid"/>
           </a:ln>
-          <a:effectLst>
-            <a:outerShdw sx="100000" sy="100000" kx="0" ky="0" algn="bl" rotWithShape="0" blurRad="101600" dist="38100" dir="2700000">
-              <a:srgbClr val="000000">
-                <a:alpha val="18000"/>
-              </a:srgbClr>
-            </a:outerShdw>
-          </a:effectLst>
-        </p:spPr>
-      </p:sp>
-      <p:sp>
-        <p:nvSpPr>
-          <p:cNvPr id="12" name="icon-circle"/>
-          <p:cNvSpPr/>
-          <p:nvPr/>
-        </p:nvSpPr>
-        <p:spPr>
-          <a:xfrm>
-            <a:off x="3489960" y="1645920"/>
-            <a:ext cx="502920" cy="502920"/>
-          </a:xfrm>
-          <a:prstGeom prst="ellipse">
-            <a:avLst/>
-          </a:prstGeom>
-          <a:solidFill>
-            <a:schemeClr val="accent1"/>
-          </a:solidFill>
-          <a:ln w="15875">
-            <a:solidFill>
-              <a:srgbClr val="1A1A1A"/>
-            </a:solidFill>
-            <a:prstDash val="solid"/>
-          </a:ln>
         </p:spPr>
       </p:sp>
       <p:pic>
         <p:nvPicPr>
-          <p:cNvPr id="13" name="icon" descr="preencoded.png">    </p:cNvPr>
+          <p:cNvPr id="12" name="icon" descr="preencoded.png">    </p:cNvPr>
           <p:cNvPicPr>
             <a:picLocks noChangeAspect="1"/>
           </p:cNvPicPr>
@@ -4249,8 +4338,8 @@
         </p:blipFill>
         <p:spPr>
           <a:xfrm>
-            <a:off x="3620719" y="1776679"/>
-            <a:ext cx="241402" cy="241402"/>
+            <a:off x="3639312" y="1755648"/>
+            <a:ext cx="274320" cy="274320"/>
           </a:xfrm>
           <a:prstGeom prst="rect">
             <a:avLst/>
@@ -4259,14 +4348,14 @@
       </p:pic>
       <p:sp>
         <p:nvSpPr>
-          <p:cNvPr id="14" name="card-head"/>
+          <p:cNvPr id="13" name="Text 8"/>
           <p:cNvSpPr txBox="1"/>
           <p:nvPr/>
         </p:nvSpPr>
         <p:spPr>
           <a:xfrm>
-            <a:off x="3489960" y="2286000"/>
-            <a:ext cx="2164080" cy="365760"/>
+            <a:off x="4169664" y="1618488"/>
+            <a:ext cx="1490472" cy="548640"/>
           </a:xfrm>
           <a:prstGeom prst="rect">
             <a:avLst/>
@@ -4275,34 +4364,39 @@
           <a:ln/>
         </p:spPr>
         <p:txBody>
-          <a:bodyPr wrap="square" lIns="0" tIns="0" rIns="0" bIns="0" rtlCol="0" anchor="ctr"/>
+          <a:bodyPr wrap="square" lIns="0" tIns="0" rIns="0" bIns="0" rtlCol="0" anchor="ctr">
+            <a:normAutofit/>
+          </a:bodyPr>
           <a:lstStyle/>
           <a:p>
             <a:pPr indent="0" marL="0">
               <a:buNone/>
             </a:pPr>
             <a:r>
-              <a:rPr lang="en-US" sz="1500" b="1" dirty="0">
-                <a:solidFill>
-                  <a:schemeClr val="tx1"/>
-                </a:solidFill>
+              <a:rPr lang="ja-JP" altLang="en-US" sz="1700" dirty="0">
+                <a:solidFill>
+                  <a:srgbClr val="1A1A1A"/>
+                </a:solidFill>
+                <a:latin typeface="Dela Gothic One" pitchFamily="34" charset="0"/>
+                <a:ea typeface="けいふぉんと" pitchFamily="34" charset="-122"/>
+                <a:cs typeface="Dela Gothic One" pitchFamily="34" charset="-120"/>
               </a:rPr>
               <a:t>AI</a:t>
             </a:r>
-            <a:endParaRPr lang="en-US" sz="1500" dirty="0"/>
-          </a:p>
-        </p:txBody>
-      </p:sp>
-      <p:sp>
-        <p:nvSpPr>
-          <p:cNvPr id="15" name="card-body"/>
+            <a:endParaRPr lang="ja-JP" sz="1700" dirty="0"/>
+          </a:p>
+        </p:txBody>
+      </p:sp>
+      <p:sp>
+        <p:nvSpPr>
+          <p:cNvPr id="14" name="card-body"/>
           <p:cNvSpPr txBox="1"/>
           <p:nvPr/>
         </p:nvSpPr>
         <p:spPr>
           <a:xfrm>
-            <a:off x="3489960" y="2697480"/>
-            <a:ext cx="2164080" cy="914400"/>
+            <a:off x="3502152" y="2313432"/>
+            <a:ext cx="2139696" cy="1298448"/>
           </a:xfrm>
           <a:prstGeom prst="rect">
             <a:avLst/>
@@ -4311,7 +4405,9 @@
           <a:ln/>
         </p:spPr>
         <p:txBody>
-          <a:bodyPr wrap="square" lIns="0" tIns="0" rIns="0" bIns="0" rtlCol="0" anchor="t"/>
+          <a:bodyPr wrap="square" lIns="0" tIns="0" rIns="0" bIns="0" rtlCol="0" anchor="t">
+            <a:normAutofit/>
+          </a:bodyPr>
           <a:lstStyle/>
           <a:p>
             <a:pPr indent="0" marL="0">
@@ -4321,14 +4417,17 @@
               <a:buNone/>
             </a:pPr>
             <a:r>
-              <a:rPr lang="en-US" sz="1300" dirty="0">
-                <a:solidFill>
-                  <a:schemeClr val="tx1"/>
-                </a:solidFill>
+              <a:rPr lang="ja-JP" altLang="en-US" sz="1350" b="1" dirty="0">
+                <a:solidFill>
+                  <a:srgbClr val="1A1A1A"/>
+                </a:solidFill>
+                <a:latin typeface="Noto Sans JP" pitchFamily="34" charset="0"/>
+                <a:ea typeface="Noto Sans JP" pitchFamily="34" charset="-122"/>
+                <a:cs typeface="Noto Sans JP" pitchFamily="34" charset="-120"/>
               </a:rPr>
               <a:t>作る・考える相棒</a:t>
             </a:r>
-            <a:endParaRPr lang="en-US" sz="1300" dirty="0"/>
+            <a:endParaRPr lang="ja-JP" sz="1350" dirty="0"/>
           </a:p>
           <a:p>
             <a:pPr indent="0" marL="0">
@@ -4338,35 +4437,70 @@
               <a:buNone/>
             </a:pPr>
             <a:r>
-              <a:rPr lang="en-US" sz="1300" dirty="0">
-                <a:solidFill>
-                  <a:schemeClr val="tx1"/>
-                </a:solidFill>
+              <a:rPr lang="ja-JP" altLang="en-US" sz="1350" b="1" dirty="0">
+                <a:solidFill>
+                  <a:srgbClr val="1A1A1A"/>
+                </a:solidFill>
+                <a:latin typeface="Noto Sans JP" pitchFamily="34" charset="0"/>
+                <a:ea typeface="Noto Sans JP" pitchFamily="34" charset="-122"/>
+                <a:cs typeface="Noto Sans JP" pitchFamily="34" charset="-120"/>
               </a:rPr>
               <a:t>文章・要件・コードを書く</a:t>
             </a:r>
-            <a:endParaRPr lang="en-US" sz="1300" dirty="0"/>
-          </a:p>
-        </p:txBody>
-      </p:sp>
-      <p:sp>
-        <p:nvSpPr>
-          <p:cNvPr id="16" name="card"/>
+            <a:endParaRPr lang="ja-JP" sz="1350" dirty="0"/>
+          </a:p>
+        </p:txBody>
+      </p:sp>
+      <p:sp>
+        <p:nvSpPr>
+          <p:cNvPr id="15" name="card"/>
           <p:cNvSpPr/>
           <p:nvPr/>
         </p:nvSpPr>
         <p:spPr>
           <a:xfrm>
-            <a:off x="6065520" y="1463040"/>
-            <a:ext cx="2529840" cy="2286000"/>
+            <a:off x="6099048" y="1417320"/>
+            <a:ext cx="2542032" cy="2331720"/>
           </a:xfrm>
           <a:prstGeom prst="roundRect">
             <a:avLst>
-              <a:gd name="adj" fmla="val 4800"/>
+              <a:gd name="adj" fmla="val 3922"/>
             </a:avLst>
           </a:prstGeom>
           <a:solidFill>
-            <a:schemeClr val="bg1"/>
+            <a:srgbClr val="FFFFFF"/>
+          </a:solidFill>
+          <a:ln w="25400">
+            <a:solidFill>
+              <a:srgbClr val="1A1A1A"/>
+            </a:solidFill>
+            <a:prstDash val="solid"/>
+          </a:ln>
+          <a:effectLst>
+            <a:outerShdw sx="100000" sy="100000" kx="0" ky="0" algn="bl" rotWithShape="0" blurRad="101600" dist="50800" dir="2700000">
+              <a:srgbClr val="1A1A1A">
+                <a:alpha val="100000"/>
+              </a:srgbClr>
+            </a:outerShdw>
+          </a:effectLst>
+        </p:spPr>
+      </p:sp>
+      <p:sp>
+        <p:nvSpPr>
+          <p:cNvPr id="16" name="icon-circle"/>
+          <p:cNvSpPr/>
+          <p:nvPr/>
+        </p:nvSpPr>
+        <p:spPr>
+          <a:xfrm>
+            <a:off x="6300216" y="1618488"/>
+            <a:ext cx="548640" cy="548640"/>
+          </a:xfrm>
+          <a:prstGeom prst="ellipse">
+            <a:avLst/>
+          </a:prstGeom>
+          <a:solidFill>
+            <a:srgbClr val="DD6420"/>
           </a:solidFill>
           <a:ln w="19050">
             <a:solidFill>
@@ -4374,43 +4508,11 @@
             </a:solidFill>
             <a:prstDash val="solid"/>
           </a:ln>
-          <a:effectLst>
-            <a:outerShdw sx="100000" sy="100000" kx="0" ky="0" algn="bl" rotWithShape="0" blurRad="101600" dist="38100" dir="2700000">
-              <a:srgbClr val="000000">
-                <a:alpha val="18000"/>
-              </a:srgbClr>
-            </a:outerShdw>
-          </a:effectLst>
-        </p:spPr>
-      </p:sp>
-      <p:sp>
-        <p:nvSpPr>
-          <p:cNvPr id="17" name="icon-circle"/>
-          <p:cNvSpPr/>
-          <p:nvPr/>
-        </p:nvSpPr>
-        <p:spPr>
-          <a:xfrm>
-            <a:off x="6248400" y="1645920"/>
-            <a:ext cx="502920" cy="502920"/>
-          </a:xfrm>
-          <a:prstGeom prst="ellipse">
-            <a:avLst/>
-          </a:prstGeom>
-          <a:solidFill>
-            <a:schemeClr val="accent1"/>
-          </a:solidFill>
-          <a:ln w="15875">
-            <a:solidFill>
-              <a:srgbClr val="1A1A1A"/>
-            </a:solidFill>
-            <a:prstDash val="solid"/>
-          </a:ln>
         </p:spPr>
       </p:sp>
       <p:pic>
         <p:nvPicPr>
-          <p:cNvPr id="18" name="icon" descr="preencoded.png">    </p:cNvPr>
+          <p:cNvPr id="17" name="icon" descr="preencoded.png">    </p:cNvPr>
           <p:cNvPicPr>
             <a:picLocks noChangeAspect="1"/>
           </p:cNvPicPr>
@@ -4424,8 +4526,8 @@
         </p:blipFill>
         <p:spPr>
           <a:xfrm>
-            <a:off x="6379159" y="1776679"/>
-            <a:ext cx="241402" cy="241402"/>
+            <a:off x="6437376" y="1755648"/>
+            <a:ext cx="274320" cy="274320"/>
           </a:xfrm>
           <a:prstGeom prst="rect">
             <a:avLst/>
@@ -4434,14 +4536,14 @@
       </p:pic>
       <p:sp>
         <p:nvSpPr>
-          <p:cNvPr id="19" name="card-head"/>
+          <p:cNvPr id="18" name="Text 12"/>
           <p:cNvSpPr txBox="1"/>
           <p:nvPr/>
         </p:nvSpPr>
         <p:spPr>
           <a:xfrm>
-            <a:off x="6248400" y="2286000"/>
-            <a:ext cx="2164080" cy="365760"/>
+            <a:off x="6967728" y="1618488"/>
+            <a:ext cx="1490472" cy="548640"/>
           </a:xfrm>
           <a:prstGeom prst="rect">
             <a:avLst/>
@@ -4450,34 +4552,39 @@
           <a:ln/>
         </p:spPr>
         <p:txBody>
-          <a:bodyPr wrap="square" lIns="0" tIns="0" rIns="0" bIns="0" rtlCol="0" anchor="ctr"/>
+          <a:bodyPr wrap="square" lIns="0" tIns="0" rIns="0" bIns="0" rtlCol="0" anchor="ctr">
+            <a:normAutofit/>
+          </a:bodyPr>
           <a:lstStyle/>
           <a:p>
             <a:pPr indent="0" marL="0">
               <a:buNone/>
             </a:pPr>
             <a:r>
-              <a:rPr lang="en-US" sz="1500" b="1" dirty="0">
-                <a:solidFill>
-                  <a:schemeClr val="tx1"/>
-                </a:solidFill>
+              <a:rPr lang="ja-JP" altLang="en-US" sz="1700" dirty="0">
+                <a:solidFill>
+                  <a:srgbClr val="1A1A1A"/>
+                </a:solidFill>
+                <a:latin typeface="Dela Gothic One" pitchFamily="34" charset="0"/>
+                <a:ea typeface="けいふぉんと" pitchFamily="34" charset="-122"/>
+                <a:cs typeface="Dela Gothic One" pitchFamily="34" charset="-120"/>
               </a:rPr>
               <a:t>LINE</a:t>
             </a:r>
-            <a:endParaRPr lang="en-US" sz="1500" dirty="0"/>
-          </a:p>
-        </p:txBody>
-      </p:sp>
-      <p:sp>
-        <p:nvSpPr>
-          <p:cNvPr id="20" name="card-body"/>
+            <a:endParaRPr lang="ja-JP" sz="1700" dirty="0"/>
+          </a:p>
+        </p:txBody>
+      </p:sp>
+      <p:sp>
+        <p:nvSpPr>
+          <p:cNvPr id="19" name="card-body"/>
           <p:cNvSpPr txBox="1"/>
           <p:nvPr/>
         </p:nvSpPr>
         <p:spPr>
           <a:xfrm>
-            <a:off x="6248400" y="2697480"/>
-            <a:ext cx="2164080" cy="914400"/>
+            <a:off x="6300216" y="2313432"/>
+            <a:ext cx="2139696" cy="1298448"/>
           </a:xfrm>
           <a:prstGeom prst="rect">
             <a:avLst/>
@@ -4486,7 +4593,9 @@
           <a:ln/>
         </p:spPr>
         <p:txBody>
-          <a:bodyPr wrap="square" lIns="0" tIns="0" rIns="0" bIns="0" rtlCol="0" anchor="t"/>
+          <a:bodyPr wrap="square" lIns="0" tIns="0" rIns="0" bIns="0" rtlCol="0" anchor="t">
+            <a:normAutofit/>
+          </a:bodyPr>
           <a:lstStyle/>
           <a:p>
             <a:pPr indent="0" marL="0">
@@ -4496,14 +4605,17 @@
               <a:buNone/>
             </a:pPr>
             <a:r>
-              <a:rPr lang="en-US" sz="1300" dirty="0">
-                <a:solidFill>
-                  <a:schemeClr val="tx1"/>
-                </a:solidFill>
+              <a:rPr lang="ja-JP" altLang="en-US" sz="1350" b="1" dirty="0">
+                <a:solidFill>
+                  <a:srgbClr val="1A1A1A"/>
+                </a:solidFill>
+                <a:latin typeface="Noto Sans JP" pitchFamily="34" charset="0"/>
+                <a:ea typeface="Noto Sans JP" pitchFamily="34" charset="-122"/>
+                <a:cs typeface="Noto Sans JP" pitchFamily="34" charset="-120"/>
               </a:rPr>
               <a:t>お客様との接点</a:t>
             </a:r>
-            <a:endParaRPr lang="en-US" sz="1300" dirty="0"/>
+            <a:endParaRPr lang="ja-JP" sz="1350" dirty="0"/>
           </a:p>
           <a:p>
             <a:pPr indent="0" marL="0">
@@ -4513,101 +4625,71 @@
               <a:buNone/>
             </a:pPr>
             <a:r>
-              <a:rPr lang="en-US" sz="1300" dirty="0">
-                <a:solidFill>
-                  <a:schemeClr val="tx1"/>
-                </a:solidFill>
+              <a:rPr lang="ja-JP" altLang="en-US" sz="1350" b="1" dirty="0">
+                <a:solidFill>
+                  <a:srgbClr val="1A1A1A"/>
+                </a:solidFill>
+                <a:latin typeface="Noto Sans JP" pitchFamily="34" charset="0"/>
+                <a:ea typeface="Noto Sans JP" pitchFamily="34" charset="-122"/>
+                <a:cs typeface="Noto Sans JP" pitchFamily="34" charset="-120"/>
               </a:rPr>
               <a:t>予約・問い合わせの入口</a:t>
             </a:r>
-            <a:endParaRPr lang="en-US" sz="1300" dirty="0"/>
-          </a:p>
-        </p:txBody>
-      </p:sp>
-      <p:sp>
-        <p:nvSpPr>
-          <p:cNvPr id="21" name="foot-box"/>
-          <p:cNvSpPr/>
-          <p:nvPr/>
-        </p:nvSpPr>
-        <p:spPr>
-          <a:xfrm>
-            <a:off x="548640" y="4114800"/>
-            <a:ext cx="8046720" cy="502920"/>
-          </a:xfrm>
-          <a:prstGeom prst="roundRect">
-            <a:avLst>
-              <a:gd name="adj" fmla="val 18182"/>
-            </a:avLst>
+            <a:endParaRPr lang="ja-JP" sz="1350" dirty="0"/>
+          </a:p>
+        </p:txBody>
+      </p:sp>
+      <p:sp>
+        <p:nvSpPr>
+          <p:cNvPr id="20" name="Text 14"/>
+          <p:cNvSpPr txBox="1"/>
+          <p:nvPr/>
+        </p:nvSpPr>
+        <p:spPr>
+          <a:xfrm rot="-60000">
+            <a:off x="502920" y="4114800"/>
+            <a:ext cx="8138160" cy="502920"/>
+          </a:xfrm>
+          <a:prstGeom prst="rect">
+            <a:avLst/>
           </a:prstGeom>
           <a:solidFill>
-            <a:schemeClr val="bg2"/>
+            <a:srgbClr val="DD6420"/>
           </a:solidFill>
-          <a:ln w="12700">
+          <a:ln w="19050">
             <a:solidFill>
-              <a:schemeClr val="bg2"/>
+              <a:srgbClr val="1A1A1A"/>
             </a:solidFill>
-            <a:prstDash val="solid"/>
           </a:ln>
-        </p:spPr>
-      </p:sp>
-      <p:pic>
-        <p:nvPicPr>
-          <p:cNvPr id="22" name="foot-icon" descr="preencoded.png">    </p:cNvPr>
-          <p:cNvPicPr>
-            <a:picLocks noChangeAspect="1"/>
-          </p:cNvPicPr>
-          <p:nvPr/>
-        </p:nvPicPr>
-        <p:blipFill>
-          <a:blip r:embed="rId4"/>
-          <a:stretch>
-            <a:fillRect/>
-          </a:stretch>
-        </p:blipFill>
-        <p:spPr>
-          <a:xfrm>
-            <a:off x="685800" y="4242816"/>
-            <a:ext cx="246888" cy="246888"/>
-          </a:xfrm>
-          <a:prstGeom prst="rect">
-            <a:avLst/>
-          </a:prstGeom>
-        </p:spPr>
-      </p:pic>
-      <p:sp>
-        <p:nvSpPr>
-          <p:cNvPr id="23" name="foot-text"/>
-          <p:cNvSpPr txBox="1"/>
-          <p:nvPr/>
-        </p:nvSpPr>
-        <p:spPr>
-          <a:xfrm>
-            <a:off x="1051560" y="4114800"/>
-            <a:ext cx="7406640" cy="502920"/>
-          </a:xfrm>
-          <a:prstGeom prst="rect">
-            <a:avLst/>
-          </a:prstGeom>
-          <a:noFill/>
-          <a:ln/>
-        </p:spPr>
-        <p:txBody>
-          <a:bodyPr wrap="square" lIns="0" tIns="0" rIns="0" bIns="0" rtlCol="0" anchor="ctr"/>
-          <a:lstStyle/>
-          <a:p>
-            <a:pPr indent="0" marL="0">
-              <a:buNone/>
-            </a:pPr>
-            <a:r>
-              <a:rPr lang="en-US" sz="1150" dirty="0">
-                <a:solidFill>
-                  <a:schemeClr val="tx1"/>
-                </a:solidFill>
+          <a:effectLst>
+            <a:outerShdw sx="100000" sy="100000" kx="0" ky="0" algn="bl" rotWithShape="0" blurRad="101600" dist="38100" dir="2700000">
+              <a:srgbClr val="1A1A1A">
+                <a:alpha val="100000"/>
+              </a:srgbClr>
+            </a:outerShdw>
+          </a:effectLst>
+        </p:spPr>
+        <p:txBody>
+          <a:bodyPr wrap="square" lIns="0" tIns="1905" rIns="1905" bIns="0" rtlCol="0" anchor="ctr">
+            <a:normAutofit/>
+          </a:bodyPr>
+          <a:lstStyle/>
+          <a:p>
+            <a:pPr algn="ctr" indent="0" marL="0">
+              <a:buNone/>
+            </a:pPr>
+            <a:r>
+              <a:rPr lang="ja-JP" altLang="en-US" sz="1300" b="1" dirty="0">
+                <a:solidFill>
+                  <a:srgbClr val="FFFFFF"/>
+                </a:solidFill>
+                <a:latin typeface="Noto Sans JP" pitchFamily="34" charset="0"/>
+                <a:ea typeface="Noto Sans JP" pitchFamily="34" charset="-122"/>
+                <a:cs typeface="Noto Sans JP" pitchFamily="34" charset="-120"/>
               </a:rPr>
               <a:t>進め方：まずコードを書かずにLarkで作る → 足りない部分だけAIにコードを書かせる</a:t>
             </a:r>
-            <a:endParaRPr lang="en-US" sz="1150" dirty="0"/>
+            <a:endParaRPr lang="ja-JP" sz="1300" dirty="0"/>
           </a:p>
         </p:txBody>
       </p:sp>
@@ -4623,8 +4705,8 @@
         </p:nvSpPr>
         <p:spPr>
           <a:xfrm>
-            <a:off x="8229600" y="4773168"/>
-            <a:ext cx="365760" cy="228600"/>
+            <a:off x="8366760" y="4754880"/>
+            <a:ext cx="365760" cy="274320"/>
           </a:xfrm>
           <a:prstGeom prst="rect">
             <a:avLst/>
@@ -4636,20 +4718,23 @@
           </a:extLst>
         </p:spPr>
         <p:txBody>
-          <a:bodyPr/>
+          <a:bodyPr anchor="ctr"/>
           <a:lstStyle>
             <a:lvl1pPr>
-              <a:defRPr sz="900">
-                <a:solidFill>
-                  <a:srgbClr val="5A6872"/>
-                </a:solidFill>
+              <a:defRPr sz="850">
+                <a:solidFill>
+                  <a:srgbClr val="FFFFFF"/>
+                </a:solidFill>
+                <a:latin typeface="Noto Sans JP"/>
+                <a:ea typeface="Noto Sans JP"/>
+                <a:cs typeface="Noto Sans JP"/>
               </a:defRPr>
             </a:lvl1pPr>
           </a:lstStyle>
           <a:p>
             <a:pPr algn="r"/>
             <a:fld id="{F7021451-1387-4CA6-816F-3879F97B5CBC}" type="slidenum">
-              <a:rPr b="0" lang="en-US"/>
+              <a:rPr b="1" lang="en-US"/>
               <a:t>4</a:t>
             </a:fld>
             <a:endParaRPr lang="en-US"/>
@@ -4684,15 +4769,58 @@
       <p:sp>
         <p:nvSpPr>
           <p:cNvPr id="2" name="Text 0"/>
-          <p:cNvSpPr/>
-          <p:nvPr>
-            <p:ph idx="100" type="title" hasCustomPrompt="1"/>
-          </p:nvPr>
-        </p:nvSpPr>
-        <p:spPr>
-          <a:xfrm>
-            <a:off x="548640" y="658368"/>
-            <a:ext cx="8046720" cy="566928"/>
+          <p:cNvSpPr txBox="1"/>
+          <p:nvPr/>
+        </p:nvSpPr>
+        <p:spPr>
+          <a:xfrm rot="-180000">
+            <a:off x="411480" y="201168"/>
+            <a:ext cx="1915668" cy="352044"/>
+          </a:xfrm>
+          <a:prstGeom prst="rect">
+            <a:avLst/>
+          </a:prstGeom>
+          <a:solidFill>
+            <a:srgbClr val="DD6420"/>
+          </a:solidFill>
+          <a:ln>
+            <a:solidFill>
+              <a:srgbClr val="DD6420"/>
+            </a:solidFill>
+          </a:ln>
+        </p:spPr>
+        <p:txBody>
+          <a:bodyPr wrap="square" lIns="0" tIns="0" rIns="0" bIns="0" rtlCol="0" anchor="ctr"/>
+          <a:lstStyle/>
+          <a:p>
+            <a:pPr algn="ctr" indent="0" marL="0">
+              <a:buNone/>
+            </a:pPr>
+            <a:r>
+              <a:rPr lang="ja-JP" altLang="en-US" sz="1100" dirty="0">
+                <a:solidFill>
+                  <a:srgbClr val="FFFFFF"/>
+                </a:solidFill>
+                <a:latin typeface="Dela Gothic One" pitchFamily="34" charset="0"/>
+                <a:ea typeface="けいふぉんと" pitchFamily="34" charset="-122"/>
+                <a:cs typeface="Dela Gothic One" pitchFamily="34" charset="-120"/>
+              </a:rPr>
+              <a:t>ハンズオン① 20分</a:t>
+            </a:r>
+            <a:endParaRPr lang="ja-JP" sz="1100" dirty="0"/>
+          </a:p>
+        </p:txBody>
+      </p:sp>
+      <p:sp>
+        <p:nvSpPr>
+          <p:cNvPr id="3" name="Text 1"/>
+          <p:cNvSpPr txBox="1"/>
+          <p:nvPr/>
+        </p:nvSpPr>
+        <p:spPr>
+          <a:xfrm>
+            <a:off x="411480" y="502920"/>
+            <a:ext cx="8321040" cy="685800"/>
           </a:xfrm>
           <a:prstGeom prst="rect">
             <a:avLst/>
@@ -4701,122 +4829,118 @@
           <a:ln/>
         </p:spPr>
         <p:txBody>
-          <a:bodyPr wrap="square" lIns="0" tIns="0" rIns="0" bIns="0" rtlCol="0" anchor="ctr"/>
-          <a:lstStyle/>
-          <a:p>
-            <a:pPr algn="l" indent="0" marL="0">
-              <a:buNone/>
-            </a:pPr>
-            <a:r>
-              <a:rPr lang="en-US" sz="2400" b="1" dirty="0">
-                <a:solidFill>
-                  <a:schemeClr val="tx1"/>
-                </a:solidFill>
+          <a:bodyPr wrap="square" lIns="0" tIns="0" rIns="0" bIns="0" rtlCol="0" anchor="ctr">
+            <a:normAutofit/>
+          </a:bodyPr>
+          <a:lstStyle/>
+          <a:p>
+            <a:pPr indent="0" marL="0">
+              <a:buNone/>
+            </a:pPr>
+            <a:r>
+              <a:rPr lang="ja-JP" altLang="en-US" sz="2600" dirty="0">
+                <a:solidFill>
+                  <a:srgbClr val="1A1A1A"/>
+                </a:solidFill>
+                <a:latin typeface="Dela Gothic One" pitchFamily="34" charset="0"/>
+                <a:ea typeface="けいふぉんと" pitchFamily="34" charset="-122"/>
+                <a:cs typeface="Dela Gothic One" pitchFamily="34" charset="-120"/>
               </a:rPr>
               <a:t>業務の棚卸し</a:t>
             </a:r>
-            <a:endParaRPr lang="en-US" sz="2400" dirty="0"/>
-          </a:p>
-        </p:txBody>
-      </p:sp>
-      <p:sp>
-        <p:nvSpPr>
-          <p:cNvPr id="3" name="chip"/>
+            <a:endParaRPr lang="ja-JP" sz="2600" dirty="0"/>
+          </a:p>
+        </p:txBody>
+      </p:sp>
+      <p:sp>
+        <p:nvSpPr>
+          <p:cNvPr id="5" name="card"/>
           <p:cNvSpPr/>
           <p:nvPr/>
         </p:nvSpPr>
         <p:spPr>
           <a:xfrm>
-            <a:off x="548640" y="292608"/>
-            <a:ext cx="1755648" cy="292608"/>
+            <a:off x="502920" y="1604772"/>
+            <a:ext cx="8138160" cy="566928"/>
           </a:xfrm>
           <a:prstGeom prst="roundRect">
             <a:avLst>
-              <a:gd name="adj" fmla="val 50000"/>
+              <a:gd name="adj" fmla="val 16129"/>
             </a:avLst>
           </a:prstGeom>
           <a:solidFill>
-            <a:schemeClr val="accent2"/>
+            <a:srgbClr val="FFFFFF"/>
           </a:solidFill>
-          <a:ln w="12700">
-            <a:solidFill>
-              <a:schemeClr val="accent2"/>
-            </a:solidFill>
-            <a:prstDash val="solid"/>
-          </a:ln>
-        </p:spPr>
-      </p:sp>
-      <p:sp>
-        <p:nvSpPr>
-          <p:cNvPr id="4" name="chip-text"/>
-          <p:cNvSpPr txBox="1"/>
-          <p:nvPr/>
-        </p:nvSpPr>
-        <p:spPr>
-          <a:xfrm>
-            <a:off x="548640" y="292608"/>
-            <a:ext cx="1755648" cy="292608"/>
-          </a:xfrm>
-          <a:prstGeom prst="rect">
-            <a:avLst/>
-          </a:prstGeom>
-          <a:noFill/>
-          <a:ln/>
-        </p:spPr>
-        <p:txBody>
-          <a:bodyPr wrap="square" lIns="0" tIns="0" rIns="0" bIns="0" rtlCol="0" anchor="ctr"/>
-          <a:lstStyle/>
-          <a:p>
-            <a:pPr algn="ctr" indent="0" marL="0">
-              <a:buNone/>
-            </a:pPr>
-            <a:r>
-              <a:rPr lang="en-US" sz="1100" b="1" dirty="0">
-                <a:solidFill>
-                  <a:schemeClr val="bg1"/>
-                </a:solidFill>
-              </a:rPr>
-              <a:t>ハンズオン① 20分</a:t>
-            </a:r>
-            <a:endParaRPr lang="en-US" sz="1100" dirty="0"/>
-          </a:p>
-        </p:txBody>
-      </p:sp>
-      <p:sp>
-        <p:nvSpPr>
-          <p:cNvPr id="6" name="step-num"/>
-          <p:cNvSpPr/>
-          <p:nvPr/>
-        </p:nvSpPr>
-        <p:spPr>
-          <a:xfrm>
-            <a:off x="548640" y="1787652"/>
-            <a:ext cx="384048" cy="384048"/>
-          </a:xfrm>
-          <a:prstGeom prst="ellipse">
-            <a:avLst/>
-          </a:prstGeom>
-          <a:solidFill>
-            <a:schemeClr val="accent1"/>
-          </a:solidFill>
-          <a:ln w="15875">
+          <a:ln w="25400">
             <a:solidFill>
               <a:srgbClr val="1A1A1A"/>
             </a:solidFill>
             <a:prstDash val="solid"/>
           </a:ln>
-        </p:spPr>
-      </p:sp>
-      <p:sp>
-        <p:nvSpPr>
-          <p:cNvPr id="7" name="step-num-text"/>
+          <a:effectLst>
+            <a:outerShdw sx="100000" sy="100000" kx="0" ky="0" algn="bl" rotWithShape="0" blurRad="101600" dist="38100" dir="2700000">
+              <a:srgbClr val="1A1A1A">
+                <a:alpha val="100000"/>
+              </a:srgbClr>
+            </a:outerShdw>
+          </a:effectLst>
+        </p:spPr>
+      </p:sp>
+      <p:sp>
+        <p:nvSpPr>
+          <p:cNvPr id="6" name="Text 3"/>
           <p:cNvSpPr txBox="1"/>
           <p:nvPr/>
         </p:nvSpPr>
         <p:spPr>
           <a:xfrm>
-            <a:off x="548640" y="1787652"/>
-            <a:ext cx="384048" cy="384048"/>
+            <a:off x="640080" y="1687068"/>
+            <a:ext cx="402336" cy="402336"/>
+          </a:xfrm>
+          <a:prstGeom prst="ellipse">
+            <a:avLst/>
+          </a:prstGeom>
+          <a:solidFill>
+            <a:srgbClr val="DD6420"/>
+          </a:solidFill>
+          <a:ln w="19050">
+            <a:solidFill>
+              <a:srgbClr val="1A1A1A"/>
+            </a:solidFill>
+          </a:ln>
+        </p:spPr>
+        <p:txBody>
+          <a:bodyPr wrap="square" lIns="0" tIns="0" rIns="0" bIns="0" rtlCol="0" anchor="ctr"/>
+          <a:lstStyle/>
+          <a:p>
+            <a:pPr algn="ctr" indent="0" marL="0">
+              <a:buNone/>
+            </a:pPr>
+            <a:r>
+              <a:rPr lang="ja-JP" altLang="en-US" sz="1500" dirty="0">
+                <a:solidFill>
+                  <a:srgbClr val="FFFFFF"/>
+                </a:solidFill>
+                <a:latin typeface="Dela Gothic One" pitchFamily="34" charset="0"/>
+                <a:ea typeface="けいふぉんと" pitchFamily="34" charset="-122"/>
+                <a:cs typeface="Dela Gothic One" pitchFamily="34" charset="-120"/>
+              </a:rPr>
+              <a:t>1</a:t>
+            </a:r>
+            <a:endParaRPr lang="ja-JP" sz="1500" dirty="0"/>
+          </a:p>
+        </p:txBody>
+      </p:sp>
+      <p:sp>
+        <p:nvSpPr>
+          <p:cNvPr id="7" name="step-text"/>
+          <p:cNvSpPr txBox="1"/>
+          <p:nvPr/>
+        </p:nvSpPr>
+        <p:spPr>
+          <a:xfrm>
+            <a:off x="1234440" y="1604772"/>
+            <a:ext cx="7269480" cy="566928"/>
           </a:xfrm>
           <a:prstGeom prst="rect">
             <a:avLst/>
@@ -4825,95 +4949,118 @@
           <a:ln/>
         </p:spPr>
         <p:txBody>
-          <a:bodyPr wrap="square" lIns="0" tIns="0" rIns="0" bIns="0" rtlCol="0" anchor="ctr"/>
-          <a:lstStyle/>
-          <a:p>
-            <a:pPr algn="ctr" indent="0" marL="0">
-              <a:buNone/>
-            </a:pPr>
-            <a:r>
-              <a:rPr lang="en-US" sz="1400" b="1" dirty="0">
-                <a:solidFill>
-                  <a:schemeClr val="tx1"/>
-                </a:solidFill>
-              </a:rPr>
-              <a:t>1</a:t>
-            </a:r>
-            <a:endParaRPr lang="en-US" sz="1400" dirty="0"/>
-          </a:p>
-        </p:txBody>
-      </p:sp>
-      <p:sp>
-        <p:nvSpPr>
-          <p:cNvPr id="8" name="step-text"/>
-          <p:cNvSpPr txBox="1"/>
-          <p:nvPr/>
-        </p:nvSpPr>
-        <p:spPr>
-          <a:xfrm>
-            <a:off x="1097280" y="1677924"/>
-            <a:ext cx="7498080" cy="603504"/>
-          </a:xfrm>
-          <a:prstGeom prst="rect">
-            <a:avLst/>
-          </a:prstGeom>
-          <a:noFill/>
-          <a:ln/>
-        </p:spPr>
-        <p:txBody>
-          <a:bodyPr wrap="square" lIns="0" tIns="0" rIns="0" bIns="0" rtlCol="0" anchor="ctr"/>
+          <a:bodyPr wrap="square" lIns="0" tIns="0" rIns="0" bIns="0" rtlCol="0" anchor="ctr">
+            <a:normAutofit/>
+          </a:bodyPr>
           <a:lstStyle/>
           <a:p>
             <a:pPr indent="0" marL="0">
               <a:buNone/>
             </a:pPr>
             <a:r>
-              <a:rPr lang="en-US" sz="1450" dirty="0">
-                <a:solidFill>
-                  <a:schemeClr val="tx1"/>
-                </a:solidFill>
+              <a:rPr lang="ja-JP" altLang="en-US" sz="1400" b="1" dirty="0">
+                <a:solidFill>
+                  <a:srgbClr val="1A1A1A"/>
+                </a:solidFill>
+                <a:latin typeface="Noto Sans JP" pitchFamily="34" charset="0"/>
+                <a:ea typeface="Noto Sans JP" pitchFamily="34" charset="-122"/>
+                <a:cs typeface="Noto Sans JP" pitchFamily="34" charset="-120"/>
               </a:rPr>
               <a:t>1週間の仕事を思い出し、くり返している作業を10個書き出す</a:t>
             </a:r>
-            <a:endParaRPr lang="en-US" sz="1450" dirty="0"/>
-          </a:p>
-        </p:txBody>
-      </p:sp>
-      <p:sp>
-        <p:nvSpPr>
-          <p:cNvPr id="9" name="step-num"/>
+            <a:endParaRPr lang="ja-JP" sz="1400" dirty="0"/>
+          </a:p>
+        </p:txBody>
+      </p:sp>
+      <p:sp>
+        <p:nvSpPr>
+          <p:cNvPr id="8" name="card"/>
           <p:cNvSpPr/>
           <p:nvPr/>
         </p:nvSpPr>
         <p:spPr>
           <a:xfrm>
-            <a:off x="548640" y="2391156"/>
-            <a:ext cx="384048" cy="384048"/>
-          </a:xfrm>
-          <a:prstGeom prst="ellipse">
-            <a:avLst/>
+            <a:off x="502920" y="2299716"/>
+            <a:ext cx="8138160" cy="566928"/>
+          </a:xfrm>
+          <a:prstGeom prst="roundRect">
+            <a:avLst>
+              <a:gd name="adj" fmla="val 16129"/>
+            </a:avLst>
           </a:prstGeom>
           <a:solidFill>
-            <a:schemeClr val="accent1"/>
+            <a:srgbClr val="FFFFFF"/>
           </a:solidFill>
-          <a:ln w="15875">
+          <a:ln w="25400">
             <a:solidFill>
               <a:srgbClr val="1A1A1A"/>
             </a:solidFill>
             <a:prstDash val="solid"/>
           </a:ln>
-        </p:spPr>
-      </p:sp>
-      <p:sp>
-        <p:nvSpPr>
-          <p:cNvPr id="10" name="step-num-text"/>
+          <a:effectLst>
+            <a:outerShdw sx="100000" sy="100000" kx="0" ky="0" algn="bl" rotWithShape="0" blurRad="101600" dist="38100" dir="2700000">
+              <a:srgbClr val="1A1A1A">
+                <a:alpha val="100000"/>
+              </a:srgbClr>
+            </a:outerShdw>
+          </a:effectLst>
+        </p:spPr>
+      </p:sp>
+      <p:sp>
+        <p:nvSpPr>
+          <p:cNvPr id="9" name="Text 6"/>
           <p:cNvSpPr txBox="1"/>
           <p:nvPr/>
         </p:nvSpPr>
         <p:spPr>
           <a:xfrm>
-            <a:off x="548640" y="2391156"/>
-            <a:ext cx="384048" cy="384048"/>
+            <a:off x="640080" y="2382012"/>
+            <a:ext cx="402336" cy="402336"/>
+          </a:xfrm>
+          <a:prstGeom prst="ellipse">
+            <a:avLst/>
+          </a:prstGeom>
+          <a:solidFill>
+            <a:srgbClr val="DD6420"/>
+          </a:solidFill>
+          <a:ln w="19050">
+            <a:solidFill>
+              <a:srgbClr val="1A1A1A"/>
+            </a:solidFill>
+          </a:ln>
+        </p:spPr>
+        <p:txBody>
+          <a:bodyPr wrap="square" lIns="0" tIns="0" rIns="0" bIns="0" rtlCol="0" anchor="ctr"/>
+          <a:lstStyle/>
+          <a:p>
+            <a:pPr algn="ctr" indent="0" marL="0">
+              <a:buNone/>
+            </a:pPr>
+            <a:r>
+              <a:rPr lang="ja-JP" altLang="en-US" sz="1500" dirty="0">
+                <a:solidFill>
+                  <a:srgbClr val="FFFFFF"/>
+                </a:solidFill>
+                <a:latin typeface="Dela Gothic One" pitchFamily="34" charset="0"/>
+                <a:ea typeface="けいふぉんと" pitchFamily="34" charset="-122"/>
+                <a:cs typeface="Dela Gothic One" pitchFamily="34" charset="-120"/>
+              </a:rPr>
+              <a:t>2</a:t>
+            </a:r>
+            <a:endParaRPr lang="ja-JP" sz="1500" dirty="0"/>
+          </a:p>
+        </p:txBody>
+      </p:sp>
+      <p:sp>
+        <p:nvSpPr>
+          <p:cNvPr id="10" name="step-text"/>
+          <p:cNvSpPr txBox="1"/>
+          <p:nvPr/>
+        </p:nvSpPr>
+        <p:spPr>
+          <a:xfrm>
+            <a:off x="1234440" y="2299716"/>
+            <a:ext cx="7269480" cy="566928"/>
           </a:xfrm>
           <a:prstGeom prst="rect">
             <a:avLst/>
@@ -4922,95 +5069,118 @@
           <a:ln/>
         </p:spPr>
         <p:txBody>
-          <a:bodyPr wrap="square" lIns="0" tIns="0" rIns="0" bIns="0" rtlCol="0" anchor="ctr"/>
-          <a:lstStyle/>
-          <a:p>
-            <a:pPr algn="ctr" indent="0" marL="0">
-              <a:buNone/>
-            </a:pPr>
-            <a:r>
-              <a:rPr lang="en-US" sz="1400" b="1" dirty="0">
-                <a:solidFill>
-                  <a:schemeClr val="tx1"/>
-                </a:solidFill>
-              </a:rPr>
-              <a:t>2</a:t>
-            </a:r>
-            <a:endParaRPr lang="en-US" sz="1400" dirty="0"/>
-          </a:p>
-        </p:txBody>
-      </p:sp>
-      <p:sp>
-        <p:nvSpPr>
-          <p:cNvPr id="11" name="step-text"/>
-          <p:cNvSpPr txBox="1"/>
-          <p:nvPr/>
-        </p:nvSpPr>
-        <p:spPr>
-          <a:xfrm>
-            <a:off x="1097280" y="2281428"/>
-            <a:ext cx="7498080" cy="603504"/>
-          </a:xfrm>
-          <a:prstGeom prst="rect">
-            <a:avLst/>
-          </a:prstGeom>
-          <a:noFill/>
-          <a:ln/>
-        </p:spPr>
-        <p:txBody>
-          <a:bodyPr wrap="square" lIns="0" tIns="0" rIns="0" bIns="0" rtlCol="0" anchor="ctr"/>
+          <a:bodyPr wrap="square" lIns="0" tIns="0" rIns="0" bIns="0" rtlCol="0" anchor="ctr">
+            <a:normAutofit/>
+          </a:bodyPr>
           <a:lstStyle/>
           <a:p>
             <a:pPr indent="0" marL="0">
               <a:buNone/>
             </a:pPr>
             <a:r>
-              <a:rPr lang="en-US" sz="1450" dirty="0">
-                <a:solidFill>
-                  <a:schemeClr val="tx1"/>
-                </a:solidFill>
+              <a:rPr lang="ja-JP" altLang="en-US" sz="1400" b="1" dirty="0">
+                <a:solidFill>
+                  <a:srgbClr val="1A1A1A"/>
+                </a:solidFill>
+                <a:latin typeface="Noto Sans JP" pitchFamily="34" charset="0"/>
+                <a:ea typeface="Noto Sans JP" pitchFamily="34" charset="-122"/>
+                <a:cs typeface="Noto Sans JP" pitchFamily="34" charset="-120"/>
               </a:rPr>
               <a:t>それぞれに「誰が」「頻度」「何を使って（紙・Excel・電話・LINE）」を書く</a:t>
             </a:r>
-            <a:endParaRPr lang="en-US" sz="1450" dirty="0"/>
-          </a:p>
-        </p:txBody>
-      </p:sp>
-      <p:sp>
-        <p:nvSpPr>
-          <p:cNvPr id="12" name="step-num"/>
+            <a:endParaRPr lang="ja-JP" sz="1400" dirty="0"/>
+          </a:p>
+        </p:txBody>
+      </p:sp>
+      <p:sp>
+        <p:nvSpPr>
+          <p:cNvPr id="11" name="card"/>
           <p:cNvSpPr/>
           <p:nvPr/>
         </p:nvSpPr>
         <p:spPr>
           <a:xfrm>
-            <a:off x="548640" y="2994660"/>
-            <a:ext cx="384048" cy="384048"/>
-          </a:xfrm>
-          <a:prstGeom prst="ellipse">
-            <a:avLst/>
+            <a:off x="502920" y="2994660"/>
+            <a:ext cx="8138160" cy="566928"/>
+          </a:xfrm>
+          <a:prstGeom prst="roundRect">
+            <a:avLst>
+              <a:gd name="adj" fmla="val 16129"/>
+            </a:avLst>
           </a:prstGeom>
           <a:solidFill>
-            <a:schemeClr val="accent1"/>
+            <a:srgbClr val="FFFFFF"/>
           </a:solidFill>
-          <a:ln w="15875">
+          <a:ln w="25400">
             <a:solidFill>
               <a:srgbClr val="1A1A1A"/>
             </a:solidFill>
             <a:prstDash val="solid"/>
           </a:ln>
-        </p:spPr>
-      </p:sp>
-      <p:sp>
-        <p:nvSpPr>
-          <p:cNvPr id="13" name="step-num-text"/>
+          <a:effectLst>
+            <a:outerShdw sx="100000" sy="100000" kx="0" ky="0" algn="bl" rotWithShape="0" blurRad="101600" dist="38100" dir="2700000">
+              <a:srgbClr val="1A1A1A">
+                <a:alpha val="100000"/>
+              </a:srgbClr>
+            </a:outerShdw>
+          </a:effectLst>
+        </p:spPr>
+      </p:sp>
+      <p:sp>
+        <p:nvSpPr>
+          <p:cNvPr id="12" name="Text 9"/>
           <p:cNvSpPr txBox="1"/>
           <p:nvPr/>
         </p:nvSpPr>
         <p:spPr>
           <a:xfrm>
-            <a:off x="548640" y="2994660"/>
-            <a:ext cx="384048" cy="384048"/>
+            <a:off x="640080" y="3076956"/>
+            <a:ext cx="402336" cy="402336"/>
+          </a:xfrm>
+          <a:prstGeom prst="ellipse">
+            <a:avLst/>
+          </a:prstGeom>
+          <a:solidFill>
+            <a:srgbClr val="DD6420"/>
+          </a:solidFill>
+          <a:ln w="19050">
+            <a:solidFill>
+              <a:srgbClr val="1A1A1A"/>
+            </a:solidFill>
+          </a:ln>
+        </p:spPr>
+        <p:txBody>
+          <a:bodyPr wrap="square" lIns="0" tIns="0" rIns="0" bIns="0" rtlCol="0" anchor="ctr"/>
+          <a:lstStyle/>
+          <a:p>
+            <a:pPr algn="ctr" indent="0" marL="0">
+              <a:buNone/>
+            </a:pPr>
+            <a:r>
+              <a:rPr lang="ja-JP" altLang="en-US" sz="1500" dirty="0">
+                <a:solidFill>
+                  <a:srgbClr val="FFFFFF"/>
+                </a:solidFill>
+                <a:latin typeface="Dela Gothic One" pitchFamily="34" charset="0"/>
+                <a:ea typeface="けいふぉんと" pitchFamily="34" charset="-122"/>
+                <a:cs typeface="Dela Gothic One" pitchFamily="34" charset="-120"/>
+              </a:rPr>
+              <a:t>3</a:t>
+            </a:r>
+            <a:endParaRPr lang="ja-JP" sz="1500" dirty="0"/>
+          </a:p>
+        </p:txBody>
+      </p:sp>
+      <p:sp>
+        <p:nvSpPr>
+          <p:cNvPr id="13" name="step-text"/>
+          <p:cNvSpPr txBox="1"/>
+          <p:nvPr/>
+        </p:nvSpPr>
+        <p:spPr>
+          <a:xfrm>
+            <a:off x="1234440" y="2994660"/>
+            <a:ext cx="7269480" cy="566928"/>
           </a:xfrm>
           <a:prstGeom prst="rect">
             <a:avLst/>
@@ -5019,144 +5189,94 @@
           <a:ln/>
         </p:spPr>
         <p:txBody>
-          <a:bodyPr wrap="square" lIns="0" tIns="0" rIns="0" bIns="0" rtlCol="0" anchor="ctr"/>
+          <a:bodyPr wrap="square" lIns="0" tIns="0" rIns="0" bIns="0" rtlCol="0" anchor="ctr">
+            <a:normAutofit/>
+          </a:bodyPr>
+          <a:lstStyle/>
+          <a:p>
+            <a:pPr indent="0" marL="0">
+              <a:buNone/>
+            </a:pPr>
+            <a:r>
+              <a:rPr lang="ja-JP" altLang="en-US" sz="1400" b="1" dirty="0">
+                <a:solidFill>
+                  <a:srgbClr val="1A1A1A"/>
+                </a:solidFill>
+                <a:latin typeface="Noto Sans JP" pitchFamily="34" charset="0"/>
+                <a:ea typeface="Noto Sans JP" pitchFamily="34" charset="-122"/>
+                <a:cs typeface="Noto Sans JP" pitchFamily="34" charset="-120"/>
+              </a:rPr>
+              <a:t>「面倒」「ミスが起きる」「人に聞かないとわからない」に印を付ける</a:t>
+            </a:r>
+            <a:endParaRPr lang="ja-JP" sz="1400" dirty="0"/>
+          </a:p>
+        </p:txBody>
+      </p:sp>
+      <p:sp>
+        <p:nvSpPr>
+          <p:cNvPr id="14" name="Text 11"/>
+          <p:cNvSpPr txBox="1"/>
+          <p:nvPr/>
+        </p:nvSpPr>
+        <p:spPr>
+          <a:xfrm rot="-60000">
+            <a:off x="502920" y="4005072"/>
+            <a:ext cx="8138160" cy="502920"/>
+          </a:xfrm>
+          <a:prstGeom prst="rect">
+            <a:avLst/>
+          </a:prstGeom>
+          <a:solidFill>
+            <a:srgbClr val="DD6420"/>
+          </a:solidFill>
+          <a:ln w="19050">
+            <a:solidFill>
+              <a:srgbClr val="1A1A1A"/>
+            </a:solidFill>
+          </a:ln>
+          <a:effectLst>
+            <a:outerShdw sx="100000" sy="100000" kx="0" ky="0" algn="bl" rotWithShape="0" blurRad="101600" dist="38100" dir="2700000">
+              <a:srgbClr val="1A1A1A">
+                <a:alpha val="100000"/>
+              </a:srgbClr>
+            </a:outerShdw>
+          </a:effectLst>
+        </p:spPr>
+        <p:txBody>
+          <a:bodyPr wrap="square" lIns="0" tIns="1905" rIns="1905" bIns="0" rtlCol="0" anchor="ctr">
+            <a:normAutofit/>
+          </a:bodyPr>
           <a:lstStyle/>
           <a:p>
             <a:pPr algn="ctr" indent="0" marL="0">
               <a:buNone/>
             </a:pPr>
             <a:r>
-              <a:rPr lang="en-US" sz="1400" b="1" dirty="0">
-                <a:solidFill>
-                  <a:schemeClr val="tx1"/>
-                </a:solidFill>
-              </a:rPr>
-              <a:t>3</a:t>
-            </a:r>
-            <a:endParaRPr lang="en-US" sz="1400" dirty="0"/>
-          </a:p>
-        </p:txBody>
-      </p:sp>
-      <p:sp>
-        <p:nvSpPr>
-          <p:cNvPr id="14" name="step-text"/>
-          <p:cNvSpPr txBox="1"/>
-          <p:nvPr/>
-        </p:nvSpPr>
-        <p:spPr>
-          <a:xfrm>
-            <a:off x="1097280" y="2884932"/>
-            <a:ext cx="7498080" cy="603504"/>
-          </a:xfrm>
-          <a:prstGeom prst="rect">
-            <a:avLst/>
-          </a:prstGeom>
-          <a:noFill/>
-          <a:ln/>
-        </p:spPr>
-        <p:txBody>
-          <a:bodyPr wrap="square" lIns="0" tIns="0" rIns="0" bIns="0" rtlCol="0" anchor="ctr"/>
-          <a:lstStyle/>
-          <a:p>
-            <a:pPr indent="0" marL="0">
-              <a:buNone/>
-            </a:pPr>
-            <a:r>
-              <a:rPr lang="en-US" sz="1450" dirty="0">
-                <a:solidFill>
-                  <a:schemeClr val="tx1"/>
-                </a:solidFill>
-              </a:rPr>
-              <a:t>「面倒」「ミスが起きる」「人に聞かないとわからない」に印を付ける</a:t>
-            </a:r>
-            <a:endParaRPr lang="en-US" sz="1450" dirty="0"/>
-          </a:p>
-        </p:txBody>
-      </p:sp>
-      <p:sp>
-        <p:nvSpPr>
-          <p:cNvPr id="15" name="foot-box"/>
-          <p:cNvSpPr/>
-          <p:nvPr/>
-        </p:nvSpPr>
-        <p:spPr>
-          <a:xfrm>
-            <a:off x="548640" y="3977640"/>
-            <a:ext cx="8046720" cy="502920"/>
-          </a:xfrm>
-          <a:prstGeom prst="roundRect">
-            <a:avLst>
-              <a:gd name="adj" fmla="val 18182"/>
-            </a:avLst>
-          </a:prstGeom>
-          <a:solidFill>
-            <a:schemeClr val="bg2"/>
-          </a:solidFill>
-          <a:ln w="12700">
-            <a:solidFill>
-              <a:schemeClr val="bg2"/>
-            </a:solidFill>
-            <a:prstDash val="solid"/>
-          </a:ln>
-        </p:spPr>
-      </p:sp>
-      <p:pic>
-        <p:nvPicPr>
-          <p:cNvPr id="16" name="foot-icon" descr="preencoded.png">    </p:cNvPr>
-          <p:cNvPicPr>
-            <a:picLocks noChangeAspect="1"/>
-          </p:cNvPicPr>
-          <p:nvPr/>
-        </p:nvPicPr>
-        <p:blipFill>
-          <a:blip r:embed="rId1"/>
-          <a:stretch>
-            <a:fillRect/>
-          </a:stretch>
-        </p:blipFill>
-        <p:spPr>
-          <a:xfrm>
-            <a:off x="685800" y="4105656"/>
-            <a:ext cx="246888" cy="246888"/>
-          </a:xfrm>
-          <a:prstGeom prst="rect">
-            <a:avLst/>
-          </a:prstGeom>
-        </p:spPr>
-      </p:pic>
-      <p:sp>
-        <p:nvSpPr>
-          <p:cNvPr id="17" name="foot-text"/>
-          <p:cNvSpPr txBox="1"/>
-          <p:nvPr/>
-        </p:nvSpPr>
-        <p:spPr>
-          <a:xfrm>
-            <a:off x="1051560" y="3977640"/>
-            <a:ext cx="7406640" cy="502920"/>
-          </a:xfrm>
-          <a:prstGeom prst="rect">
-            <a:avLst/>
-          </a:prstGeom>
-          <a:noFill/>
-          <a:ln/>
-        </p:spPr>
-        <p:txBody>
-          <a:bodyPr wrap="square" lIns="0" tIns="0" rIns="0" bIns="0" rtlCol="0" anchor="ctr"/>
-          <a:lstStyle/>
-          <a:p>
-            <a:pPr indent="0" marL="0">
-              <a:buNone/>
-            </a:pPr>
-            <a:r>
-              <a:rPr lang="en-US" sz="1150" dirty="0">
-                <a:solidFill>
-                  <a:schemeClr val="tx1"/>
-                </a:solidFill>
-              </a:rPr>
-              <a:t>使うもの：作りたいもの設計シート「1. 業務の棚卸し」</a:t>
-            </a:r>
-            <a:endParaRPr lang="en-US" sz="1150" dirty="0"/>
+              <a:rPr lang="ja-JP" altLang="en-US" sz="1300" b="1" dirty="0">
+                <a:solidFill>
+                  <a:srgbClr val="FFFFFF"/>
+                </a:solidFill>
+                <a:latin typeface="Noto Sans JP" pitchFamily="34" charset="0"/>
+                <a:ea typeface="Noto Sans JP" pitchFamily="34" charset="-122"/>
+                <a:cs typeface="Noto Sans JP" pitchFamily="34" charset="-120"/>
+              </a:rPr>
+              <a:t>使うもの：作りたいもの設計シート</a:t>
+            </a:r>
+            <a:pPr algn="ctr" indent="0" marL="0">
+              <a:buNone/>
+            </a:pPr>
+            <a:r>
+              <a:rPr lang="ja-JP" altLang="en-US" sz="1300" b="1" dirty="0">
+                <a:solidFill>
+                  <a:srgbClr val="FFD600"/>
+                </a:solidFill>
+                <a:latin typeface="Noto Sans JP" pitchFamily="34" charset="0"/>
+                <a:ea typeface="Noto Sans JP" pitchFamily="34" charset="-122"/>
+                <a:cs typeface="Noto Sans JP" pitchFamily="34" charset="-120"/>
+              </a:rPr>
+              <a:t>「1. 業務の棚卸し」</a:t>
+            </a:r>
+            <a:endParaRPr lang="ja-JP" sz="1300" dirty="0"/>
           </a:p>
         </p:txBody>
       </p:sp>
@@ -5172,8 +5292,8 @@
         </p:nvSpPr>
         <p:spPr>
           <a:xfrm>
-            <a:off x="8229600" y="4773168"/>
-            <a:ext cx="365760" cy="228600"/>
+            <a:off x="8366760" y="4754880"/>
+            <a:ext cx="365760" cy="274320"/>
           </a:xfrm>
           <a:prstGeom prst="rect">
             <a:avLst/>
@@ -5185,20 +5305,23 @@
           </a:extLst>
         </p:spPr>
         <p:txBody>
-          <a:bodyPr/>
+          <a:bodyPr anchor="ctr"/>
           <a:lstStyle>
             <a:lvl1pPr>
-              <a:defRPr sz="900">
-                <a:solidFill>
-                  <a:srgbClr val="5A6872"/>
-                </a:solidFill>
+              <a:defRPr sz="850">
+                <a:solidFill>
+                  <a:srgbClr val="FFFFFF"/>
+                </a:solidFill>
+                <a:latin typeface="Noto Sans JP"/>
+                <a:ea typeface="Noto Sans JP"/>
+                <a:cs typeface="Noto Sans JP"/>
               </a:defRPr>
             </a:lvl1pPr>
           </a:lstStyle>
           <a:p>
             <a:pPr algn="r"/>
             <a:fld id="{F7021451-1387-4CA6-816F-3879F97B5CBC}" type="slidenum">
-              <a:rPr b="0" lang="en-US"/>
+              <a:rPr b="1" lang="en-US"/>
               <a:t>5</a:t>
             </a:fld>
             <a:endParaRPr lang="en-US"/>
@@ -5233,15 +5356,58 @@
       <p:sp>
         <p:nvSpPr>
           <p:cNvPr id="2" name="Text 0"/>
-          <p:cNvSpPr/>
-          <p:nvPr>
-            <p:ph idx="100" type="title" hasCustomPrompt="1"/>
-          </p:nvPr>
-        </p:nvSpPr>
-        <p:spPr>
-          <a:xfrm>
-            <a:off x="548640" y="658368"/>
-            <a:ext cx="8046720" cy="566928"/>
+          <p:cNvSpPr txBox="1"/>
+          <p:nvPr/>
+        </p:nvSpPr>
+        <p:spPr>
+          <a:xfrm rot="-180000">
+            <a:off x="411480" y="201168"/>
+            <a:ext cx="1478128" cy="352044"/>
+          </a:xfrm>
+          <a:prstGeom prst="rect">
+            <a:avLst/>
+          </a:prstGeom>
+          <a:solidFill>
+            <a:srgbClr val="1A1A1A"/>
+          </a:solidFill>
+          <a:ln>
+            <a:solidFill>
+              <a:srgbClr val="1A1A1A"/>
+            </a:solidFill>
+          </a:ln>
+        </p:spPr>
+        <p:txBody>
+          <a:bodyPr wrap="square" lIns="0" tIns="0" rIns="0" bIns="0" rtlCol="0" anchor="ctr"/>
+          <a:lstStyle/>
+          <a:p>
+            <a:pPr algn="ctr" indent="0" marL="0">
+              <a:buNone/>
+            </a:pPr>
+            <a:r>
+              <a:rPr lang="ja-JP" altLang="en-US" sz="1100" dirty="0">
+                <a:solidFill>
+                  <a:srgbClr val="FFFFFF"/>
+                </a:solidFill>
+                <a:latin typeface="Dela Gothic One" pitchFamily="34" charset="0"/>
+                <a:ea typeface="けいふぉんと" pitchFamily="34" charset="-122"/>
+                <a:cs typeface="Dela Gothic One" pitchFamily="34" charset="-120"/>
+              </a:rPr>
+              <a:t>説明② 10分</a:t>
+            </a:r>
+            <a:endParaRPr lang="ja-JP" sz="1100" dirty="0"/>
+          </a:p>
+        </p:txBody>
+      </p:sp>
+      <p:sp>
+        <p:nvSpPr>
+          <p:cNvPr id="3" name="Text 1"/>
+          <p:cNvSpPr txBox="1"/>
+          <p:nvPr/>
+        </p:nvSpPr>
+        <p:spPr>
+          <a:xfrm>
+            <a:off x="411480" y="502920"/>
+            <a:ext cx="8321040" cy="685800"/>
           </a:xfrm>
           <a:prstGeom prst="rect">
             <a:avLst/>
@@ -5250,86 +5416,60 @@
           <a:ln/>
         </p:spPr>
         <p:txBody>
-          <a:bodyPr wrap="square" lIns="0" tIns="0" rIns="0" bIns="0" rtlCol="0" anchor="ctr"/>
-          <a:lstStyle/>
-          <a:p>
-            <a:pPr algn="l" indent="0" marL="0">
-              <a:buNone/>
-            </a:pPr>
-            <a:r>
-              <a:rPr lang="en-US" sz="2400" b="1" dirty="0">
-                <a:solidFill>
-                  <a:schemeClr val="tx1"/>
-                </a:solidFill>
+          <a:bodyPr wrap="square" lIns="0" tIns="0" rIns="0" bIns="0" rtlCol="0" anchor="ctr">
+            <a:normAutofit/>
+          </a:bodyPr>
+          <a:lstStyle/>
+          <a:p>
+            <a:pPr indent="0" marL="0">
+              <a:buNone/>
+            </a:pPr>
+            <a:r>
+              <a:rPr lang="ja-JP" altLang="en-US" sz="2600" dirty="0">
+                <a:solidFill>
+                  <a:srgbClr val="1A1A1A"/>
+                </a:solidFill>
+                <a:latin typeface="Dela Gothic One" pitchFamily="34" charset="0"/>
+                <a:ea typeface="けいふぉんと" pitchFamily="34" charset="-122"/>
+                <a:cs typeface="Dela Gothic One" pitchFamily="34" charset="-120"/>
               </a:rPr>
               <a:t>困りごとは4つの型に分けられる</a:t>
             </a:r>
-            <a:endParaRPr lang="en-US" sz="2400" dirty="0"/>
-          </a:p>
-        </p:txBody>
-      </p:sp>
-      <p:sp>
-        <p:nvSpPr>
-          <p:cNvPr id="3" name="chip"/>
+            <a:endParaRPr lang="ja-JP" sz="2600" dirty="0"/>
+          </a:p>
+        </p:txBody>
+      </p:sp>
+      <p:sp>
+        <p:nvSpPr>
+          <p:cNvPr id="5" name="Shape 2"/>
           <p:cNvSpPr/>
           <p:nvPr/>
         </p:nvSpPr>
         <p:spPr>
           <a:xfrm>
-            <a:off x="548640" y="292608"/>
-            <a:ext cx="1344168" cy="292608"/>
-          </a:xfrm>
-          <a:prstGeom prst="roundRect">
-            <a:avLst>
-              <a:gd name="adj" fmla="val 50000"/>
-            </a:avLst>
+            <a:off x="502920" y="1417320"/>
+            <a:ext cx="8138160" cy="2194560"/>
+          </a:xfrm>
+          <a:prstGeom prst="rect">
+            <a:avLst/>
           </a:prstGeom>
           <a:solidFill>
-            <a:schemeClr val="tx1"/>
+            <a:srgbClr val="FFFFFF"/>
           </a:solidFill>
-          <a:ln w="12700">
+          <a:ln w="25400">
             <a:solidFill>
-              <a:schemeClr val="tx1"/>
+              <a:srgbClr val="1A1A1A"/>
             </a:solidFill>
             <a:prstDash val="solid"/>
           </a:ln>
-        </p:spPr>
-      </p:sp>
-      <p:sp>
-        <p:nvSpPr>
-          <p:cNvPr id="4" name="chip-text"/>
-          <p:cNvSpPr txBox="1"/>
-          <p:nvPr/>
-        </p:nvSpPr>
-        <p:spPr>
-          <a:xfrm>
-            <a:off x="548640" y="292608"/>
-            <a:ext cx="1344168" cy="292608"/>
-          </a:xfrm>
-          <a:prstGeom prst="rect">
-            <a:avLst/>
-          </a:prstGeom>
-          <a:noFill/>
-          <a:ln/>
-        </p:spPr>
-        <p:txBody>
-          <a:bodyPr wrap="square" lIns="0" tIns="0" rIns="0" bIns="0" rtlCol="0" anchor="ctr"/>
-          <a:lstStyle/>
-          <a:p>
-            <a:pPr algn="ctr" indent="0" marL="0">
-              <a:buNone/>
-            </a:pPr>
-            <a:r>
-              <a:rPr lang="en-US" sz="1100" b="1" dirty="0">
-                <a:solidFill>
-                  <a:schemeClr val="accent1"/>
-                </a:solidFill>
-              </a:rPr>
-              <a:t>説明② 10分</a:t>
-            </a:r>
-            <a:endParaRPr lang="en-US" sz="1100" dirty="0"/>
-          </a:p>
-        </p:txBody>
+          <a:effectLst>
+            <a:outerShdw sx="100000" sy="100000" kx="0" ky="0" algn="bl" rotWithShape="0" blurRad="101600" dist="50800" dir="2700000">
+              <a:srgbClr val="1A1A1A">
+                <a:alpha val="100000"/>
+              </a:srgbClr>
+            </a:outerShdw>
+          </a:effectLst>
+        </p:spPr>
       </p:sp>
       <p:graphicFrame>
         <p:nvGraphicFramePr>
@@ -5346,17 +5486,17 @@
           </p:nvPr>
         </p:nvGraphicFramePr>
         <p:xfrm>
-          <a:off x="548640" y="1463040"/>
-          <a:ext cx="8046720" cy="914400"/>
+          <a:off x="502920" y="1417320"/>
+          <a:ext cx="8138160" cy="914400"/>
         </p:xfrm>
         <a:graphic>
           <a:graphicData uri="http://schemas.openxmlformats.org/drawingml/2006/table">
             <a:tbl>
               <a:tblPr/>
               <a:tblGrid>
-                <a:gridCol w="1430528"/>
-                <a:gridCol w="3218688"/>
-                <a:gridCol w="3397504"/>
+                <a:gridCol w="1446784"/>
+                <a:gridCol w="3255264"/>
+                <a:gridCol w="3436112"/>
               </a:tblGrid>
               <a:tr h="438912">
                 <a:tc>
@@ -5368,47 +5508,54 @@
                         <a:buNone/>
                       </a:pPr>
                       <a:r>
-                        <a:rPr lang="en-US" sz="1200" b="1" dirty="0">
+                        <a:rPr lang="en-US" sz="1250" b="1" dirty="0">
                           <a:solidFill>
-                            <a:srgbClr val="FFD600"/>
+                            <a:srgbClr val="FFFFFF"/>
                           </a:solidFill>
+                          <a:latin typeface="Noto Sans JP" pitchFamily="34" charset="0"/>
+                          <a:ea typeface="Noto Sans JP" pitchFamily="34" charset="-122"/>
+                          <a:cs typeface="Noto Sans JP" pitchFamily="34" charset="-120"/>
                         </a:rPr>
                         <a:t>型</a:t>
                       </a:r>
-                      <a:endParaRPr lang="en-US" sz="1200" dirty="0"/>
+                      <a:endParaRPr lang="en-US" sz="1250" dirty="0">
+                        <a:latin typeface="Noto Sans JP" charset="0"/>
+                        <a:ea typeface="Noto Sans JP" charset="0"/>
+                        <a:cs typeface="Noto Sans JP" charset="0"/>
+                      </a:endParaRPr>
                     </a:p>
                   </a:txBody>
                   <a:tcPr marL="91440" marR="91440" marT="0" marB="0" anchor="ctr">
-                    <a:lnL w="9525" cap="flat" cmpd="sng" algn="ctr">
+                    <a:lnL w="12700" cap="flat" cmpd="sng" algn="ctr">
                       <a:solidFill>
-                        <a:srgbClr val="BBBBBB"/>
+                        <a:srgbClr val="1A1A1A"/>
                       </a:solidFill>
                       <a:prstDash val="solid"/>
                       <a:round/>
                       <a:headEnd type="none" w="med" len="med"/>
                       <a:tailEnd type="none" w="med" len="med"/>
                     </a:lnL>
-                    <a:lnR w="9525" cap="flat" cmpd="sng" algn="ctr">
+                    <a:lnR w="12700" cap="flat" cmpd="sng" algn="ctr">
                       <a:solidFill>
-                        <a:srgbClr val="BBBBBB"/>
+                        <a:srgbClr val="1A1A1A"/>
                       </a:solidFill>
                       <a:prstDash val="solid"/>
                       <a:round/>
                       <a:headEnd type="none" w="med" len="med"/>
                       <a:tailEnd type="none" w="med" len="med"/>
                     </a:lnR>
-                    <a:lnT w="9525" cap="flat" cmpd="sng" algn="ctr">
+                    <a:lnT w="12700" cap="flat" cmpd="sng" algn="ctr">
                       <a:solidFill>
-                        <a:srgbClr val="BBBBBB"/>
+                        <a:srgbClr val="1A1A1A"/>
                       </a:solidFill>
                       <a:prstDash val="solid"/>
                       <a:round/>
                       <a:headEnd type="none" w="med" len="med"/>
                       <a:tailEnd type="none" w="med" len="med"/>
                     </a:lnT>
-                    <a:lnB w="9525" cap="flat" cmpd="sng" algn="ctr">
+                    <a:lnB w="12700" cap="flat" cmpd="sng" algn="ctr">
                       <a:solidFill>
-                        <a:srgbClr val="BBBBBB"/>
+                        <a:srgbClr val="1A1A1A"/>
                       </a:solidFill>
                       <a:prstDash val="solid"/>
                       <a:round/>
@@ -5429,47 +5576,54 @@
                         <a:buNone/>
                       </a:pPr>
                       <a:r>
-                        <a:rPr lang="en-US" sz="1200" b="1" dirty="0">
+                        <a:rPr lang="en-US" sz="1250" b="1" dirty="0">
                           <a:solidFill>
-                            <a:srgbClr val="FFD600"/>
+                            <a:srgbClr val="FFFFFF"/>
                           </a:solidFill>
+                          <a:latin typeface="Noto Sans JP" pitchFamily="34" charset="0"/>
+                          <a:ea typeface="Noto Sans JP" pitchFamily="34" charset="-122"/>
+                          <a:cs typeface="Noto Sans JP" pitchFamily="34" charset="-120"/>
                         </a:rPr>
                         <a:t>よくある困りごと</a:t>
                       </a:r>
-                      <a:endParaRPr lang="en-US" sz="1200" dirty="0"/>
+                      <a:endParaRPr lang="en-US" sz="1250" dirty="0">
+                        <a:latin typeface="Noto Sans JP" charset="0"/>
+                        <a:ea typeface="Noto Sans JP" charset="0"/>
+                        <a:cs typeface="Noto Sans JP" charset="0"/>
+                      </a:endParaRPr>
                     </a:p>
                   </a:txBody>
                   <a:tcPr marL="91440" marR="91440" marT="0" marB="0" anchor="ctr">
-                    <a:lnL w="9525" cap="flat" cmpd="sng" algn="ctr">
+                    <a:lnL w="12700" cap="flat" cmpd="sng" algn="ctr">
                       <a:solidFill>
-                        <a:srgbClr val="BBBBBB"/>
+                        <a:srgbClr val="1A1A1A"/>
                       </a:solidFill>
                       <a:prstDash val="solid"/>
                       <a:round/>
                       <a:headEnd type="none" w="med" len="med"/>
                       <a:tailEnd type="none" w="med" len="med"/>
                     </a:lnL>
-                    <a:lnR w="9525" cap="flat" cmpd="sng" algn="ctr">
+                    <a:lnR w="12700" cap="flat" cmpd="sng" algn="ctr">
                       <a:solidFill>
-                        <a:srgbClr val="BBBBBB"/>
+                        <a:srgbClr val="1A1A1A"/>
                       </a:solidFill>
                       <a:prstDash val="solid"/>
                       <a:round/>
                       <a:headEnd type="none" w="med" len="med"/>
                       <a:tailEnd type="none" w="med" len="med"/>
                     </a:lnR>
-                    <a:lnT w="9525" cap="flat" cmpd="sng" algn="ctr">
+                    <a:lnT w="12700" cap="flat" cmpd="sng" algn="ctr">
                       <a:solidFill>
-                        <a:srgbClr val="BBBBBB"/>
+                        <a:srgbClr val="1A1A1A"/>
                       </a:solidFill>
                       <a:prstDash val="solid"/>
                       <a:round/>
                       <a:headEnd type="none" w="med" len="med"/>
                       <a:tailEnd type="none" w="med" len="med"/>
                     </a:lnT>
-                    <a:lnB w="9525" cap="flat" cmpd="sng" algn="ctr">
+                    <a:lnB w="12700" cap="flat" cmpd="sng" algn="ctr">
                       <a:solidFill>
-                        <a:srgbClr val="BBBBBB"/>
+                        <a:srgbClr val="1A1A1A"/>
                       </a:solidFill>
                       <a:prstDash val="solid"/>
                       <a:round/>
@@ -5490,47 +5644,54 @@
                         <a:buNone/>
                       </a:pPr>
                       <a:r>
-                        <a:rPr lang="en-US" sz="1200" b="1" dirty="0">
+                        <a:rPr lang="en-US" sz="1250" b="1" dirty="0">
                           <a:solidFill>
-                            <a:srgbClr val="FFD600"/>
+                            <a:srgbClr val="FFFFFF"/>
                           </a:solidFill>
+                          <a:latin typeface="Noto Sans JP" pitchFamily="34" charset="0"/>
+                          <a:ea typeface="Noto Sans JP" pitchFamily="34" charset="-122"/>
+                          <a:cs typeface="Noto Sans JP" pitchFamily="34" charset="-120"/>
                         </a:rPr>
                         <a:t>しくみの形</a:t>
                       </a:r>
-                      <a:endParaRPr lang="en-US" sz="1200" dirty="0"/>
+                      <a:endParaRPr lang="en-US" sz="1250" dirty="0">
+                        <a:latin typeface="Noto Sans JP" charset="0"/>
+                        <a:ea typeface="Noto Sans JP" charset="0"/>
+                        <a:cs typeface="Noto Sans JP" charset="0"/>
+                      </a:endParaRPr>
                     </a:p>
                   </a:txBody>
                   <a:tcPr marL="91440" marR="91440" marT="0" marB="0" anchor="ctr">
-                    <a:lnL w="9525" cap="flat" cmpd="sng" algn="ctr">
+                    <a:lnL w="12700" cap="flat" cmpd="sng" algn="ctr">
                       <a:solidFill>
-                        <a:srgbClr val="BBBBBB"/>
+                        <a:srgbClr val="1A1A1A"/>
                       </a:solidFill>
                       <a:prstDash val="solid"/>
                       <a:round/>
                       <a:headEnd type="none" w="med" len="med"/>
                       <a:tailEnd type="none" w="med" len="med"/>
                     </a:lnL>
-                    <a:lnR w="9525" cap="flat" cmpd="sng" algn="ctr">
+                    <a:lnR w="12700" cap="flat" cmpd="sng" algn="ctr">
                       <a:solidFill>
-                        <a:srgbClr val="BBBBBB"/>
+                        <a:srgbClr val="1A1A1A"/>
                       </a:solidFill>
                       <a:prstDash val="solid"/>
                       <a:round/>
                       <a:headEnd type="none" w="med" len="med"/>
                       <a:tailEnd type="none" w="med" len="med"/>
                     </a:lnR>
-                    <a:lnT w="9525" cap="flat" cmpd="sng" algn="ctr">
+                    <a:lnT w="12700" cap="flat" cmpd="sng" algn="ctr">
                       <a:solidFill>
-                        <a:srgbClr val="BBBBBB"/>
+                        <a:srgbClr val="1A1A1A"/>
                       </a:solidFill>
                       <a:prstDash val="solid"/>
                       <a:round/>
                       <a:headEnd type="none" w="med" len="med"/>
                       <a:tailEnd type="none" w="med" len="med"/>
                     </a:lnT>
-                    <a:lnB w="9525" cap="flat" cmpd="sng" algn="ctr">
+                    <a:lnB w="12700" cap="flat" cmpd="sng" algn="ctr">
                       <a:solidFill>
-                        <a:srgbClr val="BBBBBB"/>
+                        <a:srgbClr val="1A1A1A"/>
                       </a:solidFill>
                       <a:prstDash val="solid"/>
                       <a:round/>
@@ -5555,45 +5716,52 @@
                       <a:r>
                         <a:rPr lang="en-US" sz="1200" b="1" dirty="0">
                           <a:solidFill>
-                            <a:srgbClr val="1A1A1A"/>
+                            <a:srgbClr val="DD6420"/>
                           </a:solidFill>
+                          <a:latin typeface="Noto Sans JP" pitchFamily="34" charset="0"/>
+                          <a:ea typeface="Noto Sans JP" pitchFamily="34" charset="-122"/>
+                          <a:cs typeface="Noto Sans JP" pitchFamily="34" charset="-120"/>
                         </a:rPr>
                         <a:t>集める</a:t>
                       </a:r>
-                      <a:endParaRPr lang="en-US" sz="1200" dirty="0"/>
+                      <a:endParaRPr lang="en-US" sz="1200" dirty="0">
+                        <a:latin typeface="Noto Sans JP" charset="0"/>
+                        <a:ea typeface="Noto Sans JP" charset="0"/>
+                        <a:cs typeface="Noto Sans JP" charset="0"/>
+                      </a:endParaRPr>
                     </a:p>
                   </a:txBody>
                   <a:tcPr marL="91440" marR="91440" marT="0" marB="0" anchor="ctr">
-                    <a:lnL w="9525" cap="flat" cmpd="sng" algn="ctr">
+                    <a:lnL w="12700" cap="flat" cmpd="sng" algn="ctr">
                       <a:solidFill>
-                        <a:srgbClr val="BBBBBB"/>
+                        <a:srgbClr val="1A1A1A"/>
                       </a:solidFill>
                       <a:prstDash val="solid"/>
                       <a:round/>
                       <a:headEnd type="none" w="med" len="med"/>
                       <a:tailEnd type="none" w="med" len="med"/>
                     </a:lnL>
-                    <a:lnR w="9525" cap="flat" cmpd="sng" algn="ctr">
+                    <a:lnR w="12700" cap="flat" cmpd="sng" algn="ctr">
                       <a:solidFill>
-                        <a:srgbClr val="BBBBBB"/>
+                        <a:srgbClr val="1A1A1A"/>
                       </a:solidFill>
                       <a:prstDash val="solid"/>
                       <a:round/>
                       <a:headEnd type="none" w="med" len="med"/>
                       <a:tailEnd type="none" w="med" len="med"/>
                     </a:lnR>
-                    <a:lnT w="9525" cap="flat" cmpd="sng" algn="ctr">
+                    <a:lnT w="12700" cap="flat" cmpd="sng" algn="ctr">
                       <a:solidFill>
-                        <a:srgbClr val="BBBBBB"/>
+                        <a:srgbClr val="1A1A1A"/>
                       </a:solidFill>
                       <a:prstDash val="solid"/>
                       <a:round/>
                       <a:headEnd type="none" w="med" len="med"/>
                       <a:tailEnd type="none" w="med" len="med"/>
                     </a:lnT>
-                    <a:lnB w="9525" cap="flat" cmpd="sng" algn="ctr">
+                    <a:lnB w="12700" cap="flat" cmpd="sng" algn="ctr">
                       <a:solidFill>
-                        <a:srgbClr val="BBBBBB"/>
+                        <a:srgbClr val="1A1A1A"/>
                       </a:solidFill>
                       <a:prstDash val="solid"/>
                       <a:round/>
@@ -5614,47 +5782,54 @@
                         <a:buNone/>
                       </a:pPr>
                       <a:r>
-                        <a:rPr lang="en-US" sz="1200" dirty="0">
+                        <a:rPr lang="en-US" sz="1200" b="1" dirty="0">
                           <a:solidFill>
                             <a:srgbClr val="1A1A1A"/>
                           </a:solidFill>
+                          <a:latin typeface="Noto Sans JP Medium" pitchFamily="34" charset="0"/>
+                          <a:ea typeface="Noto Sans JP Medium" pitchFamily="34" charset="-122"/>
+                          <a:cs typeface="Noto Sans JP Medium" pitchFamily="34" charset="-120"/>
                         </a:rPr>
                         <a:t>電話・紙・LINEにバラバラに届く</a:t>
                       </a:r>
-                      <a:endParaRPr lang="en-US" sz="1200" dirty="0"/>
+                      <a:endParaRPr lang="en-US" sz="1200" dirty="0">
+                        <a:latin typeface="Noto Sans JP Medium" charset="0"/>
+                        <a:ea typeface="Noto Sans JP Medium" charset="0"/>
+                        <a:cs typeface="Noto Sans JP Medium" charset="0"/>
+                      </a:endParaRPr>
                     </a:p>
                   </a:txBody>
                   <a:tcPr marL="91440" marR="91440" marT="0" marB="0" anchor="ctr">
-                    <a:lnL w="9525" cap="flat" cmpd="sng" algn="ctr">
+                    <a:lnL w="12700" cap="flat" cmpd="sng" algn="ctr">
                       <a:solidFill>
-                        <a:srgbClr val="BBBBBB"/>
+                        <a:srgbClr val="1A1A1A"/>
                       </a:solidFill>
                       <a:prstDash val="solid"/>
                       <a:round/>
                       <a:headEnd type="none" w="med" len="med"/>
                       <a:tailEnd type="none" w="med" len="med"/>
                     </a:lnL>
-                    <a:lnR w="9525" cap="flat" cmpd="sng" algn="ctr">
+                    <a:lnR w="12700" cap="flat" cmpd="sng" algn="ctr">
                       <a:solidFill>
-                        <a:srgbClr val="BBBBBB"/>
+                        <a:srgbClr val="1A1A1A"/>
                       </a:solidFill>
                       <a:prstDash val="solid"/>
                       <a:round/>
                       <a:headEnd type="none" w="med" len="med"/>
                       <a:tailEnd type="none" w="med" len="med"/>
                     </a:lnR>
-                    <a:lnT w="9525" cap="flat" cmpd="sng" algn="ctr">
+                    <a:lnT w="12700" cap="flat" cmpd="sng" algn="ctr">
                       <a:solidFill>
-                        <a:srgbClr val="BBBBBB"/>
+                        <a:srgbClr val="1A1A1A"/>
                       </a:solidFill>
                       <a:prstDash val="solid"/>
                       <a:round/>
                       <a:headEnd type="none" w="med" len="med"/>
                       <a:tailEnd type="none" w="med" len="med"/>
                     </a:lnT>
-                    <a:lnB w="9525" cap="flat" cmpd="sng" algn="ctr">
+                    <a:lnB w="12700" cap="flat" cmpd="sng" algn="ctr">
                       <a:solidFill>
-                        <a:srgbClr val="BBBBBB"/>
+                        <a:srgbClr val="1A1A1A"/>
                       </a:solidFill>
                       <a:prstDash val="solid"/>
                       <a:round/>
@@ -5675,47 +5850,54 @@
                         <a:buNone/>
                       </a:pPr>
                       <a:r>
-                        <a:rPr lang="en-US" sz="1200" dirty="0">
+                        <a:rPr lang="en-US" sz="1200" b="1" dirty="0">
                           <a:solidFill>
                             <a:srgbClr val="1A1A1A"/>
                           </a:solidFill>
+                          <a:latin typeface="Noto Sans JP Medium" pitchFamily="34" charset="0"/>
+                          <a:ea typeface="Noto Sans JP Medium" pitchFamily="34" charset="-122"/>
+                          <a:cs typeface="Noto Sans JP Medium" pitchFamily="34" charset="-120"/>
                         </a:rPr>
                         <a:t>入力フォーム（入口を1つに）</a:t>
                       </a:r>
-                      <a:endParaRPr lang="en-US" sz="1200" dirty="0"/>
+                      <a:endParaRPr lang="en-US" sz="1200" dirty="0">
+                        <a:latin typeface="Noto Sans JP Medium" charset="0"/>
+                        <a:ea typeface="Noto Sans JP Medium" charset="0"/>
+                        <a:cs typeface="Noto Sans JP Medium" charset="0"/>
+                      </a:endParaRPr>
                     </a:p>
                   </a:txBody>
                   <a:tcPr marL="91440" marR="91440" marT="0" marB="0" anchor="ctr">
-                    <a:lnL w="9525" cap="flat" cmpd="sng" algn="ctr">
+                    <a:lnL w="12700" cap="flat" cmpd="sng" algn="ctr">
                       <a:solidFill>
-                        <a:srgbClr val="BBBBBB"/>
+                        <a:srgbClr val="1A1A1A"/>
                       </a:solidFill>
                       <a:prstDash val="solid"/>
                       <a:round/>
                       <a:headEnd type="none" w="med" len="med"/>
                       <a:tailEnd type="none" w="med" len="med"/>
                     </a:lnL>
-                    <a:lnR w="9525" cap="flat" cmpd="sng" algn="ctr">
+                    <a:lnR w="12700" cap="flat" cmpd="sng" algn="ctr">
                       <a:solidFill>
-                        <a:srgbClr val="BBBBBB"/>
+                        <a:srgbClr val="1A1A1A"/>
                       </a:solidFill>
                       <a:prstDash val="solid"/>
                       <a:round/>
                       <a:headEnd type="none" w="med" len="med"/>
                       <a:tailEnd type="none" w="med" len="med"/>
                     </a:lnR>
-                    <a:lnT w="9525" cap="flat" cmpd="sng" algn="ctr">
+                    <a:lnT w="12700" cap="flat" cmpd="sng" algn="ctr">
                       <a:solidFill>
-                        <a:srgbClr val="BBBBBB"/>
+                        <a:srgbClr val="1A1A1A"/>
                       </a:solidFill>
                       <a:prstDash val="solid"/>
                       <a:round/>
                       <a:headEnd type="none" w="med" len="med"/>
                       <a:tailEnd type="none" w="med" len="med"/>
                     </a:lnT>
-                    <a:lnB w="9525" cap="flat" cmpd="sng" algn="ctr">
+                    <a:lnB w="12700" cap="flat" cmpd="sng" algn="ctr">
                       <a:solidFill>
-                        <a:srgbClr val="BBBBBB"/>
+                        <a:srgbClr val="1A1A1A"/>
                       </a:solidFill>
                       <a:prstDash val="solid"/>
                       <a:round/>
@@ -5740,230 +5922,52 @@
                       <a:r>
                         <a:rPr lang="en-US" sz="1200" b="1" dirty="0">
                           <a:solidFill>
-                            <a:srgbClr val="1A1A1A"/>
+                            <a:srgbClr val="DD6420"/>
                           </a:solidFill>
+                          <a:latin typeface="Noto Sans JP" pitchFamily="34" charset="0"/>
+                          <a:ea typeface="Noto Sans JP" pitchFamily="34" charset="-122"/>
+                          <a:cs typeface="Noto Sans JP" pitchFamily="34" charset="-120"/>
                         </a:rPr>
                         <a:t>貯める</a:t>
                       </a:r>
-                      <a:endParaRPr lang="en-US" sz="1200" dirty="0"/>
+                      <a:endParaRPr lang="en-US" sz="1200" dirty="0">
+                        <a:latin typeface="Noto Sans JP" charset="0"/>
+                        <a:ea typeface="Noto Sans JP" charset="0"/>
+                        <a:cs typeface="Noto Sans JP" charset="0"/>
+                      </a:endParaRPr>
                     </a:p>
                   </a:txBody>
                   <a:tcPr marL="91440" marR="91440" marT="0" marB="0" anchor="ctr">
-                    <a:lnL w="9525" cap="flat" cmpd="sng" algn="ctr">
+                    <a:lnL w="12700" cap="flat" cmpd="sng" algn="ctr">
                       <a:solidFill>
-                        <a:srgbClr val="BBBBBB"/>
+                        <a:srgbClr val="1A1A1A"/>
                       </a:solidFill>
                       <a:prstDash val="solid"/>
                       <a:round/>
                       <a:headEnd type="none" w="med" len="med"/>
                       <a:tailEnd type="none" w="med" len="med"/>
                     </a:lnL>
-                    <a:lnR w="9525" cap="flat" cmpd="sng" algn="ctr">
+                    <a:lnR w="12700" cap="flat" cmpd="sng" algn="ctr">
                       <a:solidFill>
-                        <a:srgbClr val="BBBBBB"/>
+                        <a:srgbClr val="1A1A1A"/>
                       </a:solidFill>
                       <a:prstDash val="solid"/>
                       <a:round/>
                       <a:headEnd type="none" w="med" len="med"/>
                       <a:tailEnd type="none" w="med" len="med"/>
                     </a:lnR>
-                    <a:lnT w="9525" cap="flat" cmpd="sng" algn="ctr">
+                    <a:lnT w="12700" cap="flat" cmpd="sng" algn="ctr">
                       <a:solidFill>
-                        <a:srgbClr val="BBBBBB"/>
+                        <a:srgbClr val="1A1A1A"/>
                       </a:solidFill>
                       <a:prstDash val="solid"/>
                       <a:round/>
                       <a:headEnd type="none" w="med" len="med"/>
                       <a:tailEnd type="none" w="med" len="med"/>
                     </a:lnT>
-                    <a:lnB w="9525" cap="flat" cmpd="sng" algn="ctr">
+                    <a:lnB w="12700" cap="flat" cmpd="sng" algn="ctr">
                       <a:solidFill>
-                        <a:srgbClr val="BBBBBB"/>
-                      </a:solidFill>
-                      <a:prstDash val="solid"/>
-                      <a:round/>
-                      <a:headEnd type="none" w="med" len="med"/>
-                      <a:tailEnd type="none" w="med" len="med"/>
-                    </a:lnB>
-                    <a:solidFill>
-                      <a:srgbClr val="F4F4F4"/>
-                    </a:solidFill>
-                  </a:tcPr>
-                </a:tc>
-                <a:tc>
-                  <a:txBody>
-                    <a:bodyPr/>
-                    <a:lstStyle/>
-                    <a:p>
-                      <a:pPr indent="0" marL="0">
-                        <a:buNone/>
-                      </a:pPr>
-                      <a:r>
-                        <a:rPr lang="en-US" sz="1200" dirty="0">
-                          <a:solidFill>
-                            <a:srgbClr val="1A1A1A"/>
-                          </a:solidFill>
-                        </a:rPr>
-                        <a:t>Excelが人ごとにある</a:t>
-                      </a:r>
-                      <a:endParaRPr lang="en-US" sz="1200" dirty="0"/>
-                    </a:p>
-                  </a:txBody>
-                  <a:tcPr marL="91440" marR="91440" marT="0" marB="0" anchor="ctr">
-                    <a:lnL w="9525" cap="flat" cmpd="sng" algn="ctr">
-                      <a:solidFill>
-                        <a:srgbClr val="BBBBBB"/>
-                      </a:solidFill>
-                      <a:prstDash val="solid"/>
-                      <a:round/>
-                      <a:headEnd type="none" w="med" len="med"/>
-                      <a:tailEnd type="none" w="med" len="med"/>
-                    </a:lnL>
-                    <a:lnR w="9525" cap="flat" cmpd="sng" algn="ctr">
-                      <a:solidFill>
-                        <a:srgbClr val="BBBBBB"/>
-                      </a:solidFill>
-                      <a:prstDash val="solid"/>
-                      <a:round/>
-                      <a:headEnd type="none" w="med" len="med"/>
-                      <a:tailEnd type="none" w="med" len="med"/>
-                    </a:lnR>
-                    <a:lnT w="9525" cap="flat" cmpd="sng" algn="ctr">
-                      <a:solidFill>
-                        <a:srgbClr val="BBBBBB"/>
-                      </a:solidFill>
-                      <a:prstDash val="solid"/>
-                      <a:round/>
-                      <a:headEnd type="none" w="med" len="med"/>
-                      <a:tailEnd type="none" w="med" len="med"/>
-                    </a:lnT>
-                    <a:lnB w="9525" cap="flat" cmpd="sng" algn="ctr">
-                      <a:solidFill>
-                        <a:srgbClr val="BBBBBB"/>
-                      </a:solidFill>
-                      <a:prstDash val="solid"/>
-                      <a:round/>
-                      <a:headEnd type="none" w="med" len="med"/>
-                      <a:tailEnd type="none" w="med" len="med"/>
-                    </a:lnB>
-                    <a:solidFill>
-                      <a:srgbClr val="F4F4F4"/>
-                    </a:solidFill>
-                  </a:tcPr>
-                </a:tc>
-                <a:tc>
-                  <a:txBody>
-                    <a:bodyPr/>
-                    <a:lstStyle/>
-                    <a:p>
-                      <a:pPr indent="0" marL="0">
-                        <a:buNone/>
-                      </a:pPr>
-                      <a:r>
-                        <a:rPr lang="en-US" sz="1200" dirty="0">
-                          <a:solidFill>
-                            <a:srgbClr val="1A1A1A"/>
-                          </a:solidFill>
-                        </a:rPr>
-                        <a:t>Lark BASE（台帳を1つに）</a:t>
-                      </a:r>
-                      <a:endParaRPr lang="en-US" sz="1200" dirty="0"/>
-                    </a:p>
-                  </a:txBody>
-                  <a:tcPr marL="91440" marR="91440" marT="0" marB="0" anchor="ctr">
-                    <a:lnL w="9525" cap="flat" cmpd="sng" algn="ctr">
-                      <a:solidFill>
-                        <a:srgbClr val="BBBBBB"/>
-                      </a:solidFill>
-                      <a:prstDash val="solid"/>
-                      <a:round/>
-                      <a:headEnd type="none" w="med" len="med"/>
-                      <a:tailEnd type="none" w="med" len="med"/>
-                    </a:lnL>
-                    <a:lnR w="9525" cap="flat" cmpd="sng" algn="ctr">
-                      <a:solidFill>
-                        <a:srgbClr val="BBBBBB"/>
-                      </a:solidFill>
-                      <a:prstDash val="solid"/>
-                      <a:round/>
-                      <a:headEnd type="none" w="med" len="med"/>
-                      <a:tailEnd type="none" w="med" len="med"/>
-                    </a:lnR>
-                    <a:lnT w="9525" cap="flat" cmpd="sng" algn="ctr">
-                      <a:solidFill>
-                        <a:srgbClr val="BBBBBB"/>
-                      </a:solidFill>
-                      <a:prstDash val="solid"/>
-                      <a:round/>
-                      <a:headEnd type="none" w="med" len="med"/>
-                      <a:tailEnd type="none" w="med" len="med"/>
-                    </a:lnT>
-                    <a:lnB w="9525" cap="flat" cmpd="sng" algn="ctr">
-                      <a:solidFill>
-                        <a:srgbClr val="BBBBBB"/>
-                      </a:solidFill>
-                      <a:prstDash val="solid"/>
-                      <a:round/>
-                      <a:headEnd type="none" w="med" len="med"/>
-                      <a:tailEnd type="none" w="med" len="med"/>
-                    </a:lnB>
-                    <a:solidFill>
-                      <a:srgbClr val="F4F4F4"/>
-                    </a:solidFill>
-                  </a:tcPr>
-                </a:tc>
-              </a:tr>
-              <a:tr h="438912">
-                <a:tc>
-                  <a:txBody>
-                    <a:bodyPr/>
-                    <a:lstStyle/>
-                    <a:p>
-                      <a:pPr indent="0" marL="0">
-                        <a:buNone/>
-                      </a:pPr>
-                      <a:r>
-                        <a:rPr lang="en-US" sz="1200" b="1" dirty="0">
-                          <a:solidFill>
-                            <a:srgbClr val="1A1A1A"/>
-                          </a:solidFill>
-                        </a:rPr>
-                        <a:t>知らせる・回す</a:t>
-                      </a:r>
-                      <a:endParaRPr lang="en-US" sz="1200" dirty="0"/>
-                    </a:p>
-                  </a:txBody>
-                  <a:tcPr marL="91440" marR="91440" marT="0" marB="0" anchor="ctr">
-                    <a:lnL w="9525" cap="flat" cmpd="sng" algn="ctr">
-                      <a:solidFill>
-                        <a:srgbClr val="BBBBBB"/>
-                      </a:solidFill>
-                      <a:prstDash val="solid"/>
-                      <a:round/>
-                      <a:headEnd type="none" w="med" len="med"/>
-                      <a:tailEnd type="none" w="med" len="med"/>
-                    </a:lnL>
-                    <a:lnR w="9525" cap="flat" cmpd="sng" algn="ctr">
-                      <a:solidFill>
-                        <a:srgbClr val="BBBBBB"/>
-                      </a:solidFill>
-                      <a:prstDash val="solid"/>
-                      <a:round/>
-                      <a:headEnd type="none" w="med" len="med"/>
-                      <a:tailEnd type="none" w="med" len="med"/>
-                    </a:lnR>
-                    <a:lnT w="9525" cap="flat" cmpd="sng" algn="ctr">
-                      <a:solidFill>
-                        <a:srgbClr val="BBBBBB"/>
-                      </a:solidFill>
-                      <a:prstDash val="solid"/>
-                      <a:round/>
-                      <a:headEnd type="none" w="med" len="med"/>
-                      <a:tailEnd type="none" w="med" len="med"/>
-                    </a:lnT>
-                    <a:lnB w="9525" cap="flat" cmpd="sng" algn="ctr">
-                      <a:solidFill>
-                        <a:srgbClr val="BBBBBB"/>
+                        <a:srgbClr val="1A1A1A"/>
                       </a:solidFill>
                       <a:prstDash val="solid"/>
                       <a:round/>
@@ -5984,47 +5988,54 @@
                         <a:buNone/>
                       </a:pPr>
                       <a:r>
-                        <a:rPr lang="en-US" sz="1200" dirty="0">
+                        <a:rPr lang="en-US" sz="1200" b="1" dirty="0">
                           <a:solidFill>
                             <a:srgbClr val="1A1A1A"/>
                           </a:solidFill>
+                          <a:latin typeface="Noto Sans JP Medium" pitchFamily="34" charset="0"/>
+                          <a:ea typeface="Noto Sans JP Medium" pitchFamily="34" charset="-122"/>
+                          <a:cs typeface="Noto Sans JP Medium" pitchFamily="34" charset="-120"/>
                         </a:rPr>
-                        <a:t>伝え忘れ、承認待ちで止まる</a:t>
+                        <a:t>Excelが人ごとにある</a:t>
                       </a:r>
-                      <a:endParaRPr lang="en-US" sz="1200" dirty="0"/>
+                      <a:endParaRPr lang="en-US" sz="1200" dirty="0">
+                        <a:latin typeface="Noto Sans JP Medium" charset="0"/>
+                        <a:ea typeface="Noto Sans JP Medium" charset="0"/>
+                        <a:cs typeface="Noto Sans JP Medium" charset="0"/>
+                      </a:endParaRPr>
                     </a:p>
                   </a:txBody>
                   <a:tcPr marL="91440" marR="91440" marT="0" marB="0" anchor="ctr">
-                    <a:lnL w="9525" cap="flat" cmpd="sng" algn="ctr">
+                    <a:lnL w="12700" cap="flat" cmpd="sng" algn="ctr">
                       <a:solidFill>
-                        <a:srgbClr val="BBBBBB"/>
+                        <a:srgbClr val="1A1A1A"/>
                       </a:solidFill>
                       <a:prstDash val="solid"/>
                       <a:round/>
                       <a:headEnd type="none" w="med" len="med"/>
                       <a:tailEnd type="none" w="med" len="med"/>
                     </a:lnL>
-                    <a:lnR w="9525" cap="flat" cmpd="sng" algn="ctr">
+                    <a:lnR w="12700" cap="flat" cmpd="sng" algn="ctr">
                       <a:solidFill>
-                        <a:srgbClr val="BBBBBB"/>
+                        <a:srgbClr val="1A1A1A"/>
                       </a:solidFill>
                       <a:prstDash val="solid"/>
                       <a:round/>
                       <a:headEnd type="none" w="med" len="med"/>
                       <a:tailEnd type="none" w="med" len="med"/>
                     </a:lnR>
-                    <a:lnT w="9525" cap="flat" cmpd="sng" algn="ctr">
+                    <a:lnT w="12700" cap="flat" cmpd="sng" algn="ctr">
                       <a:solidFill>
-                        <a:srgbClr val="BBBBBB"/>
+                        <a:srgbClr val="1A1A1A"/>
                       </a:solidFill>
                       <a:prstDash val="solid"/>
                       <a:round/>
                       <a:headEnd type="none" w="med" len="med"/>
                       <a:tailEnd type="none" w="med" len="med"/>
                     </a:lnT>
-                    <a:lnB w="9525" cap="flat" cmpd="sng" algn="ctr">
+                    <a:lnB w="12700" cap="flat" cmpd="sng" algn="ctr">
                       <a:solidFill>
-                        <a:srgbClr val="BBBBBB"/>
+                        <a:srgbClr val="1A1A1A"/>
                       </a:solidFill>
                       <a:prstDash val="solid"/>
                       <a:round/>
@@ -6045,47 +6056,54 @@
                         <a:buNone/>
                       </a:pPr>
                       <a:r>
-                        <a:rPr lang="en-US" sz="1200" dirty="0">
+                        <a:rPr lang="en-US" sz="1200" b="1" dirty="0">
                           <a:solidFill>
                             <a:srgbClr val="1A1A1A"/>
                           </a:solidFill>
+                          <a:latin typeface="Noto Sans JP Medium" pitchFamily="34" charset="0"/>
+                          <a:ea typeface="Noto Sans JP Medium" pitchFamily="34" charset="-122"/>
+                          <a:cs typeface="Noto Sans JP Medium" pitchFamily="34" charset="-120"/>
                         </a:rPr>
-                        <a:t>自動化・Bot通知・承認</a:t>
+                        <a:t>Lark BASE（台帳を1つに）</a:t>
                       </a:r>
-                      <a:endParaRPr lang="en-US" sz="1200" dirty="0"/>
+                      <a:endParaRPr lang="en-US" sz="1200" dirty="0">
+                        <a:latin typeface="Noto Sans JP Medium" charset="0"/>
+                        <a:ea typeface="Noto Sans JP Medium" charset="0"/>
+                        <a:cs typeface="Noto Sans JP Medium" charset="0"/>
+                      </a:endParaRPr>
                     </a:p>
                   </a:txBody>
                   <a:tcPr marL="91440" marR="91440" marT="0" marB="0" anchor="ctr">
-                    <a:lnL w="9525" cap="flat" cmpd="sng" algn="ctr">
+                    <a:lnL w="12700" cap="flat" cmpd="sng" algn="ctr">
                       <a:solidFill>
-                        <a:srgbClr val="BBBBBB"/>
+                        <a:srgbClr val="1A1A1A"/>
                       </a:solidFill>
                       <a:prstDash val="solid"/>
                       <a:round/>
                       <a:headEnd type="none" w="med" len="med"/>
                       <a:tailEnd type="none" w="med" len="med"/>
                     </a:lnL>
-                    <a:lnR w="9525" cap="flat" cmpd="sng" algn="ctr">
+                    <a:lnR w="12700" cap="flat" cmpd="sng" algn="ctr">
                       <a:solidFill>
-                        <a:srgbClr val="BBBBBB"/>
+                        <a:srgbClr val="1A1A1A"/>
                       </a:solidFill>
                       <a:prstDash val="solid"/>
                       <a:round/>
                       <a:headEnd type="none" w="med" len="med"/>
                       <a:tailEnd type="none" w="med" len="med"/>
                     </a:lnR>
-                    <a:lnT w="9525" cap="flat" cmpd="sng" algn="ctr">
+                    <a:lnT w="12700" cap="flat" cmpd="sng" algn="ctr">
                       <a:solidFill>
-                        <a:srgbClr val="BBBBBB"/>
+                        <a:srgbClr val="1A1A1A"/>
                       </a:solidFill>
                       <a:prstDash val="solid"/>
                       <a:round/>
                       <a:headEnd type="none" w="med" len="med"/>
                       <a:tailEnd type="none" w="med" len="med"/>
                     </a:lnT>
-                    <a:lnB w="9525" cap="flat" cmpd="sng" algn="ctr">
+                    <a:lnB w="12700" cap="flat" cmpd="sng" algn="ctr">
                       <a:solidFill>
-                        <a:srgbClr val="BBBBBB"/>
+                        <a:srgbClr val="1A1A1A"/>
                       </a:solidFill>
                       <a:prstDash val="solid"/>
                       <a:round/>
@@ -6110,45 +6128,52 @@
                       <a:r>
                         <a:rPr lang="en-US" sz="1200" b="1" dirty="0">
                           <a:solidFill>
-                            <a:srgbClr val="1A1A1A"/>
+                            <a:srgbClr val="DD6420"/>
                           </a:solidFill>
+                          <a:latin typeface="Noto Sans JP" pitchFamily="34" charset="0"/>
+                          <a:ea typeface="Noto Sans JP" pitchFamily="34" charset="-122"/>
+                          <a:cs typeface="Noto Sans JP" pitchFamily="34" charset="-120"/>
                         </a:rPr>
-                        <a:t>見る</a:t>
+                        <a:t>知らせる・回す</a:t>
                       </a:r>
-                      <a:endParaRPr lang="en-US" sz="1200" dirty="0"/>
+                      <a:endParaRPr lang="en-US" sz="1200" dirty="0">
+                        <a:latin typeface="Noto Sans JP" charset="0"/>
+                        <a:ea typeface="Noto Sans JP" charset="0"/>
+                        <a:cs typeface="Noto Sans JP" charset="0"/>
+                      </a:endParaRPr>
                     </a:p>
                   </a:txBody>
                   <a:tcPr marL="91440" marR="91440" marT="0" marB="0" anchor="ctr">
-                    <a:lnL w="9525" cap="flat" cmpd="sng" algn="ctr">
+                    <a:lnL w="12700" cap="flat" cmpd="sng" algn="ctr">
                       <a:solidFill>
-                        <a:srgbClr val="BBBBBB"/>
+                        <a:srgbClr val="1A1A1A"/>
                       </a:solidFill>
                       <a:prstDash val="solid"/>
                       <a:round/>
                       <a:headEnd type="none" w="med" len="med"/>
                       <a:tailEnd type="none" w="med" len="med"/>
                     </a:lnL>
-                    <a:lnR w="9525" cap="flat" cmpd="sng" algn="ctr">
+                    <a:lnR w="12700" cap="flat" cmpd="sng" algn="ctr">
                       <a:solidFill>
-                        <a:srgbClr val="BBBBBB"/>
+                        <a:srgbClr val="1A1A1A"/>
                       </a:solidFill>
                       <a:prstDash val="solid"/>
                       <a:round/>
                       <a:headEnd type="none" w="med" len="med"/>
                       <a:tailEnd type="none" w="med" len="med"/>
                     </a:lnR>
-                    <a:lnT w="9525" cap="flat" cmpd="sng" algn="ctr">
+                    <a:lnT w="12700" cap="flat" cmpd="sng" algn="ctr">
                       <a:solidFill>
-                        <a:srgbClr val="BBBBBB"/>
+                        <a:srgbClr val="1A1A1A"/>
                       </a:solidFill>
                       <a:prstDash val="solid"/>
                       <a:round/>
                       <a:headEnd type="none" w="med" len="med"/>
                       <a:tailEnd type="none" w="med" len="med"/>
                     </a:lnT>
-                    <a:lnB w="9525" cap="flat" cmpd="sng" algn="ctr">
+                    <a:lnB w="12700" cap="flat" cmpd="sng" algn="ctr">
                       <a:solidFill>
-                        <a:srgbClr val="BBBBBB"/>
+                        <a:srgbClr val="1A1A1A"/>
                       </a:solidFill>
                       <a:prstDash val="solid"/>
                       <a:round/>
@@ -6156,7 +6181,7 @@
                       <a:tailEnd type="none" w="med" len="med"/>
                     </a:lnB>
                     <a:solidFill>
-                      <a:srgbClr val="F4F4F4"/>
+                      <a:srgbClr val="FFFFFF"/>
                     </a:solidFill>
                   </a:tcPr>
                 </a:tc>
@@ -6169,47 +6194,54 @@
                         <a:buNone/>
                       </a:pPr>
                       <a:r>
-                        <a:rPr lang="en-US" sz="1200" dirty="0">
+                        <a:rPr lang="en-US" sz="1200" b="1" dirty="0">
                           <a:solidFill>
                             <a:srgbClr val="1A1A1A"/>
                           </a:solidFill>
+                          <a:latin typeface="Noto Sans JP Medium" pitchFamily="34" charset="0"/>
+                          <a:ea typeface="Noto Sans JP Medium" pitchFamily="34" charset="-122"/>
+                          <a:cs typeface="Noto Sans JP Medium" pitchFamily="34" charset="-120"/>
                         </a:rPr>
-                        <a:t>今月の数字がすぐ出ない</a:t>
+                        <a:t>伝え忘れ、承認待ちで止まる</a:t>
                       </a:r>
-                      <a:endParaRPr lang="en-US" sz="1200" dirty="0"/>
+                      <a:endParaRPr lang="en-US" sz="1200" dirty="0">
+                        <a:latin typeface="Noto Sans JP Medium" charset="0"/>
+                        <a:ea typeface="Noto Sans JP Medium" charset="0"/>
+                        <a:cs typeface="Noto Sans JP Medium" charset="0"/>
+                      </a:endParaRPr>
                     </a:p>
                   </a:txBody>
                   <a:tcPr marL="91440" marR="91440" marT="0" marB="0" anchor="ctr">
-                    <a:lnL w="9525" cap="flat" cmpd="sng" algn="ctr">
+                    <a:lnL w="12700" cap="flat" cmpd="sng" algn="ctr">
                       <a:solidFill>
-                        <a:srgbClr val="BBBBBB"/>
+                        <a:srgbClr val="1A1A1A"/>
                       </a:solidFill>
                       <a:prstDash val="solid"/>
                       <a:round/>
                       <a:headEnd type="none" w="med" len="med"/>
                       <a:tailEnd type="none" w="med" len="med"/>
                     </a:lnL>
-                    <a:lnR w="9525" cap="flat" cmpd="sng" algn="ctr">
+                    <a:lnR w="12700" cap="flat" cmpd="sng" algn="ctr">
                       <a:solidFill>
-                        <a:srgbClr val="BBBBBB"/>
+                        <a:srgbClr val="1A1A1A"/>
                       </a:solidFill>
                       <a:prstDash val="solid"/>
                       <a:round/>
                       <a:headEnd type="none" w="med" len="med"/>
                       <a:tailEnd type="none" w="med" len="med"/>
                     </a:lnR>
-                    <a:lnT w="9525" cap="flat" cmpd="sng" algn="ctr">
+                    <a:lnT w="12700" cap="flat" cmpd="sng" algn="ctr">
                       <a:solidFill>
-                        <a:srgbClr val="BBBBBB"/>
+                        <a:srgbClr val="1A1A1A"/>
                       </a:solidFill>
                       <a:prstDash val="solid"/>
                       <a:round/>
                       <a:headEnd type="none" w="med" len="med"/>
                       <a:tailEnd type="none" w="med" len="med"/>
                     </a:lnT>
-                    <a:lnB w="9525" cap="flat" cmpd="sng" algn="ctr">
+                    <a:lnB w="12700" cap="flat" cmpd="sng" algn="ctr">
                       <a:solidFill>
-                        <a:srgbClr val="BBBBBB"/>
+                        <a:srgbClr val="1A1A1A"/>
                       </a:solidFill>
                       <a:prstDash val="solid"/>
                       <a:round/>
@@ -6217,7 +6249,7 @@
                       <a:tailEnd type="none" w="med" len="med"/>
                     </a:lnB>
                     <a:solidFill>
-                      <a:srgbClr val="F4F4F4"/>
+                      <a:srgbClr val="FFFFFF"/>
                     </a:solidFill>
                   </a:tcPr>
                 </a:tc>
@@ -6230,47 +6262,54 @@
                         <a:buNone/>
                       </a:pPr>
                       <a:r>
-                        <a:rPr lang="en-US" sz="1200" dirty="0">
+                        <a:rPr lang="en-US" sz="1200" b="1" dirty="0">
                           <a:solidFill>
                             <a:srgbClr val="1A1A1A"/>
                           </a:solidFill>
+                          <a:latin typeface="Noto Sans JP Medium" pitchFamily="34" charset="0"/>
+                          <a:ea typeface="Noto Sans JP Medium" pitchFamily="34" charset="-122"/>
+                          <a:cs typeface="Noto Sans JP Medium" pitchFamily="34" charset="-120"/>
                         </a:rPr>
-                        <a:t>ビュー・ダッシュボード</a:t>
+                        <a:t>自動化・Bot通知・承認</a:t>
                       </a:r>
-                      <a:endParaRPr lang="en-US" sz="1200" dirty="0"/>
+                      <a:endParaRPr lang="en-US" sz="1200" dirty="0">
+                        <a:latin typeface="Noto Sans JP Medium" charset="0"/>
+                        <a:ea typeface="Noto Sans JP Medium" charset="0"/>
+                        <a:cs typeface="Noto Sans JP Medium" charset="0"/>
+                      </a:endParaRPr>
                     </a:p>
                   </a:txBody>
                   <a:tcPr marL="91440" marR="91440" marT="0" marB="0" anchor="ctr">
-                    <a:lnL w="9525" cap="flat" cmpd="sng" algn="ctr">
+                    <a:lnL w="12700" cap="flat" cmpd="sng" algn="ctr">
                       <a:solidFill>
-                        <a:srgbClr val="BBBBBB"/>
+                        <a:srgbClr val="1A1A1A"/>
                       </a:solidFill>
                       <a:prstDash val="solid"/>
                       <a:round/>
                       <a:headEnd type="none" w="med" len="med"/>
                       <a:tailEnd type="none" w="med" len="med"/>
                     </a:lnL>
-                    <a:lnR w="9525" cap="flat" cmpd="sng" algn="ctr">
+                    <a:lnR w="12700" cap="flat" cmpd="sng" algn="ctr">
                       <a:solidFill>
-                        <a:srgbClr val="BBBBBB"/>
+                        <a:srgbClr val="1A1A1A"/>
                       </a:solidFill>
                       <a:prstDash val="solid"/>
                       <a:round/>
                       <a:headEnd type="none" w="med" len="med"/>
                       <a:tailEnd type="none" w="med" len="med"/>
                     </a:lnR>
-                    <a:lnT w="9525" cap="flat" cmpd="sng" algn="ctr">
+                    <a:lnT w="12700" cap="flat" cmpd="sng" algn="ctr">
                       <a:solidFill>
-                        <a:srgbClr val="BBBBBB"/>
+                        <a:srgbClr val="1A1A1A"/>
                       </a:solidFill>
                       <a:prstDash val="solid"/>
                       <a:round/>
                       <a:headEnd type="none" w="med" len="med"/>
                       <a:tailEnd type="none" w="med" len="med"/>
                     </a:lnT>
-                    <a:lnB w="9525" cap="flat" cmpd="sng" algn="ctr">
+                    <a:lnB w="12700" cap="flat" cmpd="sng" algn="ctr">
                       <a:solidFill>
-                        <a:srgbClr val="BBBBBB"/>
+                        <a:srgbClr val="1A1A1A"/>
                       </a:solidFill>
                       <a:prstDash val="solid"/>
                       <a:round/>
@@ -6278,7 +6317,213 @@
                       <a:tailEnd type="none" w="med" len="med"/>
                     </a:lnB>
                     <a:solidFill>
-                      <a:srgbClr val="F4F4F4"/>
+                      <a:srgbClr val="FFFFFF"/>
+                    </a:solidFill>
+                  </a:tcPr>
+                </a:tc>
+              </a:tr>
+              <a:tr h="438912">
+                <a:tc>
+                  <a:txBody>
+                    <a:bodyPr/>
+                    <a:lstStyle/>
+                    <a:p>
+                      <a:pPr indent="0" marL="0">
+                        <a:buNone/>
+                      </a:pPr>
+                      <a:r>
+                        <a:rPr lang="en-US" sz="1200" b="1" dirty="0">
+                          <a:solidFill>
+                            <a:srgbClr val="DD6420"/>
+                          </a:solidFill>
+                          <a:latin typeface="Noto Sans JP" pitchFamily="34" charset="0"/>
+                          <a:ea typeface="Noto Sans JP" pitchFamily="34" charset="-122"/>
+                          <a:cs typeface="Noto Sans JP" pitchFamily="34" charset="-120"/>
+                        </a:rPr>
+                        <a:t>見る</a:t>
+                      </a:r>
+                      <a:endParaRPr lang="en-US" sz="1200" dirty="0">
+                        <a:latin typeface="Noto Sans JP" charset="0"/>
+                        <a:ea typeface="Noto Sans JP" charset="0"/>
+                        <a:cs typeface="Noto Sans JP" charset="0"/>
+                      </a:endParaRPr>
+                    </a:p>
+                  </a:txBody>
+                  <a:tcPr marL="91440" marR="91440" marT="0" marB="0" anchor="ctr">
+                    <a:lnL w="12700" cap="flat" cmpd="sng" algn="ctr">
+                      <a:solidFill>
+                        <a:srgbClr val="1A1A1A"/>
+                      </a:solidFill>
+                      <a:prstDash val="solid"/>
+                      <a:round/>
+                      <a:headEnd type="none" w="med" len="med"/>
+                      <a:tailEnd type="none" w="med" len="med"/>
+                    </a:lnL>
+                    <a:lnR w="12700" cap="flat" cmpd="sng" algn="ctr">
+                      <a:solidFill>
+                        <a:srgbClr val="1A1A1A"/>
+                      </a:solidFill>
+                      <a:prstDash val="solid"/>
+                      <a:round/>
+                      <a:headEnd type="none" w="med" len="med"/>
+                      <a:tailEnd type="none" w="med" len="med"/>
+                    </a:lnR>
+                    <a:lnT w="12700" cap="flat" cmpd="sng" algn="ctr">
+                      <a:solidFill>
+                        <a:srgbClr val="1A1A1A"/>
+                      </a:solidFill>
+                      <a:prstDash val="solid"/>
+                      <a:round/>
+                      <a:headEnd type="none" w="med" len="med"/>
+                      <a:tailEnd type="none" w="med" len="med"/>
+                    </a:lnT>
+                    <a:lnB w="12700" cap="flat" cmpd="sng" algn="ctr">
+                      <a:solidFill>
+                        <a:srgbClr val="1A1A1A"/>
+                      </a:solidFill>
+                      <a:prstDash val="solid"/>
+                      <a:round/>
+                      <a:headEnd type="none" w="med" len="med"/>
+                      <a:tailEnd type="none" w="med" len="med"/>
+                    </a:lnB>
+                    <a:solidFill>
+                      <a:srgbClr val="FFFFFF"/>
+                    </a:solidFill>
+                  </a:tcPr>
+                </a:tc>
+                <a:tc>
+                  <a:txBody>
+                    <a:bodyPr/>
+                    <a:lstStyle/>
+                    <a:p>
+                      <a:pPr indent="0" marL="0">
+                        <a:buNone/>
+                      </a:pPr>
+                      <a:r>
+                        <a:rPr lang="en-US" sz="1200" b="1" dirty="0">
+                          <a:solidFill>
+                            <a:srgbClr val="1A1A1A"/>
+                          </a:solidFill>
+                          <a:latin typeface="Noto Sans JP Medium" pitchFamily="34" charset="0"/>
+                          <a:ea typeface="Noto Sans JP Medium" pitchFamily="34" charset="-122"/>
+                          <a:cs typeface="Noto Sans JP Medium" pitchFamily="34" charset="-120"/>
+                        </a:rPr>
+                        <a:t>今月の数字がすぐ出ない</a:t>
+                      </a:r>
+                      <a:endParaRPr lang="en-US" sz="1200" dirty="0">
+                        <a:latin typeface="Noto Sans JP Medium" charset="0"/>
+                        <a:ea typeface="Noto Sans JP Medium" charset="0"/>
+                        <a:cs typeface="Noto Sans JP Medium" charset="0"/>
+                      </a:endParaRPr>
+                    </a:p>
+                  </a:txBody>
+                  <a:tcPr marL="91440" marR="91440" marT="0" marB="0" anchor="ctr">
+                    <a:lnL w="12700" cap="flat" cmpd="sng" algn="ctr">
+                      <a:solidFill>
+                        <a:srgbClr val="1A1A1A"/>
+                      </a:solidFill>
+                      <a:prstDash val="solid"/>
+                      <a:round/>
+                      <a:headEnd type="none" w="med" len="med"/>
+                      <a:tailEnd type="none" w="med" len="med"/>
+                    </a:lnL>
+                    <a:lnR w="12700" cap="flat" cmpd="sng" algn="ctr">
+                      <a:solidFill>
+                        <a:srgbClr val="1A1A1A"/>
+                      </a:solidFill>
+                      <a:prstDash val="solid"/>
+                      <a:round/>
+                      <a:headEnd type="none" w="med" len="med"/>
+                      <a:tailEnd type="none" w="med" len="med"/>
+                    </a:lnR>
+                    <a:lnT w="12700" cap="flat" cmpd="sng" algn="ctr">
+                      <a:solidFill>
+                        <a:srgbClr val="1A1A1A"/>
+                      </a:solidFill>
+                      <a:prstDash val="solid"/>
+                      <a:round/>
+                      <a:headEnd type="none" w="med" len="med"/>
+                      <a:tailEnd type="none" w="med" len="med"/>
+                    </a:lnT>
+                    <a:lnB w="12700" cap="flat" cmpd="sng" algn="ctr">
+                      <a:solidFill>
+                        <a:srgbClr val="1A1A1A"/>
+                      </a:solidFill>
+                      <a:prstDash val="solid"/>
+                      <a:round/>
+                      <a:headEnd type="none" w="med" len="med"/>
+                      <a:tailEnd type="none" w="med" len="med"/>
+                    </a:lnB>
+                    <a:solidFill>
+                      <a:srgbClr val="FFFFFF"/>
+                    </a:solidFill>
+                  </a:tcPr>
+                </a:tc>
+                <a:tc>
+                  <a:txBody>
+                    <a:bodyPr/>
+                    <a:lstStyle/>
+                    <a:p>
+                      <a:pPr indent="0" marL="0">
+                        <a:buNone/>
+                      </a:pPr>
+                      <a:r>
+                        <a:rPr lang="en-US" sz="1200" b="1" dirty="0">
+                          <a:solidFill>
+                            <a:srgbClr val="1A1A1A"/>
+                          </a:solidFill>
+                          <a:latin typeface="Noto Sans JP Medium" pitchFamily="34" charset="0"/>
+                          <a:ea typeface="Noto Sans JP Medium" pitchFamily="34" charset="-122"/>
+                          <a:cs typeface="Noto Sans JP Medium" pitchFamily="34" charset="-120"/>
+                        </a:rPr>
+                        <a:t>ビュー・ダッシュボード</a:t>
+                      </a:r>
+                      <a:endParaRPr lang="en-US" sz="1200" dirty="0">
+                        <a:latin typeface="Noto Sans JP Medium" charset="0"/>
+                        <a:ea typeface="Noto Sans JP Medium" charset="0"/>
+                        <a:cs typeface="Noto Sans JP Medium" charset="0"/>
+                      </a:endParaRPr>
+                    </a:p>
+                  </a:txBody>
+                  <a:tcPr marL="91440" marR="91440" marT="0" marB="0" anchor="ctr">
+                    <a:lnL w="12700" cap="flat" cmpd="sng" algn="ctr">
+                      <a:solidFill>
+                        <a:srgbClr val="1A1A1A"/>
+                      </a:solidFill>
+                      <a:prstDash val="solid"/>
+                      <a:round/>
+                      <a:headEnd type="none" w="med" len="med"/>
+                      <a:tailEnd type="none" w="med" len="med"/>
+                    </a:lnL>
+                    <a:lnR w="12700" cap="flat" cmpd="sng" algn="ctr">
+                      <a:solidFill>
+                        <a:srgbClr val="1A1A1A"/>
+                      </a:solidFill>
+                      <a:prstDash val="solid"/>
+                      <a:round/>
+                      <a:headEnd type="none" w="med" len="med"/>
+                      <a:tailEnd type="none" w="med" len="med"/>
+                    </a:lnR>
+                    <a:lnT w="12700" cap="flat" cmpd="sng" algn="ctr">
+                      <a:solidFill>
+                        <a:srgbClr val="1A1A1A"/>
+                      </a:solidFill>
+                      <a:prstDash val="solid"/>
+                      <a:round/>
+                      <a:headEnd type="none" w="med" len="med"/>
+                      <a:tailEnd type="none" w="med" len="med"/>
+                    </a:lnT>
+                    <a:lnB w="12700" cap="flat" cmpd="sng" algn="ctr">
+                      <a:solidFill>
+                        <a:srgbClr val="1A1A1A"/>
+                      </a:solidFill>
+                      <a:prstDash val="solid"/>
+                      <a:round/>
+                      <a:headEnd type="none" w="med" len="med"/>
+                      <a:tailEnd type="none" w="med" len="med"/>
+                    </a:lnB>
+                    <a:solidFill>
+                      <a:srgbClr val="FFFFFF"/>
                     </a:solidFill>
                   </a:tcPr>
                 </a:tc>
@@ -6289,88 +6534,55 @@
       </p:graphicFrame>
       <p:sp>
         <p:nvSpPr>
-          <p:cNvPr id="7" name="foot-box"/>
-          <p:cNvSpPr/>
-          <p:nvPr/>
-        </p:nvSpPr>
-        <p:spPr>
-          <a:xfrm>
-            <a:off x="548640" y="4114800"/>
-            <a:ext cx="8046720" cy="502920"/>
-          </a:xfrm>
-          <a:prstGeom prst="roundRect">
-            <a:avLst>
-              <a:gd name="adj" fmla="val 18182"/>
-            </a:avLst>
+          <p:cNvPr id="7" name="Text 3"/>
+          <p:cNvSpPr txBox="1"/>
+          <p:nvPr/>
+        </p:nvSpPr>
+        <p:spPr>
+          <a:xfrm rot="-60000">
+            <a:off x="502920" y="4114800"/>
+            <a:ext cx="8138160" cy="502920"/>
+          </a:xfrm>
+          <a:prstGeom prst="rect">
+            <a:avLst/>
           </a:prstGeom>
           <a:solidFill>
-            <a:schemeClr val="bg2"/>
+            <a:srgbClr val="DD6420"/>
           </a:solidFill>
-          <a:ln w="12700">
+          <a:ln w="19050">
             <a:solidFill>
-              <a:schemeClr val="bg2"/>
+              <a:srgbClr val="1A1A1A"/>
             </a:solidFill>
-            <a:prstDash val="solid"/>
           </a:ln>
-        </p:spPr>
-      </p:sp>
-      <p:pic>
-        <p:nvPicPr>
-          <p:cNvPr id="8" name="foot-icon" descr="preencoded.png">    </p:cNvPr>
-          <p:cNvPicPr>
-            <a:picLocks noChangeAspect="1"/>
-          </p:cNvPicPr>
-          <p:nvPr/>
-        </p:nvPicPr>
-        <p:blipFill>
-          <a:blip r:embed="rId1"/>
-          <a:stretch>
-            <a:fillRect/>
-          </a:stretch>
-        </p:blipFill>
-        <p:spPr>
-          <a:xfrm>
-            <a:off x="685800" y="4242816"/>
-            <a:ext cx="246888" cy="246888"/>
-          </a:xfrm>
-          <a:prstGeom prst="rect">
-            <a:avLst/>
-          </a:prstGeom>
-        </p:spPr>
-      </p:pic>
-      <p:sp>
-        <p:nvSpPr>
-          <p:cNvPr id="9" name="foot-text"/>
-          <p:cNvSpPr txBox="1"/>
-          <p:nvPr/>
-        </p:nvSpPr>
-        <p:spPr>
-          <a:xfrm>
-            <a:off x="1051560" y="4114800"/>
-            <a:ext cx="7406640" cy="502920"/>
-          </a:xfrm>
-          <a:prstGeom prst="rect">
-            <a:avLst/>
-          </a:prstGeom>
-          <a:noFill/>
-          <a:ln/>
-        </p:spPr>
-        <p:txBody>
-          <a:bodyPr wrap="square" lIns="0" tIns="0" rIns="0" bIns="0" rtlCol="0" anchor="ctr"/>
-          <a:lstStyle/>
-          <a:p>
-            <a:pPr indent="0" marL="0">
-              <a:buNone/>
-            </a:pPr>
-            <a:r>
-              <a:rPr lang="en-US" sz="1150" dirty="0">
-                <a:solidFill>
-                  <a:schemeClr val="tx1"/>
-                </a:solidFill>
+          <a:effectLst>
+            <a:outerShdw sx="100000" sy="100000" kx="0" ky="0" algn="bl" rotWithShape="0" blurRad="101600" dist="38100" dir="2700000">
+              <a:srgbClr val="1A1A1A">
+                <a:alpha val="100000"/>
+              </a:srgbClr>
+            </a:outerShdw>
+          </a:effectLst>
+        </p:spPr>
+        <p:txBody>
+          <a:bodyPr wrap="square" lIns="0" tIns="1905" rIns="1905" bIns="0" rtlCol="0" anchor="ctr">
+            <a:normAutofit/>
+          </a:bodyPr>
+          <a:lstStyle/>
+          <a:p>
+            <a:pPr algn="ctr" indent="0" marL="0">
+              <a:buNone/>
+            </a:pPr>
+            <a:r>
+              <a:rPr lang="ja-JP" altLang="en-US" sz="1300" b="1" dirty="0">
+                <a:solidFill>
+                  <a:srgbClr val="FFFFFF"/>
+                </a:solidFill>
+                <a:latin typeface="Noto Sans JP" pitchFamily="34" charset="0"/>
+                <a:ea typeface="Noto Sans JP" pitchFamily="34" charset="-122"/>
+                <a:cs typeface="Noto Sans JP" pitchFamily="34" charset="-120"/>
               </a:rPr>
               <a:t>最初に作るもの：毎週くり返す／関わる人が2〜5人／失敗しても大事故にならない</a:t>
             </a:r>
-            <a:endParaRPr lang="en-US" sz="1150" dirty="0"/>
+            <a:endParaRPr lang="ja-JP" sz="1300" dirty="0"/>
           </a:p>
         </p:txBody>
       </p:sp>
@@ -6386,8 +6598,8 @@
         </p:nvSpPr>
         <p:spPr>
           <a:xfrm>
-            <a:off x="8229600" y="4773168"/>
-            <a:ext cx="365760" cy="228600"/>
+            <a:off x="8366760" y="4754880"/>
+            <a:ext cx="365760" cy="274320"/>
           </a:xfrm>
           <a:prstGeom prst="rect">
             <a:avLst/>
@@ -6399,20 +6611,23 @@
           </a:extLst>
         </p:spPr>
         <p:txBody>
-          <a:bodyPr/>
+          <a:bodyPr anchor="ctr"/>
           <a:lstStyle>
             <a:lvl1pPr>
-              <a:defRPr sz="900">
-                <a:solidFill>
-                  <a:srgbClr val="5A6872"/>
-                </a:solidFill>
+              <a:defRPr sz="850">
+                <a:solidFill>
+                  <a:srgbClr val="FFFFFF"/>
+                </a:solidFill>
+                <a:latin typeface="Noto Sans JP"/>
+                <a:ea typeface="Noto Sans JP"/>
+                <a:cs typeface="Noto Sans JP"/>
               </a:defRPr>
             </a:lvl1pPr>
           </a:lstStyle>
           <a:p>
             <a:pPr algn="r"/>
             <a:fld id="{F7021451-1387-4CA6-816F-3879F97B5CBC}" type="slidenum">
-              <a:rPr b="0" lang="en-US"/>
+              <a:rPr b="1" lang="en-US"/>
               <a:t>6</a:t>
             </a:fld>
             <a:endParaRPr lang="en-US"/>
@@ -6447,15 +6662,58 @@
       <p:sp>
         <p:nvSpPr>
           <p:cNvPr id="2" name="Text 0"/>
-          <p:cNvSpPr/>
-          <p:nvPr>
-            <p:ph idx="100" type="title" hasCustomPrompt="1"/>
-          </p:nvPr>
-        </p:nvSpPr>
-        <p:spPr>
-          <a:xfrm>
-            <a:off x="548640" y="658368"/>
-            <a:ext cx="8046720" cy="566928"/>
+          <p:cNvSpPr txBox="1"/>
+          <p:nvPr/>
+        </p:nvSpPr>
+        <p:spPr>
+          <a:xfrm rot="-180000">
+            <a:off x="411480" y="201168"/>
+            <a:ext cx="1915668" cy="352044"/>
+          </a:xfrm>
+          <a:prstGeom prst="rect">
+            <a:avLst/>
+          </a:prstGeom>
+          <a:solidFill>
+            <a:srgbClr val="DD6420"/>
+          </a:solidFill>
+          <a:ln>
+            <a:solidFill>
+              <a:srgbClr val="DD6420"/>
+            </a:solidFill>
+          </a:ln>
+        </p:spPr>
+        <p:txBody>
+          <a:bodyPr wrap="square" lIns="0" tIns="0" rIns="0" bIns="0" rtlCol="0" anchor="ctr"/>
+          <a:lstStyle/>
+          <a:p>
+            <a:pPr algn="ctr" indent="0" marL="0">
+              <a:buNone/>
+            </a:pPr>
+            <a:r>
+              <a:rPr lang="ja-JP" altLang="en-US" sz="1100" dirty="0">
+                <a:solidFill>
+                  <a:srgbClr val="FFFFFF"/>
+                </a:solidFill>
+                <a:latin typeface="Dela Gothic One" pitchFamily="34" charset="0"/>
+                <a:ea typeface="けいふぉんと" pitchFamily="34" charset="-122"/>
+                <a:cs typeface="Dela Gothic One" pitchFamily="34" charset="-120"/>
+              </a:rPr>
+              <a:t>ハンズオン② 20分</a:t>
+            </a:r>
+            <a:endParaRPr lang="ja-JP" sz="1100" dirty="0"/>
+          </a:p>
+        </p:txBody>
+      </p:sp>
+      <p:sp>
+        <p:nvSpPr>
+          <p:cNvPr id="3" name="Text 1"/>
+          <p:cNvSpPr txBox="1"/>
+          <p:nvPr/>
+        </p:nvSpPr>
+        <p:spPr>
+          <a:xfrm>
+            <a:off x="411480" y="502920"/>
+            <a:ext cx="8321040" cy="685800"/>
           </a:xfrm>
           <a:prstGeom prst="rect">
             <a:avLst/>
@@ -6464,122 +6722,118 @@
           <a:ln/>
         </p:spPr>
         <p:txBody>
-          <a:bodyPr wrap="square" lIns="0" tIns="0" rIns="0" bIns="0" rtlCol="0" anchor="ctr"/>
-          <a:lstStyle/>
-          <a:p>
-            <a:pPr algn="l" indent="0" marL="0">
-              <a:buNone/>
-            </a:pPr>
-            <a:r>
-              <a:rPr lang="en-US" sz="2400" b="1" dirty="0">
-                <a:solidFill>
-                  <a:schemeClr val="tx1"/>
-                </a:solidFill>
+          <a:bodyPr wrap="square" lIns="0" tIns="0" rIns="0" bIns="0" rtlCol="0" anchor="ctr">
+            <a:normAutofit/>
+          </a:bodyPr>
+          <a:lstStyle/>
+          <a:p>
+            <a:pPr indent="0" marL="0">
+              <a:buNone/>
+            </a:pPr>
+            <a:r>
+              <a:rPr lang="ja-JP" altLang="en-US" sz="2600" dirty="0">
+                <a:solidFill>
+                  <a:srgbClr val="1A1A1A"/>
+                </a:solidFill>
+                <a:latin typeface="Dela Gothic One" pitchFamily="34" charset="0"/>
+                <a:ea typeface="けいふぉんと" pitchFamily="34" charset="-122"/>
+                <a:cs typeface="Dela Gothic One" pitchFamily="34" charset="-120"/>
               </a:rPr>
               <a:t>作りたいものを1つに絞る</a:t>
             </a:r>
-            <a:endParaRPr lang="en-US" sz="2400" dirty="0"/>
-          </a:p>
-        </p:txBody>
-      </p:sp>
-      <p:sp>
-        <p:nvSpPr>
-          <p:cNvPr id="3" name="chip"/>
+            <a:endParaRPr lang="ja-JP" sz="2600" dirty="0"/>
+          </a:p>
+        </p:txBody>
+      </p:sp>
+      <p:sp>
+        <p:nvSpPr>
+          <p:cNvPr id="5" name="card"/>
           <p:cNvSpPr/>
           <p:nvPr/>
         </p:nvSpPr>
         <p:spPr>
           <a:xfrm>
-            <a:off x="548640" y="292608"/>
-            <a:ext cx="1755648" cy="292608"/>
+            <a:off x="502920" y="1604772"/>
+            <a:ext cx="8138160" cy="566928"/>
           </a:xfrm>
           <a:prstGeom prst="roundRect">
             <a:avLst>
-              <a:gd name="adj" fmla="val 50000"/>
+              <a:gd name="adj" fmla="val 16129"/>
             </a:avLst>
           </a:prstGeom>
           <a:solidFill>
-            <a:schemeClr val="accent2"/>
+            <a:srgbClr val="FFFFFF"/>
           </a:solidFill>
-          <a:ln w="12700">
-            <a:solidFill>
-              <a:schemeClr val="accent2"/>
-            </a:solidFill>
-            <a:prstDash val="solid"/>
-          </a:ln>
-        </p:spPr>
-      </p:sp>
-      <p:sp>
-        <p:nvSpPr>
-          <p:cNvPr id="4" name="chip-text"/>
-          <p:cNvSpPr txBox="1"/>
-          <p:nvPr/>
-        </p:nvSpPr>
-        <p:spPr>
-          <a:xfrm>
-            <a:off x="548640" y="292608"/>
-            <a:ext cx="1755648" cy="292608"/>
-          </a:xfrm>
-          <a:prstGeom prst="rect">
-            <a:avLst/>
-          </a:prstGeom>
-          <a:noFill/>
-          <a:ln/>
-        </p:spPr>
-        <p:txBody>
-          <a:bodyPr wrap="square" lIns="0" tIns="0" rIns="0" bIns="0" rtlCol="0" anchor="ctr"/>
-          <a:lstStyle/>
-          <a:p>
-            <a:pPr algn="ctr" indent="0" marL="0">
-              <a:buNone/>
-            </a:pPr>
-            <a:r>
-              <a:rPr lang="en-US" sz="1100" b="1" dirty="0">
-                <a:solidFill>
-                  <a:schemeClr val="bg1"/>
-                </a:solidFill>
-              </a:rPr>
-              <a:t>ハンズオン② 20分</a:t>
-            </a:r>
-            <a:endParaRPr lang="en-US" sz="1100" dirty="0"/>
-          </a:p>
-        </p:txBody>
-      </p:sp>
-      <p:sp>
-        <p:nvSpPr>
-          <p:cNvPr id="6" name="step-num"/>
-          <p:cNvSpPr/>
-          <p:nvPr/>
-        </p:nvSpPr>
-        <p:spPr>
-          <a:xfrm>
-            <a:off x="548640" y="1787652"/>
-            <a:ext cx="384048" cy="384048"/>
-          </a:xfrm>
-          <a:prstGeom prst="ellipse">
-            <a:avLst/>
-          </a:prstGeom>
-          <a:solidFill>
-            <a:schemeClr val="accent1"/>
-          </a:solidFill>
-          <a:ln w="15875">
+          <a:ln w="25400">
             <a:solidFill>
               <a:srgbClr val="1A1A1A"/>
             </a:solidFill>
             <a:prstDash val="solid"/>
           </a:ln>
-        </p:spPr>
-      </p:sp>
-      <p:sp>
-        <p:nvSpPr>
-          <p:cNvPr id="7" name="step-num-text"/>
+          <a:effectLst>
+            <a:outerShdw sx="100000" sy="100000" kx="0" ky="0" algn="bl" rotWithShape="0" blurRad="101600" dist="38100" dir="2700000">
+              <a:srgbClr val="1A1A1A">
+                <a:alpha val="100000"/>
+              </a:srgbClr>
+            </a:outerShdw>
+          </a:effectLst>
+        </p:spPr>
+      </p:sp>
+      <p:sp>
+        <p:nvSpPr>
+          <p:cNvPr id="6" name="Text 3"/>
           <p:cNvSpPr txBox="1"/>
           <p:nvPr/>
         </p:nvSpPr>
         <p:spPr>
           <a:xfrm>
-            <a:off x="548640" y="1787652"/>
-            <a:ext cx="384048" cy="384048"/>
+            <a:off x="640080" y="1687068"/>
+            <a:ext cx="402336" cy="402336"/>
+          </a:xfrm>
+          <a:prstGeom prst="ellipse">
+            <a:avLst/>
+          </a:prstGeom>
+          <a:solidFill>
+            <a:srgbClr val="DD6420"/>
+          </a:solidFill>
+          <a:ln w="19050">
+            <a:solidFill>
+              <a:srgbClr val="1A1A1A"/>
+            </a:solidFill>
+          </a:ln>
+        </p:spPr>
+        <p:txBody>
+          <a:bodyPr wrap="square" lIns="0" tIns="0" rIns="0" bIns="0" rtlCol="0" anchor="ctr"/>
+          <a:lstStyle/>
+          <a:p>
+            <a:pPr algn="ctr" indent="0" marL="0">
+              <a:buNone/>
+            </a:pPr>
+            <a:r>
+              <a:rPr lang="ja-JP" altLang="en-US" sz="1500" dirty="0">
+                <a:solidFill>
+                  <a:srgbClr val="FFFFFF"/>
+                </a:solidFill>
+                <a:latin typeface="Dela Gothic One" pitchFamily="34" charset="0"/>
+                <a:ea typeface="けいふぉんと" pitchFamily="34" charset="-122"/>
+                <a:cs typeface="Dela Gothic One" pitchFamily="34" charset="-120"/>
+              </a:rPr>
+              <a:t>1</a:t>
+            </a:r>
+            <a:endParaRPr lang="ja-JP" sz="1500" dirty="0"/>
+          </a:p>
+        </p:txBody>
+      </p:sp>
+      <p:sp>
+        <p:nvSpPr>
+          <p:cNvPr id="7" name="step-text"/>
+          <p:cNvSpPr txBox="1"/>
+          <p:nvPr/>
+        </p:nvSpPr>
+        <p:spPr>
+          <a:xfrm>
+            <a:off x="1234440" y="1604772"/>
+            <a:ext cx="7269480" cy="566928"/>
           </a:xfrm>
           <a:prstGeom prst="rect">
             <a:avLst/>
@@ -6588,95 +6842,118 @@
           <a:ln/>
         </p:spPr>
         <p:txBody>
-          <a:bodyPr wrap="square" lIns="0" tIns="0" rIns="0" bIns="0" rtlCol="0" anchor="ctr"/>
-          <a:lstStyle/>
-          <a:p>
-            <a:pPr algn="ctr" indent="0" marL="0">
-              <a:buNone/>
-            </a:pPr>
-            <a:r>
-              <a:rPr lang="en-US" sz="1400" b="1" dirty="0">
-                <a:solidFill>
-                  <a:schemeClr val="tx1"/>
-                </a:solidFill>
-              </a:rPr>
-              <a:t>1</a:t>
-            </a:r>
-            <a:endParaRPr lang="en-US" sz="1400" dirty="0"/>
-          </a:p>
-        </p:txBody>
-      </p:sp>
-      <p:sp>
-        <p:nvSpPr>
-          <p:cNvPr id="8" name="step-text"/>
-          <p:cNvSpPr txBox="1"/>
-          <p:nvPr/>
-        </p:nvSpPr>
-        <p:spPr>
-          <a:xfrm>
-            <a:off x="1097280" y="1677924"/>
-            <a:ext cx="7498080" cy="603504"/>
-          </a:xfrm>
-          <a:prstGeom prst="rect">
-            <a:avLst/>
-          </a:prstGeom>
-          <a:noFill/>
-          <a:ln/>
-        </p:spPr>
-        <p:txBody>
-          <a:bodyPr wrap="square" lIns="0" tIns="0" rIns="0" bIns="0" rtlCol="0" anchor="ctr"/>
+          <a:bodyPr wrap="square" lIns="0" tIns="0" rIns="0" bIns="0" rtlCol="0" anchor="ctr">
+            <a:normAutofit/>
+          </a:bodyPr>
           <a:lstStyle/>
           <a:p>
             <a:pPr indent="0" marL="0">
               <a:buNone/>
             </a:pPr>
             <a:r>
-              <a:rPr lang="en-US" sz="1450" dirty="0">
-                <a:solidFill>
-                  <a:schemeClr val="tx1"/>
-                </a:solidFill>
+              <a:rPr lang="ja-JP" altLang="en-US" sz="1400" b="1" dirty="0">
+                <a:solidFill>
+                  <a:srgbClr val="1A1A1A"/>
+                </a:solidFill>
+                <a:latin typeface="Noto Sans JP" pitchFamily="34" charset="0"/>
+                <a:ea typeface="Noto Sans JP" pitchFamily="34" charset="-122"/>
+                <a:cs typeface="Noto Sans JP" pitchFamily="34" charset="-120"/>
               </a:rPr>
               <a:t>印を付けた作業から、候補を3つ選ぶ</a:t>
             </a:r>
-            <a:endParaRPr lang="en-US" sz="1450" dirty="0"/>
-          </a:p>
-        </p:txBody>
-      </p:sp>
-      <p:sp>
-        <p:nvSpPr>
-          <p:cNvPr id="9" name="step-num"/>
+            <a:endParaRPr lang="ja-JP" sz="1400" dirty="0"/>
+          </a:p>
+        </p:txBody>
+      </p:sp>
+      <p:sp>
+        <p:nvSpPr>
+          <p:cNvPr id="8" name="card"/>
           <p:cNvSpPr/>
           <p:nvPr/>
         </p:nvSpPr>
         <p:spPr>
           <a:xfrm>
-            <a:off x="548640" y="2391156"/>
-            <a:ext cx="384048" cy="384048"/>
-          </a:xfrm>
-          <a:prstGeom prst="ellipse">
-            <a:avLst/>
+            <a:off x="502920" y="2299716"/>
+            <a:ext cx="8138160" cy="566928"/>
+          </a:xfrm>
+          <a:prstGeom prst="roundRect">
+            <a:avLst>
+              <a:gd name="adj" fmla="val 16129"/>
+            </a:avLst>
           </a:prstGeom>
           <a:solidFill>
-            <a:schemeClr val="accent1"/>
+            <a:srgbClr val="FFFFFF"/>
           </a:solidFill>
-          <a:ln w="15875">
+          <a:ln w="25400">
             <a:solidFill>
               <a:srgbClr val="1A1A1A"/>
             </a:solidFill>
             <a:prstDash val="solid"/>
           </a:ln>
-        </p:spPr>
-      </p:sp>
-      <p:sp>
-        <p:nvSpPr>
-          <p:cNvPr id="10" name="step-num-text"/>
+          <a:effectLst>
+            <a:outerShdw sx="100000" sy="100000" kx="0" ky="0" algn="bl" rotWithShape="0" blurRad="101600" dist="38100" dir="2700000">
+              <a:srgbClr val="1A1A1A">
+                <a:alpha val="100000"/>
+              </a:srgbClr>
+            </a:outerShdw>
+          </a:effectLst>
+        </p:spPr>
+      </p:sp>
+      <p:sp>
+        <p:nvSpPr>
+          <p:cNvPr id="9" name="Text 6"/>
           <p:cNvSpPr txBox="1"/>
           <p:nvPr/>
         </p:nvSpPr>
         <p:spPr>
           <a:xfrm>
-            <a:off x="548640" y="2391156"/>
-            <a:ext cx="384048" cy="384048"/>
+            <a:off x="640080" y="2382012"/>
+            <a:ext cx="402336" cy="402336"/>
+          </a:xfrm>
+          <a:prstGeom prst="ellipse">
+            <a:avLst/>
+          </a:prstGeom>
+          <a:solidFill>
+            <a:srgbClr val="DD6420"/>
+          </a:solidFill>
+          <a:ln w="19050">
+            <a:solidFill>
+              <a:srgbClr val="1A1A1A"/>
+            </a:solidFill>
+          </a:ln>
+        </p:spPr>
+        <p:txBody>
+          <a:bodyPr wrap="square" lIns="0" tIns="0" rIns="0" bIns="0" rtlCol="0" anchor="ctr"/>
+          <a:lstStyle/>
+          <a:p>
+            <a:pPr algn="ctr" indent="0" marL="0">
+              <a:buNone/>
+            </a:pPr>
+            <a:r>
+              <a:rPr lang="ja-JP" altLang="en-US" sz="1500" dirty="0">
+                <a:solidFill>
+                  <a:srgbClr val="FFFFFF"/>
+                </a:solidFill>
+                <a:latin typeface="Dela Gothic One" pitchFamily="34" charset="0"/>
+                <a:ea typeface="けいふぉんと" pitchFamily="34" charset="-122"/>
+                <a:cs typeface="Dela Gothic One" pitchFamily="34" charset="-120"/>
+              </a:rPr>
+              <a:t>2</a:t>
+            </a:r>
+            <a:endParaRPr lang="ja-JP" sz="1500" dirty="0"/>
+          </a:p>
+        </p:txBody>
+      </p:sp>
+      <p:sp>
+        <p:nvSpPr>
+          <p:cNvPr id="10" name="step-text"/>
+          <p:cNvSpPr txBox="1"/>
+          <p:nvPr/>
+        </p:nvSpPr>
+        <p:spPr>
+          <a:xfrm>
+            <a:off x="1234440" y="2299716"/>
+            <a:ext cx="7269480" cy="566928"/>
           </a:xfrm>
           <a:prstGeom prst="rect">
             <a:avLst/>
@@ -6685,95 +6962,118 @@
           <a:ln/>
         </p:spPr>
         <p:txBody>
-          <a:bodyPr wrap="square" lIns="0" tIns="0" rIns="0" bIns="0" rtlCol="0" anchor="ctr"/>
-          <a:lstStyle/>
-          <a:p>
-            <a:pPr algn="ctr" indent="0" marL="0">
-              <a:buNone/>
-            </a:pPr>
-            <a:r>
-              <a:rPr lang="en-US" sz="1400" b="1" dirty="0">
-                <a:solidFill>
-                  <a:schemeClr val="tx1"/>
-                </a:solidFill>
-              </a:rPr>
-              <a:t>2</a:t>
-            </a:r>
-            <a:endParaRPr lang="en-US" sz="1400" dirty="0"/>
-          </a:p>
-        </p:txBody>
-      </p:sp>
-      <p:sp>
-        <p:nvSpPr>
-          <p:cNvPr id="11" name="step-text"/>
-          <p:cNvSpPr txBox="1"/>
-          <p:nvPr/>
-        </p:nvSpPr>
-        <p:spPr>
-          <a:xfrm>
-            <a:off x="1097280" y="2281428"/>
-            <a:ext cx="7498080" cy="603504"/>
-          </a:xfrm>
-          <a:prstGeom prst="rect">
-            <a:avLst/>
-          </a:prstGeom>
-          <a:noFill/>
-          <a:ln/>
-        </p:spPr>
-        <p:txBody>
-          <a:bodyPr wrap="square" lIns="0" tIns="0" rIns="0" bIns="0" rtlCol="0" anchor="ctr"/>
+          <a:bodyPr wrap="square" lIns="0" tIns="0" rIns="0" bIns="0" rtlCol="0" anchor="ctr">
+            <a:normAutofit/>
+          </a:bodyPr>
           <a:lstStyle/>
           <a:p>
             <a:pPr indent="0" marL="0">
               <a:buNone/>
             </a:pPr>
             <a:r>
-              <a:rPr lang="en-US" sz="1450" dirty="0">
-                <a:solidFill>
-                  <a:schemeClr val="tx1"/>
-                </a:solidFill>
+              <a:rPr lang="ja-JP" altLang="en-US" sz="1400" b="1" dirty="0">
+                <a:solidFill>
+                  <a:srgbClr val="1A1A1A"/>
+                </a:solidFill>
+                <a:latin typeface="Noto Sans JP" pitchFamily="34" charset="0"/>
+                <a:ea typeface="Noto Sans JP" pitchFamily="34" charset="-122"/>
+                <a:cs typeface="Noto Sans JP" pitchFamily="34" charset="-120"/>
               </a:rPr>
               <a:t>「効果の大きさ」「作りやすさ」で ○△× を付ける</a:t>
             </a:r>
-            <a:endParaRPr lang="en-US" sz="1450" dirty="0"/>
-          </a:p>
-        </p:txBody>
-      </p:sp>
-      <p:sp>
-        <p:nvSpPr>
-          <p:cNvPr id="12" name="step-num"/>
+            <a:endParaRPr lang="ja-JP" sz="1400" dirty="0"/>
+          </a:p>
+        </p:txBody>
+      </p:sp>
+      <p:sp>
+        <p:nvSpPr>
+          <p:cNvPr id="11" name="card"/>
           <p:cNvSpPr/>
           <p:nvPr/>
         </p:nvSpPr>
         <p:spPr>
           <a:xfrm>
-            <a:off x="548640" y="2994660"/>
-            <a:ext cx="384048" cy="384048"/>
-          </a:xfrm>
-          <a:prstGeom prst="ellipse">
-            <a:avLst/>
+            <a:off x="502920" y="2994660"/>
+            <a:ext cx="8138160" cy="566928"/>
+          </a:xfrm>
+          <a:prstGeom prst="roundRect">
+            <a:avLst>
+              <a:gd name="adj" fmla="val 16129"/>
+            </a:avLst>
           </a:prstGeom>
           <a:solidFill>
-            <a:schemeClr val="accent1"/>
+            <a:srgbClr val="FFFFFF"/>
           </a:solidFill>
-          <a:ln w="15875">
+          <a:ln w="25400">
             <a:solidFill>
               <a:srgbClr val="1A1A1A"/>
             </a:solidFill>
             <a:prstDash val="solid"/>
           </a:ln>
-        </p:spPr>
-      </p:sp>
-      <p:sp>
-        <p:nvSpPr>
-          <p:cNvPr id="13" name="step-num-text"/>
+          <a:effectLst>
+            <a:outerShdw sx="100000" sy="100000" kx="0" ky="0" algn="bl" rotWithShape="0" blurRad="101600" dist="38100" dir="2700000">
+              <a:srgbClr val="1A1A1A">
+                <a:alpha val="100000"/>
+              </a:srgbClr>
+            </a:outerShdw>
+          </a:effectLst>
+        </p:spPr>
+      </p:sp>
+      <p:sp>
+        <p:nvSpPr>
+          <p:cNvPr id="12" name="Text 9"/>
           <p:cNvSpPr txBox="1"/>
           <p:nvPr/>
         </p:nvSpPr>
         <p:spPr>
           <a:xfrm>
-            <a:off x="548640" y="2994660"/>
-            <a:ext cx="384048" cy="384048"/>
+            <a:off x="640080" y="3076956"/>
+            <a:ext cx="402336" cy="402336"/>
+          </a:xfrm>
+          <a:prstGeom prst="ellipse">
+            <a:avLst/>
+          </a:prstGeom>
+          <a:solidFill>
+            <a:srgbClr val="DD6420"/>
+          </a:solidFill>
+          <a:ln w="19050">
+            <a:solidFill>
+              <a:srgbClr val="1A1A1A"/>
+            </a:solidFill>
+          </a:ln>
+        </p:spPr>
+        <p:txBody>
+          <a:bodyPr wrap="square" lIns="0" tIns="0" rIns="0" bIns="0" rtlCol="0" anchor="ctr"/>
+          <a:lstStyle/>
+          <a:p>
+            <a:pPr algn="ctr" indent="0" marL="0">
+              <a:buNone/>
+            </a:pPr>
+            <a:r>
+              <a:rPr lang="ja-JP" altLang="en-US" sz="1500" dirty="0">
+                <a:solidFill>
+                  <a:srgbClr val="FFFFFF"/>
+                </a:solidFill>
+                <a:latin typeface="Dela Gothic One" pitchFamily="34" charset="0"/>
+                <a:ea typeface="けいふぉんと" pitchFamily="34" charset="-122"/>
+                <a:cs typeface="Dela Gothic One" pitchFamily="34" charset="-120"/>
+              </a:rPr>
+              <a:t>3</a:t>
+            </a:r>
+            <a:endParaRPr lang="ja-JP" sz="1500" dirty="0"/>
+          </a:p>
+        </p:txBody>
+      </p:sp>
+      <p:sp>
+        <p:nvSpPr>
+          <p:cNvPr id="13" name="step-text"/>
+          <p:cNvSpPr txBox="1"/>
+          <p:nvPr/>
+        </p:nvSpPr>
+        <p:spPr>
+          <a:xfrm>
+            <a:off x="1234440" y="2994660"/>
+            <a:ext cx="7269480" cy="566928"/>
           </a:xfrm>
           <a:prstGeom prst="rect">
             <a:avLst/>
@@ -6782,158 +7082,111 @@
           <a:ln/>
         </p:spPr>
         <p:txBody>
-          <a:bodyPr wrap="square" lIns="0" tIns="0" rIns="0" bIns="0" rtlCol="0" anchor="ctr"/>
+          <a:bodyPr wrap="square" lIns="0" tIns="0" rIns="0" bIns="0" rtlCol="0" anchor="ctr">
+            <a:normAutofit/>
+          </a:bodyPr>
+          <a:lstStyle/>
+          <a:p>
+            <a:pPr indent="0" marL="0">
+              <a:buNone/>
+            </a:pPr>
+            <a:r>
+              <a:rPr lang="ja-JP" altLang="en-US" sz="1400" b="1" dirty="0">
+                <a:solidFill>
+                  <a:srgbClr val="1A1A1A"/>
+                </a:solidFill>
+                <a:latin typeface="Noto Sans JP" pitchFamily="34" charset="0"/>
+                <a:ea typeface="Noto Sans JP" pitchFamily="34" charset="-122"/>
+                <a:cs typeface="Noto Sans JP" pitchFamily="34" charset="-120"/>
+              </a:rPr>
+              <a:t>1つに決め、設計シートに一言で書く</a:t>
+            </a:r>
+            <a:endParaRPr lang="ja-JP" sz="1400" dirty="0"/>
+          </a:p>
+        </p:txBody>
+      </p:sp>
+      <p:sp>
+        <p:nvSpPr>
+          <p:cNvPr id="14" name="Text 11"/>
+          <p:cNvSpPr txBox="1"/>
+          <p:nvPr/>
+        </p:nvSpPr>
+        <p:spPr>
+          <a:xfrm rot="-60000">
+            <a:off x="502920" y="4005072"/>
+            <a:ext cx="8138160" cy="502920"/>
+          </a:xfrm>
+          <a:prstGeom prst="rect">
+            <a:avLst/>
+          </a:prstGeom>
+          <a:solidFill>
+            <a:srgbClr val="DD6420"/>
+          </a:solidFill>
+          <a:ln w="19050">
+            <a:solidFill>
+              <a:srgbClr val="1A1A1A"/>
+            </a:solidFill>
+          </a:ln>
+          <a:effectLst>
+            <a:outerShdw sx="100000" sy="100000" kx="0" ky="0" algn="bl" rotWithShape="0" blurRad="101600" dist="38100" dir="2700000">
+              <a:srgbClr val="1A1A1A">
+                <a:alpha val="100000"/>
+              </a:srgbClr>
+            </a:outerShdw>
+          </a:effectLst>
+        </p:spPr>
+        <p:txBody>
+          <a:bodyPr wrap="square" lIns="0" tIns="1905" rIns="1905" bIns="0" rtlCol="0" anchor="ctr">
+            <a:normAutofit/>
+          </a:bodyPr>
           <a:lstStyle/>
           <a:p>
             <a:pPr algn="ctr" indent="0" marL="0">
               <a:buNone/>
             </a:pPr>
             <a:r>
-              <a:rPr lang="en-US" sz="1400" b="1" dirty="0">
-                <a:solidFill>
-                  <a:schemeClr val="tx1"/>
-                </a:solidFill>
-              </a:rPr>
-              <a:t>3</a:t>
-            </a:r>
-            <a:endParaRPr lang="en-US" sz="1400" dirty="0"/>
-          </a:p>
-        </p:txBody>
-      </p:sp>
-      <p:sp>
-        <p:nvSpPr>
-          <p:cNvPr id="14" name="step-text"/>
-          <p:cNvSpPr txBox="1"/>
-          <p:nvPr/>
-        </p:nvSpPr>
-        <p:spPr>
-          <a:xfrm>
-            <a:off x="1097280" y="2884932"/>
-            <a:ext cx="7498080" cy="603504"/>
-          </a:xfrm>
-          <a:prstGeom prst="rect">
-            <a:avLst/>
-          </a:prstGeom>
-          <a:noFill/>
-          <a:ln/>
-        </p:spPr>
-        <p:txBody>
-          <a:bodyPr wrap="square" lIns="0" tIns="0" rIns="0" bIns="0" rtlCol="0" anchor="ctr"/>
-          <a:lstStyle/>
-          <a:p>
-            <a:pPr indent="0" marL="0">
-              <a:buNone/>
-            </a:pPr>
-            <a:r>
-              <a:rPr lang="en-US" sz="1450" dirty="0">
-                <a:solidFill>
-                  <a:schemeClr val="tx1"/>
-                </a:solidFill>
-              </a:rPr>
-              <a:t>1つに決め、設計シートに一言で書く</a:t>
-            </a:r>
-            <a:endParaRPr lang="en-US" sz="1450" dirty="0"/>
-          </a:p>
-        </p:txBody>
-      </p:sp>
-      <p:sp>
-        <p:nvSpPr>
-          <p:cNvPr id="15" name="foot-box"/>
-          <p:cNvSpPr/>
-          <p:nvPr/>
-        </p:nvSpPr>
-        <p:spPr>
-          <a:xfrm>
-            <a:off x="548640" y="3977640"/>
-            <a:ext cx="8046720" cy="502920"/>
-          </a:xfrm>
-          <a:prstGeom prst="roundRect">
-            <a:avLst>
-              <a:gd name="adj" fmla="val 18182"/>
-            </a:avLst>
-          </a:prstGeom>
-          <a:solidFill>
-            <a:schemeClr val="bg2"/>
-          </a:solidFill>
-          <a:ln w="12700">
-            <a:solidFill>
-              <a:schemeClr val="bg2"/>
-            </a:solidFill>
-            <a:prstDash val="solid"/>
-          </a:ln>
-        </p:spPr>
-      </p:sp>
-      <p:pic>
-        <p:nvPicPr>
-          <p:cNvPr id="16" name="foot-icon" descr="preencoded.png">    </p:cNvPr>
-          <p:cNvPicPr>
-            <a:picLocks noChangeAspect="1"/>
-          </p:cNvPicPr>
-          <p:nvPr/>
-        </p:nvPicPr>
-        <p:blipFill>
-          <a:blip r:embed="rId1"/>
-          <a:stretch>
-            <a:fillRect/>
-          </a:stretch>
-        </p:blipFill>
-        <p:spPr>
-          <a:xfrm>
-            <a:off x="685800" y="4105656"/>
-            <a:ext cx="246888" cy="246888"/>
-          </a:xfrm>
-          <a:prstGeom prst="rect">
-            <a:avLst/>
-          </a:prstGeom>
-        </p:spPr>
-      </p:pic>
-      <p:sp>
-        <p:nvSpPr>
-          <p:cNvPr id="17" name="foot-text"/>
-          <p:cNvSpPr txBox="1"/>
-          <p:nvPr/>
-        </p:nvSpPr>
-        <p:spPr>
-          <a:xfrm>
-            <a:off x="1051560" y="3977640"/>
-            <a:ext cx="7406640" cy="502920"/>
-          </a:xfrm>
-          <a:prstGeom prst="rect">
-            <a:avLst/>
-          </a:prstGeom>
-          <a:noFill/>
-          <a:ln/>
-        </p:spPr>
-        <p:txBody>
-          <a:bodyPr wrap="square" lIns="0" tIns="0" rIns="0" bIns="0" rtlCol="0" anchor="ctr"/>
-          <a:lstStyle/>
-          <a:p>
-            <a:pPr indent="0" marL="0">
-              <a:buNone/>
-            </a:pPr>
-            <a:r>
-              <a:rPr lang="en-US" sz="1150" dirty="0">
-                <a:solidFill>
-                  <a:schemeClr val="tx1"/>
-                </a:solidFill>
-              </a:rPr>
-              <a:t>例：「電話予約をフォーム受付にして、BASEで管理する」</a:t>
-            </a:r>
-            <a:endParaRPr lang="en-US" sz="1150" dirty="0"/>
-          </a:p>
-          <a:p>
-            <a:pPr indent="0" marL="0">
-              <a:buNone/>
-            </a:pPr>
-            <a:r>
-              <a:rPr lang="en-US" sz="1150" dirty="0">
-                <a:solidFill>
-                  <a:schemeClr val="tx1"/>
-                </a:solidFill>
+              <a:rPr lang="ja-JP" altLang="en-US" sz="1300" b="1" dirty="0">
+                <a:solidFill>
+                  <a:srgbClr val="FFFFFF"/>
+                </a:solidFill>
+                <a:latin typeface="Noto Sans JP" pitchFamily="34" charset="0"/>
+                <a:ea typeface="Noto Sans JP" pitchFamily="34" charset="-122"/>
+                <a:cs typeface="Noto Sans JP" pitchFamily="34" charset="-120"/>
+              </a:rPr>
+              <a:t>例：</a:t>
+            </a:r>
+            <a:pPr algn="ctr" indent="0" marL="0">
+              <a:buNone/>
+            </a:pPr>
+            <a:r>
+              <a:rPr lang="ja-JP" altLang="en-US" sz="1300" b="1" dirty="0">
+                <a:solidFill>
+                  <a:srgbClr val="FFD600"/>
+                </a:solidFill>
+                <a:latin typeface="Noto Sans JP" pitchFamily="34" charset="0"/>
+                <a:ea typeface="Noto Sans JP" pitchFamily="34" charset="-122"/>
+                <a:cs typeface="Noto Sans JP" pitchFamily="34" charset="-120"/>
+              </a:rPr>
+              <a:t>「電話予約をフォーム受付にして、BASEで管理する」</a:t>
+            </a:r>
+            <a:endParaRPr lang="ja-JP" sz="1300" dirty="0"/>
+          </a:p>
+          <a:p>
+            <a:pPr algn="ctr" indent="0" marL="0">
+              <a:buNone/>
+            </a:pPr>
+            <a:r>
+              <a:rPr lang="ja-JP" altLang="en-US" sz="1300" b="1" dirty="0">
+                <a:solidFill>
+                  <a:srgbClr val="FFFFFF"/>
+                </a:solidFill>
+                <a:latin typeface="Noto Sans JP" pitchFamily="34" charset="0"/>
+                <a:ea typeface="Noto Sans JP" pitchFamily="34" charset="-122"/>
+                <a:cs typeface="Noto Sans JP" pitchFamily="34" charset="-120"/>
               </a:rPr>
               <a:t>2ヶ月で公開まで届く大きさか、講師と一緒に確認します</a:t>
             </a:r>
-            <a:endParaRPr lang="en-US" sz="1150" dirty="0"/>
+            <a:endParaRPr lang="ja-JP" sz="1300" dirty="0"/>
           </a:p>
         </p:txBody>
       </p:sp>
@@ -6949,8 +7202,8 @@
         </p:nvSpPr>
         <p:spPr>
           <a:xfrm>
-            <a:off x="8229600" y="4773168"/>
-            <a:ext cx="365760" cy="228600"/>
+            <a:off x="8366760" y="4754880"/>
+            <a:ext cx="365760" cy="274320"/>
           </a:xfrm>
           <a:prstGeom prst="rect">
             <a:avLst/>
@@ -6962,20 +7215,23 @@
           </a:extLst>
         </p:spPr>
         <p:txBody>
-          <a:bodyPr/>
+          <a:bodyPr anchor="ctr"/>
           <a:lstStyle>
             <a:lvl1pPr>
-              <a:defRPr sz="900">
-                <a:solidFill>
-                  <a:srgbClr val="5A6872"/>
-                </a:solidFill>
+              <a:defRPr sz="850">
+                <a:solidFill>
+                  <a:srgbClr val="FFFFFF"/>
+                </a:solidFill>
+                <a:latin typeface="Noto Sans JP"/>
+                <a:ea typeface="Noto Sans JP"/>
+                <a:cs typeface="Noto Sans JP"/>
               </a:defRPr>
             </a:lvl1pPr>
           </a:lstStyle>
           <a:p>
             <a:pPr algn="r"/>
             <a:fld id="{F7021451-1387-4CA6-816F-3879F97B5CBC}" type="slidenum">
-              <a:rPr b="0" lang="en-US"/>
+              <a:rPr b="1" lang="en-US"/>
               <a:t>7</a:t>
             </a:fld>
             <a:endParaRPr lang="en-US"/>
@@ -7010,15 +7266,58 @@
       <p:sp>
         <p:nvSpPr>
           <p:cNvPr id="2" name="Text 0"/>
-          <p:cNvSpPr/>
-          <p:nvPr>
-            <p:ph idx="100" type="title" hasCustomPrompt="1"/>
-          </p:nvPr>
-        </p:nvSpPr>
-        <p:spPr>
-          <a:xfrm>
-            <a:off x="548640" y="658368"/>
-            <a:ext cx="8046720" cy="566928"/>
+          <p:cNvSpPr txBox="1"/>
+          <p:nvPr/>
+        </p:nvSpPr>
+        <p:spPr>
+          <a:xfrm rot="-180000">
+            <a:off x="411480" y="201168"/>
+            <a:ext cx="1040587" cy="352044"/>
+          </a:xfrm>
+          <a:prstGeom prst="rect">
+            <a:avLst/>
+          </a:prstGeom>
+          <a:solidFill>
+            <a:srgbClr val="1A1A1A"/>
+          </a:solidFill>
+          <a:ln>
+            <a:solidFill>
+              <a:srgbClr val="1A1A1A"/>
+            </a:solidFill>
+          </a:ln>
+        </p:spPr>
+        <p:txBody>
+          <a:bodyPr wrap="square" lIns="0" tIns="0" rIns="0" bIns="0" rtlCol="0" anchor="ctr"/>
+          <a:lstStyle/>
+          <a:p>
+            <a:pPr algn="ctr" indent="0" marL="0">
+              <a:buNone/>
+            </a:pPr>
+            <a:r>
+              <a:rPr lang="ja-JP" altLang="en-US" sz="1100" dirty="0">
+                <a:solidFill>
+                  <a:srgbClr val="FFFFFF"/>
+                </a:solidFill>
+                <a:latin typeface="Dela Gothic One" pitchFamily="34" charset="0"/>
+                <a:ea typeface="けいふぉんと" pitchFamily="34" charset="-122"/>
+                <a:cs typeface="Dela Gothic One" pitchFamily="34" charset="-120"/>
+              </a:rPr>
+              <a:t>家で試す</a:t>
+            </a:r>
+            <a:endParaRPr lang="ja-JP" sz="1100" dirty="0"/>
+          </a:p>
+        </p:txBody>
+      </p:sp>
+      <p:sp>
+        <p:nvSpPr>
+          <p:cNvPr id="3" name="Text 1"/>
+          <p:cNvSpPr txBox="1"/>
+          <p:nvPr/>
+        </p:nvSpPr>
+        <p:spPr>
+          <a:xfrm>
+            <a:off x="411480" y="502920"/>
+            <a:ext cx="8321040" cy="685800"/>
           </a:xfrm>
           <a:prstGeom prst="rect">
             <a:avLst/>
@@ -7027,101 +7326,43 @@
           <a:ln/>
         </p:spPr>
         <p:txBody>
-          <a:bodyPr wrap="square" lIns="0" tIns="0" rIns="0" bIns="0" rtlCol="0" anchor="ctr"/>
-          <a:lstStyle/>
-          <a:p>
-            <a:pPr algn="l" indent="0" marL="0">
-              <a:buNone/>
-            </a:pPr>
-            <a:r>
-              <a:rPr lang="en-US" sz="2400" b="1" dirty="0">
-                <a:solidFill>
-                  <a:schemeClr val="tx1"/>
-                </a:solidFill>
+          <a:bodyPr wrap="square" lIns="0" tIns="0" rIns="0" bIns="0" rtlCol="0" anchor="ctr">
+            <a:normAutofit/>
+          </a:bodyPr>
+          <a:lstStyle/>
+          <a:p>
+            <a:pPr indent="0" marL="0">
+              <a:buNone/>
+            </a:pPr>
+            <a:r>
+              <a:rPr lang="ja-JP" altLang="en-US" sz="2600" dirty="0">
+                <a:solidFill>
+                  <a:srgbClr val="1A1A1A"/>
+                </a:solidFill>
+                <a:latin typeface="Dela Gothic One" pitchFamily="34" charset="0"/>
+                <a:ea typeface="けいふぉんと" pitchFamily="34" charset="-122"/>
+                <a:cs typeface="Dela Gothic One" pitchFamily="34" charset="-120"/>
               </a:rPr>
               <a:t>AIへの頼み方の例</a:t>
             </a:r>
-            <a:endParaRPr lang="en-US" sz="2400" dirty="0"/>
-          </a:p>
-        </p:txBody>
-      </p:sp>
-      <p:sp>
-        <p:nvSpPr>
-          <p:cNvPr id="3" name="chip"/>
+            <a:endParaRPr lang="ja-JP" sz="2600" dirty="0"/>
+          </a:p>
+        </p:txBody>
+      </p:sp>
+      <p:sp>
+        <p:nvSpPr>
+          <p:cNvPr id="5" name="prompt-box"/>
           <p:cNvSpPr/>
           <p:nvPr/>
         </p:nvSpPr>
         <p:spPr>
           <a:xfrm>
-            <a:off x="548640" y="292608"/>
-            <a:ext cx="932688" cy="292608"/>
+            <a:off x="502920" y="1417320"/>
+            <a:ext cx="8138160" cy="3108960"/>
           </a:xfrm>
           <a:prstGeom prst="roundRect">
             <a:avLst>
-              <a:gd name="adj" fmla="val 50000"/>
-            </a:avLst>
-          </a:prstGeom>
-          <a:solidFill>
-            <a:schemeClr val="tx1"/>
-          </a:solidFill>
-          <a:ln w="12700">
-            <a:solidFill>
-              <a:schemeClr val="tx1"/>
-            </a:solidFill>
-            <a:prstDash val="solid"/>
-          </a:ln>
-        </p:spPr>
-      </p:sp>
-      <p:sp>
-        <p:nvSpPr>
-          <p:cNvPr id="4" name="chip-text"/>
-          <p:cNvSpPr txBox="1"/>
-          <p:nvPr/>
-        </p:nvSpPr>
-        <p:spPr>
-          <a:xfrm>
-            <a:off x="548640" y="292608"/>
-            <a:ext cx="932688" cy="292608"/>
-          </a:xfrm>
-          <a:prstGeom prst="rect">
-            <a:avLst/>
-          </a:prstGeom>
-          <a:noFill/>
-          <a:ln/>
-        </p:spPr>
-        <p:txBody>
-          <a:bodyPr wrap="square" lIns="0" tIns="0" rIns="0" bIns="0" rtlCol="0" anchor="ctr"/>
-          <a:lstStyle/>
-          <a:p>
-            <a:pPr algn="ctr" indent="0" marL="0">
-              <a:buNone/>
-            </a:pPr>
-            <a:r>
-              <a:rPr lang="en-US" sz="1100" b="1" dirty="0">
-                <a:solidFill>
-                  <a:schemeClr val="accent1"/>
-                </a:solidFill>
-              </a:rPr>
-              <a:t>家で試す</a:t>
-            </a:r>
-            <a:endParaRPr lang="en-US" sz="1100" dirty="0"/>
-          </a:p>
-        </p:txBody>
-      </p:sp>
-      <p:sp>
-        <p:nvSpPr>
-          <p:cNvPr id="6" name="prompt-box"/>
-          <p:cNvSpPr/>
-          <p:nvPr/>
-        </p:nvSpPr>
-        <p:spPr>
-          <a:xfrm>
-            <a:off x="548640" y="1463040"/>
-            <a:ext cx="8046720" cy="3017520"/>
-          </a:xfrm>
-          <a:prstGeom prst="roundRect">
-            <a:avLst>
-              <a:gd name="adj" fmla="val 3636"/>
+              <a:gd name="adj" fmla="val 2941"/>
             </a:avLst>
           </a:prstGeom>
           <a:solidFill>
@@ -7134,9 +7375,9 @@
             <a:prstDash val="solid"/>
           </a:ln>
           <a:effectLst>
-            <a:outerShdw sx="100000" sy="100000" kx="0" ky="0" algn="bl" rotWithShape="0" blurRad="101600" dist="38100" dir="2700000">
-              <a:srgbClr val="000000">
-                <a:alpha val="18000"/>
+            <a:outerShdw sx="100000" sy="100000" kx="0" ky="0" algn="bl" rotWithShape="0" blurRad="101600" dist="50800" dir="2700000">
+              <a:srgbClr val="1A1A1A">
+                <a:alpha val="100000"/>
               </a:srgbClr>
             </a:outerShdw>
           </a:effectLst>
@@ -7144,22 +7385,22 @@
       </p:sp>
       <p:sp>
         <p:nvSpPr>
-          <p:cNvPr id="7" name="icon-circle"/>
+          <p:cNvPr id="6" name="icon-circle"/>
           <p:cNvSpPr/>
           <p:nvPr/>
         </p:nvSpPr>
         <p:spPr>
           <a:xfrm>
-            <a:off x="777240" y="1664208"/>
+            <a:off x="731520" y="1600200"/>
             <a:ext cx="457200" cy="457200"/>
           </a:xfrm>
           <a:prstGeom prst="ellipse">
             <a:avLst/>
           </a:prstGeom>
           <a:solidFill>
-            <a:schemeClr val="accent1"/>
+            <a:srgbClr val="FFD600"/>
           </a:solidFill>
-          <a:ln w="15875">
+          <a:ln w="19050">
             <a:solidFill>
               <a:srgbClr val="1A1A1A"/>
             </a:solidFill>
@@ -7169,7 +7410,7 @@
       </p:sp>
       <p:pic>
         <p:nvPicPr>
-          <p:cNvPr id="8" name="icon" descr="preencoded.png">    </p:cNvPr>
+          <p:cNvPr id="7" name="icon" descr="preencoded.png">    </p:cNvPr>
           <p:cNvPicPr>
             <a:picLocks noChangeAspect="1"/>
           </p:cNvPicPr>
@@ -7183,8 +7424,8 @@
         </p:blipFill>
         <p:spPr>
           <a:xfrm>
-            <a:off x="896112" y="1783080"/>
-            <a:ext cx="219456" cy="219456"/>
+            <a:off x="845820" y="1714500"/>
+            <a:ext cx="228600" cy="228600"/>
           </a:xfrm>
           <a:prstGeom prst="rect">
             <a:avLst/>
@@ -7193,13 +7434,13 @@
       </p:pic>
       <p:sp>
         <p:nvSpPr>
-          <p:cNvPr id="9" name="Text 5"/>
+          <p:cNvPr id="8" name="Text 4"/>
           <p:cNvSpPr txBox="1"/>
           <p:nvPr/>
         </p:nvSpPr>
         <p:spPr>
           <a:xfrm>
-            <a:off x="1371600" y="1664208"/>
+            <a:off x="1325880" y="1600200"/>
             <a:ext cx="5486400" cy="457200"/>
           </a:xfrm>
           <a:prstGeom prst="rect">
@@ -7216,27 +7457,30 @@
               <a:buNone/>
             </a:pPr>
             <a:r>
-              <a:rPr lang="en-US" sz="1300" b="1" dirty="0">
-                <a:solidFill>
-                  <a:schemeClr val="accent1"/>
-                </a:solidFill>
+              <a:rPr lang="ja-JP" altLang="en-US" sz="1400" dirty="0">
+                <a:solidFill>
+                  <a:srgbClr val="FFD600"/>
+                </a:solidFill>
+                <a:latin typeface="Dela Gothic One" pitchFamily="34" charset="0"/>
+                <a:ea typeface="けいふぉんと" pitchFamily="34" charset="-122"/>
+                <a:cs typeface="Dela Gothic One" pitchFamily="34" charset="-120"/>
               </a:rPr>
               <a:t>AIへの頼み方（コピーして使う）</a:t>
             </a:r>
-            <a:endParaRPr lang="en-US" sz="1300" dirty="0"/>
-          </a:p>
-        </p:txBody>
-      </p:sp>
-      <p:sp>
-        <p:nvSpPr>
-          <p:cNvPr id="10" name="prompt-text"/>
+            <a:endParaRPr lang="ja-JP" sz="1400" dirty="0"/>
+          </a:p>
+        </p:txBody>
+      </p:sp>
+      <p:sp>
+        <p:nvSpPr>
+          <p:cNvPr id="9" name="prompt-text"/>
           <p:cNvSpPr txBox="1"/>
           <p:nvPr/>
         </p:nvSpPr>
         <p:spPr>
           <a:xfrm>
-            <a:off x="822960" y="2286000"/>
-            <a:ext cx="7498080" cy="2057400"/>
+            <a:off x="777240" y="2240280"/>
+            <a:ext cx="7589520" cy="2148840"/>
           </a:xfrm>
           <a:prstGeom prst="rect">
             <a:avLst/>
@@ -7245,7 +7489,9 @@
           <a:ln/>
         </p:spPr>
         <p:txBody>
-          <a:bodyPr wrap="square" lIns="0" tIns="0" rIns="0" bIns="0" rtlCol="0" anchor="t"/>
+          <a:bodyPr wrap="square" lIns="0" tIns="0" rIns="0" bIns="0" rtlCol="0" anchor="t">
+            <a:normAutofit/>
+          </a:bodyPr>
           <a:lstStyle/>
           <a:p>
             <a:pPr indent="0" marL="0">
@@ -7255,14 +7501,17 @@
               <a:buNone/>
             </a:pPr>
             <a:r>
-              <a:rPr lang="en-US" sz="1300" dirty="0">
-                <a:solidFill>
-                  <a:schemeClr val="bg1"/>
-                </a:solidFill>
+              <a:rPr lang="ja-JP" altLang="en-US" sz="1300" dirty="0">
+                <a:solidFill>
+                  <a:srgbClr val="FFFFFF"/>
+                </a:solidFill>
+                <a:latin typeface="Noto Sans JP Medium" pitchFamily="34" charset="0"/>
+                <a:ea typeface="Noto Sans JP Medium" pitchFamily="34" charset="-122"/>
+                <a:cs typeface="Noto Sans JP Medium" pitchFamily="34" charset="-120"/>
               </a:rPr>
               <a:t>あなたは中小企業の業務改善の相談相手です。</a:t>
             </a:r>
-            <a:endParaRPr lang="en-US" sz="1300" dirty="0"/>
+            <a:endParaRPr lang="ja-JP" sz="1300" dirty="0"/>
           </a:p>
           <a:p>
             <a:pPr indent="0" marL="0">
@@ -7272,14 +7521,17 @@
               <a:buNone/>
             </a:pPr>
             <a:r>
-              <a:rPr lang="en-US" sz="1300" dirty="0">
-                <a:solidFill>
-                  <a:schemeClr val="bg1"/>
-                </a:solidFill>
+              <a:rPr lang="ja-JP" altLang="en-US" sz="1300" dirty="0">
+                <a:solidFill>
+                  <a:srgbClr val="FFFFFF"/>
+                </a:solidFill>
+                <a:latin typeface="Noto Sans JP Medium" pitchFamily="34" charset="0"/>
+                <a:ea typeface="Noto Sans JP Medium" pitchFamily="34" charset="-122"/>
+                <a:cs typeface="Noto Sans JP Medium" pitchFamily="34" charset="-120"/>
               </a:rPr>
               <a:t>私の会社は「（業種）」で、従業員は（人数）名です。</a:t>
             </a:r>
-            <a:endParaRPr lang="en-US" sz="1300" dirty="0"/>
+            <a:endParaRPr lang="ja-JP" sz="1300" dirty="0"/>
           </a:p>
           <a:p>
             <a:pPr indent="0" marL="0">
@@ -7289,14 +7541,17 @@
               <a:buNone/>
             </a:pPr>
             <a:r>
-              <a:rPr lang="en-US" sz="1300" dirty="0">
-                <a:solidFill>
-                  <a:schemeClr val="bg1"/>
-                </a:solidFill>
+              <a:rPr lang="ja-JP" altLang="en-US" sz="1300" dirty="0">
+                <a:solidFill>
+                  <a:srgbClr val="FFFFFF"/>
+                </a:solidFill>
+                <a:latin typeface="Noto Sans JP Medium" pitchFamily="34" charset="0"/>
+                <a:ea typeface="Noto Sans JP Medium" pitchFamily="34" charset="-122"/>
+                <a:cs typeface="Noto Sans JP Medium" pitchFamily="34" charset="-120"/>
               </a:rPr>
               <a:t>次の業務の中から、Larkで最初にしくみ化すると効果が出やすいものを、</a:t>
             </a:r>
-            <a:endParaRPr lang="en-US" sz="1300" dirty="0"/>
+            <a:endParaRPr lang="ja-JP" sz="1300" dirty="0"/>
           </a:p>
           <a:p>
             <a:pPr indent="0" marL="0">
@@ -7306,14 +7561,17 @@
               <a:buNone/>
             </a:pPr>
             <a:r>
-              <a:rPr lang="en-US" sz="1300" dirty="0">
-                <a:solidFill>
-                  <a:schemeClr val="bg1"/>
-                </a:solidFill>
+              <a:rPr lang="ja-JP" altLang="en-US" sz="1300" dirty="0">
+                <a:solidFill>
+                  <a:srgbClr val="FFFFFF"/>
+                </a:solidFill>
+                <a:latin typeface="Noto Sans JP Medium" pitchFamily="34" charset="0"/>
+                <a:ea typeface="Noto Sans JP Medium" pitchFamily="34" charset="-122"/>
+                <a:cs typeface="Noto Sans JP Medium" pitchFamily="34" charset="-120"/>
               </a:rPr>
               <a:t>理由とあわせて上位3つ挙げてください。</a:t>
             </a:r>
-            <a:endParaRPr lang="en-US" sz="1300" dirty="0"/>
+            <a:endParaRPr lang="ja-JP" sz="1300" dirty="0"/>
           </a:p>
           <a:p>
             <a:pPr indent="0" marL="0">
@@ -7323,14 +7581,17 @@
               <a:buNone/>
             </a:pPr>
             <a:r>
-              <a:rPr lang="en-US" sz="1300" dirty="0">
-                <a:solidFill>
-                  <a:schemeClr val="bg1"/>
-                </a:solidFill>
+              <a:rPr lang="ja-JP" altLang="en-US" sz="1300" dirty="0">
+                <a:solidFill>
+                  <a:srgbClr val="FFFFFF"/>
+                </a:solidFill>
+                <a:latin typeface="Noto Sans JP Medium" pitchFamily="34" charset="0"/>
+                <a:ea typeface="Noto Sans JP Medium" pitchFamily="34" charset="-122"/>
+                <a:cs typeface="Noto Sans JP Medium" pitchFamily="34" charset="-120"/>
               </a:rPr>
               <a:t>（棚卸しした業務を貼り付け）</a:t>
             </a:r>
-            <a:endParaRPr lang="en-US" sz="1300" dirty="0"/>
+            <a:endParaRPr lang="ja-JP" sz="1300" dirty="0"/>
           </a:p>
         </p:txBody>
       </p:sp>
@@ -7346,8 +7607,8 @@
         </p:nvSpPr>
         <p:spPr>
           <a:xfrm>
-            <a:off x="8229600" y="4773168"/>
-            <a:ext cx="365760" cy="228600"/>
+            <a:off x="8366760" y="4754880"/>
+            <a:ext cx="365760" cy="274320"/>
           </a:xfrm>
           <a:prstGeom prst="rect">
             <a:avLst/>
@@ -7359,20 +7620,23 @@
           </a:extLst>
         </p:spPr>
         <p:txBody>
-          <a:bodyPr/>
+          <a:bodyPr anchor="ctr"/>
           <a:lstStyle>
             <a:lvl1pPr>
-              <a:defRPr sz="900">
-                <a:solidFill>
-                  <a:srgbClr val="5A6872"/>
-                </a:solidFill>
+              <a:defRPr sz="850">
+                <a:solidFill>
+                  <a:srgbClr val="FFFFFF"/>
+                </a:solidFill>
+                <a:latin typeface="Noto Sans JP"/>
+                <a:ea typeface="Noto Sans JP"/>
+                <a:cs typeface="Noto Sans JP"/>
               </a:defRPr>
             </a:lvl1pPr>
           </a:lstStyle>
           <a:p>
             <a:pPr algn="r"/>
             <a:fld id="{F7021451-1387-4CA6-816F-3879F97B5CBC}" type="slidenum">
-              <a:rPr b="0" lang="en-US"/>
+              <a:rPr b="1" lang="en-US"/>
               <a:t>8</a:t>
             </a:fld>
             <a:endParaRPr lang="en-US"/>
@@ -7407,15 +7671,58 @@
       <p:sp>
         <p:nvSpPr>
           <p:cNvPr id="2" name="Text 0"/>
-          <p:cNvSpPr/>
-          <p:nvPr>
-            <p:ph idx="100" type="title" hasCustomPrompt="1"/>
-          </p:nvPr>
-        </p:nvSpPr>
-        <p:spPr>
-          <a:xfrm>
-            <a:off x="548640" y="658368"/>
-            <a:ext cx="8046720" cy="566928"/>
+          <p:cNvSpPr txBox="1"/>
+          <p:nvPr/>
+        </p:nvSpPr>
+        <p:spPr>
+          <a:xfrm rot="-180000">
+            <a:off x="411480" y="201168"/>
+            <a:ext cx="894740" cy="352044"/>
+          </a:xfrm>
+          <a:prstGeom prst="rect">
+            <a:avLst/>
+          </a:prstGeom>
+          <a:solidFill>
+            <a:srgbClr val="1A1A1A"/>
+          </a:solidFill>
+          <a:ln>
+            <a:solidFill>
+              <a:srgbClr val="1A1A1A"/>
+            </a:solidFill>
+          </a:ln>
+        </p:spPr>
+        <p:txBody>
+          <a:bodyPr wrap="square" lIns="0" tIns="0" rIns="0" bIns="0" rtlCol="0" anchor="ctr"/>
+          <a:lstStyle/>
+          <a:p>
+            <a:pPr algn="ctr" indent="0" marL="0">
+              <a:buNone/>
+            </a:pPr>
+            <a:r>
+              <a:rPr lang="ja-JP" altLang="en-US" sz="1100" dirty="0">
+                <a:solidFill>
+                  <a:srgbClr val="FFFFFF"/>
+                </a:solidFill>
+                <a:latin typeface="Dela Gothic One" pitchFamily="34" charset="0"/>
+                <a:ea typeface="けいふぉんと" pitchFamily="34" charset="-122"/>
+                <a:cs typeface="Dela Gothic One" pitchFamily="34" charset="-120"/>
+              </a:rPr>
+              <a:t>まとめ</a:t>
+            </a:r>
+            <a:endParaRPr lang="ja-JP" sz="1100" dirty="0"/>
+          </a:p>
+        </p:txBody>
+      </p:sp>
+      <p:sp>
+        <p:nvSpPr>
+          <p:cNvPr id="3" name="Text 1"/>
+          <p:cNvSpPr txBox="1"/>
+          <p:nvPr/>
+        </p:nvSpPr>
+        <p:spPr>
+          <a:xfrm>
+            <a:off x="411480" y="502920"/>
+            <a:ext cx="8321040" cy="685800"/>
           </a:xfrm>
           <a:prstGeom prst="rect">
             <a:avLst/>
@@ -7424,105 +7731,79 @@
           <a:ln/>
         </p:spPr>
         <p:txBody>
-          <a:bodyPr wrap="square" lIns="0" tIns="0" rIns="0" bIns="0" rtlCol="0" anchor="ctr"/>
-          <a:lstStyle/>
-          <a:p>
-            <a:pPr algn="l" indent="0" marL="0">
-              <a:buNone/>
-            </a:pPr>
-            <a:r>
-              <a:rPr lang="en-US" sz="2400" b="1" dirty="0">
-                <a:solidFill>
-                  <a:schemeClr val="tx1"/>
-                </a:solidFill>
+          <a:bodyPr wrap="square" lIns="0" tIns="0" rIns="0" bIns="0" rtlCol="0" anchor="ctr">
+            <a:normAutofit/>
+          </a:bodyPr>
+          <a:lstStyle/>
+          <a:p>
+            <a:pPr indent="0" marL="0">
+              <a:buNone/>
+            </a:pPr>
+            <a:r>
+              <a:rPr lang="ja-JP" altLang="en-US" sz="2600" dirty="0">
+                <a:solidFill>
+                  <a:srgbClr val="1A1A1A"/>
+                </a:solidFill>
+                <a:latin typeface="Dela Gothic One" pitchFamily="34" charset="0"/>
+                <a:ea typeface="けいふぉんと" pitchFamily="34" charset="-122"/>
+                <a:cs typeface="Dela Gothic One" pitchFamily="34" charset="-120"/>
               </a:rPr>
               <a:t>宿題と、今日のチェック</a:t>
             </a:r>
-            <a:endParaRPr lang="en-US" sz="2400" dirty="0"/>
-          </a:p>
-        </p:txBody>
-      </p:sp>
-      <p:sp>
-        <p:nvSpPr>
-          <p:cNvPr id="3" name="chip"/>
+            <a:endParaRPr lang="ja-JP" sz="2600" dirty="0"/>
+          </a:p>
+        </p:txBody>
+      </p:sp>
+      <p:sp>
+        <p:nvSpPr>
+          <p:cNvPr id="4" name="card"/>
           <p:cNvSpPr/>
           <p:nvPr/>
         </p:nvSpPr>
         <p:spPr>
           <a:xfrm>
-            <a:off x="548640" y="292608"/>
-            <a:ext cx="795528" cy="292608"/>
+            <a:off x="502920" y="1417320"/>
+            <a:ext cx="3931920" cy="3108960"/>
           </a:xfrm>
           <a:prstGeom prst="roundRect">
             <a:avLst>
-              <a:gd name="adj" fmla="val 50000"/>
+              <a:gd name="adj" fmla="val 2941"/>
             </a:avLst>
           </a:prstGeom>
           <a:solidFill>
-            <a:schemeClr val="tx1"/>
+            <a:srgbClr val="FFFFFF"/>
           </a:solidFill>
-          <a:ln w="12700">
+          <a:ln w="25400">
             <a:solidFill>
-              <a:schemeClr val="tx1"/>
+              <a:srgbClr val="1A1A1A"/>
             </a:solidFill>
             <a:prstDash val="solid"/>
           </a:ln>
-        </p:spPr>
-      </p:sp>
-      <p:sp>
-        <p:nvSpPr>
-          <p:cNvPr id="4" name="chip-text"/>
-          <p:cNvSpPr txBox="1"/>
-          <p:nvPr/>
-        </p:nvSpPr>
-        <p:spPr>
-          <a:xfrm>
-            <a:off x="548640" y="292608"/>
-            <a:ext cx="795528" cy="292608"/>
-          </a:xfrm>
-          <a:prstGeom prst="rect">
-            <a:avLst/>
-          </a:prstGeom>
-          <a:noFill/>
-          <a:ln/>
-        </p:spPr>
-        <p:txBody>
-          <a:bodyPr wrap="square" lIns="0" tIns="0" rIns="0" bIns="0" rtlCol="0" anchor="ctr"/>
-          <a:lstStyle/>
-          <a:p>
-            <a:pPr algn="ctr" indent="0" marL="0">
-              <a:buNone/>
-            </a:pPr>
-            <a:r>
-              <a:rPr lang="en-US" sz="1100" b="1" dirty="0">
-                <a:solidFill>
-                  <a:schemeClr val="accent1"/>
-                </a:solidFill>
-              </a:rPr>
-              <a:t>まとめ</a:t>
-            </a:r>
-            <a:endParaRPr lang="en-US" sz="1100" dirty="0"/>
-          </a:p>
-        </p:txBody>
-      </p:sp>
-      <p:sp>
-        <p:nvSpPr>
-          <p:cNvPr id="5" name="card"/>
+          <a:effectLst>
+            <a:outerShdw sx="100000" sy="100000" kx="0" ky="0" algn="bl" rotWithShape="0" blurRad="101600" dist="50800" dir="2700000">
+              <a:srgbClr val="1A1A1A">
+                <a:alpha val="100000"/>
+              </a:srgbClr>
+            </a:outerShdw>
+          </a:effectLst>
+        </p:spPr>
+      </p:sp>
+      <p:sp>
+        <p:nvSpPr>
+          <p:cNvPr id="5" name="icon-circle"/>
           <p:cNvSpPr/>
           <p:nvPr/>
         </p:nvSpPr>
         <p:spPr>
           <a:xfrm>
-            <a:off x="548640" y="1463040"/>
-            <a:ext cx="3886200" cy="3017520"/>
-          </a:xfrm>
-          <a:prstGeom prst="roundRect">
-            <a:avLst>
-              <a:gd name="adj" fmla="val 3636"/>
-            </a:avLst>
+            <a:off x="704088" y="1600200"/>
+            <a:ext cx="457200" cy="457200"/>
+          </a:xfrm>
+          <a:prstGeom prst="ellipse">
+            <a:avLst/>
           </a:prstGeom>
           <a:solidFill>
-            <a:schemeClr val="bg2"/>
+            <a:srgbClr val="DD6420"/>
           </a:solidFill>
           <a:ln w="19050">
             <a:solidFill>
@@ -7530,43 +7811,11 @@
             </a:solidFill>
             <a:prstDash val="solid"/>
           </a:ln>
-          <a:effectLst>
-            <a:outerShdw sx="100000" sy="100000" kx="0" ky="0" algn="bl" rotWithShape="0" blurRad="101600" dist="38100" dir="2700000">
-              <a:srgbClr val="000000">
-                <a:alpha val="18000"/>
-              </a:srgbClr>
-            </a:outerShdw>
-          </a:effectLst>
-        </p:spPr>
-      </p:sp>
-      <p:sp>
-        <p:nvSpPr>
-          <p:cNvPr id="6" name="icon-circle"/>
-          <p:cNvSpPr/>
-          <p:nvPr/>
-        </p:nvSpPr>
-        <p:spPr>
-          <a:xfrm>
-            <a:off x="777240" y="1645920"/>
-            <a:ext cx="457200" cy="457200"/>
-          </a:xfrm>
-          <a:prstGeom prst="ellipse">
-            <a:avLst/>
-          </a:prstGeom>
-          <a:solidFill>
-            <a:schemeClr val="accent1"/>
-          </a:solidFill>
-          <a:ln w="15875">
-            <a:solidFill>
-              <a:srgbClr val="1A1A1A"/>
-            </a:solidFill>
-            <a:prstDash val="solid"/>
-          </a:ln>
         </p:spPr>
       </p:sp>
       <p:pic>
         <p:nvPicPr>
-          <p:cNvPr id="7" name="icon" descr="preencoded.png">    </p:cNvPr>
+          <p:cNvPr id="6" name="icon" descr="preencoded.png">    </p:cNvPr>
           <p:cNvPicPr>
             <a:picLocks noChangeAspect="1"/>
           </p:cNvPicPr>
@@ -7580,14 +7829,53 @@
         </p:blipFill>
         <p:spPr>
           <a:xfrm>
-            <a:off x="896112" y="1764792"/>
-            <a:ext cx="219456" cy="219456"/>
+            <a:off x="818388" y="1714500"/>
+            <a:ext cx="228600" cy="228600"/>
           </a:xfrm>
           <a:prstGeom prst="rect">
             <a:avLst/>
           </a:prstGeom>
         </p:spPr>
       </p:pic>
+      <p:sp>
+        <p:nvSpPr>
+          <p:cNvPr id="7" name="Text 4"/>
+          <p:cNvSpPr txBox="1"/>
+          <p:nvPr/>
+        </p:nvSpPr>
+        <p:spPr>
+          <a:xfrm>
+            <a:off x="1280160" y="1600200"/>
+            <a:ext cx="2743200" cy="457200"/>
+          </a:xfrm>
+          <a:prstGeom prst="rect">
+            <a:avLst/>
+          </a:prstGeom>
+          <a:noFill/>
+          <a:ln/>
+        </p:spPr>
+        <p:txBody>
+          <a:bodyPr wrap="square" lIns="0" tIns="0" rIns="0" bIns="0" rtlCol="0" anchor="ctr"/>
+          <a:lstStyle/>
+          <a:p>
+            <a:pPr indent="0" marL="0">
+              <a:buNone/>
+            </a:pPr>
+            <a:r>
+              <a:rPr lang="ja-JP" altLang="en-US" sz="1800" dirty="0">
+                <a:solidFill>
+                  <a:srgbClr val="1A1A1A"/>
+                </a:solidFill>
+                <a:latin typeface="Dela Gothic One" pitchFamily="34" charset="0"/>
+                <a:ea typeface="けいふぉんと" pitchFamily="34" charset="-122"/>
+                <a:cs typeface="Dela Gothic One" pitchFamily="34" charset="-120"/>
+              </a:rPr>
+              <a:t>宿題</a:t>
+            </a:r>
+            <a:endParaRPr lang="ja-JP" sz="1800" dirty="0"/>
+          </a:p>
+        </p:txBody>
+      </p:sp>
       <p:sp>
         <p:nvSpPr>
           <p:cNvPr id="8" name="Text 5"/>
@@ -7596,8 +7884,8 @@
         </p:nvSpPr>
         <p:spPr>
           <a:xfrm>
-            <a:off x="1371600" y="1645920"/>
-            <a:ext cx="2743200" cy="457200"/>
+            <a:off x="731520" y="2240280"/>
+            <a:ext cx="3474720" cy="2148840"/>
           </a:xfrm>
           <a:prstGeom prst="rect">
             <a:avLst/>
@@ -7606,43 +7894,9 @@
           <a:ln/>
         </p:spPr>
         <p:txBody>
-          <a:bodyPr wrap="square" lIns="0" tIns="0" rIns="0" bIns="0" rtlCol="0" anchor="ctr"/>
-          <a:lstStyle/>
-          <a:p>
-            <a:pPr indent="0" marL="0">
-              <a:buNone/>
-            </a:pPr>
-            <a:r>
-              <a:rPr lang="en-US" sz="1700" b="1" dirty="0">
-                <a:solidFill>
-                  <a:schemeClr val="tx1"/>
-                </a:solidFill>
-              </a:rPr>
-              <a:t>宿題</a:t>
-            </a:r>
-            <a:endParaRPr lang="en-US" sz="1700" dirty="0"/>
-          </a:p>
-        </p:txBody>
-      </p:sp>
-      <p:sp>
-        <p:nvSpPr>
-          <p:cNvPr id="9" name="Text 6"/>
-          <p:cNvSpPr txBox="1"/>
-          <p:nvPr/>
-        </p:nvSpPr>
-        <p:spPr>
-          <a:xfrm>
-            <a:off x="777240" y="2286000"/>
-            <a:ext cx="3474720" cy="2057400"/>
-          </a:xfrm>
-          <a:prstGeom prst="rect">
-            <a:avLst/>
-          </a:prstGeom>
-          <a:noFill/>
-          <a:ln/>
-        </p:spPr>
-        <p:txBody>
-          <a:bodyPr wrap="square" lIns="0" tIns="0" rIns="0" bIns="0" rtlCol="0" anchor="t"/>
+          <a:bodyPr wrap="square" lIns="0" tIns="0" rIns="0" bIns="0" rtlCol="0" anchor="t">
+            <a:normAutofit/>
+          </a:bodyPr>
           <a:lstStyle/>
           <a:p>
             <a:pPr marL="342900" indent="-342900">
@@ -7650,38 +7904,73 @@
                 <a:spcPts val="800"/>
               </a:spcAft>
               <a:buSzPct val="100000"/>
-              <a:buChar char="•"/>
-            </a:pPr>
-            <a:r>
-              <a:rPr lang="en-US" sz="1350" dirty="0">
-                <a:solidFill>
-                  <a:schemeClr val="tx1"/>
-                </a:solidFill>
+              <a:buChar char="●"/>
+            </a:pPr>
+            <a:r>
+              <a:rPr lang="ja-JP" altLang="en-US" sz="1350" b="1" dirty="0">
+                <a:solidFill>
+                  <a:srgbClr val="1A1A1A"/>
+                </a:solidFill>
+                <a:latin typeface="Noto Sans JP" pitchFamily="34" charset="0"/>
+                <a:ea typeface="Noto Sans JP" pitchFamily="34" charset="-122"/>
+                <a:cs typeface="Noto Sans JP" pitchFamily="34" charset="-120"/>
               </a:rPr>
               <a:t>設計シートの「3. 誰が・何に困っているか」を関係者ごとに書く</a:t>
             </a:r>
-            <a:endParaRPr lang="en-US" sz="1350" dirty="0"/>
-          </a:p>
-        </p:txBody>
-      </p:sp>
-      <p:sp>
-        <p:nvSpPr>
-          <p:cNvPr id="10" name="card"/>
+            <a:endParaRPr lang="ja-JP" sz="1350" dirty="0"/>
+          </a:p>
+        </p:txBody>
+      </p:sp>
+      <p:sp>
+        <p:nvSpPr>
+          <p:cNvPr id="9" name="card"/>
           <p:cNvSpPr/>
           <p:nvPr/>
         </p:nvSpPr>
         <p:spPr>
           <a:xfrm>
-            <a:off x="4709160" y="1463040"/>
-            <a:ext cx="3886200" cy="3017520"/>
+            <a:off x="4709160" y="1417320"/>
+            <a:ext cx="3931920" cy="3108960"/>
           </a:xfrm>
           <a:prstGeom prst="roundRect">
             <a:avLst>
-              <a:gd name="adj" fmla="val 3636"/>
+              <a:gd name="adj" fmla="val 2941"/>
             </a:avLst>
           </a:prstGeom>
           <a:solidFill>
-            <a:schemeClr val="bg1"/>
+            <a:srgbClr val="FFFFFF"/>
+          </a:solidFill>
+          <a:ln w="25400">
+            <a:solidFill>
+              <a:srgbClr val="1A1A1A"/>
+            </a:solidFill>
+            <a:prstDash val="solid"/>
+          </a:ln>
+          <a:effectLst>
+            <a:outerShdw sx="100000" sy="100000" kx="0" ky="0" algn="bl" rotWithShape="0" blurRad="101600" dist="50800" dir="2700000">
+              <a:srgbClr val="1A1A1A">
+                <a:alpha val="100000"/>
+              </a:srgbClr>
+            </a:outerShdw>
+          </a:effectLst>
+        </p:spPr>
+      </p:sp>
+      <p:sp>
+        <p:nvSpPr>
+          <p:cNvPr id="10" name="icon-circle"/>
+          <p:cNvSpPr/>
+          <p:nvPr/>
+        </p:nvSpPr>
+        <p:spPr>
+          <a:xfrm>
+            <a:off x="4910328" y="1600200"/>
+            <a:ext cx="457200" cy="457200"/>
+          </a:xfrm>
+          <a:prstGeom prst="ellipse">
+            <a:avLst/>
+          </a:prstGeom>
+          <a:solidFill>
+            <a:srgbClr val="DD6420"/>
           </a:solidFill>
           <a:ln w="19050">
             <a:solidFill>
@@ -7689,43 +7978,11 @@
             </a:solidFill>
             <a:prstDash val="solid"/>
           </a:ln>
-          <a:effectLst>
-            <a:outerShdw sx="100000" sy="100000" kx="0" ky="0" algn="bl" rotWithShape="0" blurRad="101600" dist="38100" dir="2700000">
-              <a:srgbClr val="000000">
-                <a:alpha val="18000"/>
-              </a:srgbClr>
-            </a:outerShdw>
-          </a:effectLst>
-        </p:spPr>
-      </p:sp>
-      <p:sp>
-        <p:nvSpPr>
-          <p:cNvPr id="11" name="icon-circle"/>
-          <p:cNvSpPr/>
-          <p:nvPr/>
-        </p:nvSpPr>
-        <p:spPr>
-          <a:xfrm>
-            <a:off x="4937760" y="1645920"/>
-            <a:ext cx="457200" cy="457200"/>
-          </a:xfrm>
-          <a:prstGeom prst="ellipse">
-            <a:avLst/>
-          </a:prstGeom>
-          <a:solidFill>
-            <a:schemeClr val="accent1"/>
-          </a:solidFill>
-          <a:ln w="15875">
-            <a:solidFill>
-              <a:srgbClr val="1A1A1A"/>
-            </a:solidFill>
-            <a:prstDash val="solid"/>
-          </a:ln>
         </p:spPr>
       </p:sp>
       <p:pic>
         <p:nvPicPr>
-          <p:cNvPr id="12" name="icon" descr="preencoded.png">    </p:cNvPr>
+          <p:cNvPr id="11" name="icon" descr="preencoded.png">    </p:cNvPr>
           <p:cNvPicPr>
             <a:picLocks noChangeAspect="1"/>
           </p:cNvPicPr>
@@ -7739,14 +7996,53 @@
         </p:blipFill>
         <p:spPr>
           <a:xfrm>
-            <a:off x="5056632" y="1764792"/>
-            <a:ext cx="219456" cy="219456"/>
+            <a:off x="5024628" y="1714500"/>
+            <a:ext cx="228600" cy="228600"/>
           </a:xfrm>
           <a:prstGeom prst="rect">
             <a:avLst/>
           </a:prstGeom>
         </p:spPr>
       </p:pic>
+      <p:sp>
+        <p:nvSpPr>
+          <p:cNvPr id="12" name="Text 8"/>
+          <p:cNvSpPr txBox="1"/>
+          <p:nvPr/>
+        </p:nvSpPr>
+        <p:spPr>
+          <a:xfrm>
+            <a:off x="5486400" y="1600200"/>
+            <a:ext cx="2743200" cy="457200"/>
+          </a:xfrm>
+          <a:prstGeom prst="rect">
+            <a:avLst/>
+          </a:prstGeom>
+          <a:noFill/>
+          <a:ln/>
+        </p:spPr>
+        <p:txBody>
+          <a:bodyPr wrap="square" lIns="0" tIns="0" rIns="0" bIns="0" rtlCol="0" anchor="ctr"/>
+          <a:lstStyle/>
+          <a:p>
+            <a:pPr indent="0" marL="0">
+              <a:buNone/>
+            </a:pPr>
+            <a:r>
+              <a:rPr lang="ja-JP" altLang="en-US" sz="1800" dirty="0">
+                <a:solidFill>
+                  <a:srgbClr val="1A1A1A"/>
+                </a:solidFill>
+                <a:latin typeface="Dela Gothic One" pitchFamily="34" charset="0"/>
+                <a:ea typeface="けいふぉんと" pitchFamily="34" charset="-122"/>
+                <a:cs typeface="Dela Gothic One" pitchFamily="34" charset="-120"/>
+              </a:rPr>
+              <a:t>できたらチェック</a:t>
+            </a:r>
+            <a:endParaRPr lang="ja-JP" sz="1800" dirty="0"/>
+          </a:p>
+        </p:txBody>
+      </p:sp>
       <p:sp>
         <p:nvSpPr>
           <p:cNvPr id="13" name="Text 9"/>
@@ -7755,8 +8051,8 @@
         </p:nvSpPr>
         <p:spPr>
           <a:xfrm>
-            <a:off x="5532120" y="1645920"/>
-            <a:ext cx="2743200" cy="457200"/>
+            <a:off x="4937760" y="2240280"/>
+            <a:ext cx="3474720" cy="2148840"/>
           </a:xfrm>
           <a:prstGeom prst="rect">
             <a:avLst/>
@@ -7765,43 +8061,9 @@
           <a:ln/>
         </p:spPr>
         <p:txBody>
-          <a:bodyPr wrap="square" lIns="0" tIns="0" rIns="0" bIns="0" rtlCol="0" anchor="ctr"/>
-          <a:lstStyle/>
-          <a:p>
-            <a:pPr indent="0" marL="0">
-              <a:buNone/>
-            </a:pPr>
-            <a:r>
-              <a:rPr lang="en-US" sz="1700" b="1" dirty="0">
-                <a:solidFill>
-                  <a:schemeClr val="tx1"/>
-                </a:solidFill>
-              </a:rPr>
-              <a:t>できたらチェック</a:t>
-            </a:r>
-            <a:endParaRPr lang="en-US" sz="1700" dirty="0"/>
-          </a:p>
-        </p:txBody>
-      </p:sp>
-      <p:sp>
-        <p:nvSpPr>
-          <p:cNvPr id="14" name="Text 10"/>
-          <p:cNvSpPr txBox="1"/>
-          <p:nvPr/>
-        </p:nvSpPr>
-        <p:spPr>
-          <a:xfrm>
-            <a:off x="4937760" y="2286000"/>
-            <a:ext cx="3474720" cy="2057400"/>
-          </a:xfrm>
-          <a:prstGeom prst="rect">
-            <a:avLst/>
-          </a:prstGeom>
-          <a:noFill/>
-          <a:ln/>
-        </p:spPr>
-        <p:txBody>
-          <a:bodyPr wrap="square" lIns="0" tIns="0" rIns="0" bIns="0" rtlCol="0" anchor="t"/>
+          <a:bodyPr wrap="square" lIns="0" tIns="0" rIns="0" bIns="0" rtlCol="0" anchor="t">
+            <a:normAutofit/>
+          </a:bodyPr>
           <a:lstStyle/>
           <a:p>
             <a:pPr indent="0" marL="0">
@@ -7811,14 +8073,17 @@
               <a:buNone/>
             </a:pPr>
             <a:r>
-              <a:rPr lang="en-US" sz="1350" dirty="0">
-                <a:solidFill>
-                  <a:schemeClr val="tx1"/>
-                </a:solidFill>
+              <a:rPr lang="ja-JP" altLang="en-US" sz="1350" b="1" dirty="0">
+                <a:solidFill>
+                  <a:srgbClr val="1A1A1A"/>
+                </a:solidFill>
+                <a:latin typeface="Noto Sans JP" pitchFamily="34" charset="0"/>
+                <a:ea typeface="Noto Sans JP" pitchFamily="34" charset="-122"/>
+                <a:cs typeface="Noto Sans JP" pitchFamily="34" charset="-120"/>
               </a:rPr>
               <a:t>☐ 作りたいものが1つ決まった</a:t>
             </a:r>
-            <a:endParaRPr lang="en-US" sz="1350" dirty="0"/>
+            <a:endParaRPr lang="ja-JP" sz="1350" dirty="0"/>
           </a:p>
           <a:p>
             <a:pPr indent="0" marL="0">
@@ -7828,14 +8093,17 @@
               <a:buNone/>
             </a:pPr>
             <a:r>
-              <a:rPr lang="en-US" sz="1350" dirty="0">
-                <a:solidFill>
-                  <a:schemeClr val="tx1"/>
-                </a:solidFill>
+              <a:rPr lang="ja-JP" altLang="en-US" sz="1350" b="1" dirty="0">
+                <a:solidFill>
+                  <a:srgbClr val="1A1A1A"/>
+                </a:solidFill>
+                <a:latin typeface="Noto Sans JP" pitchFamily="34" charset="0"/>
+                <a:ea typeface="Noto Sans JP" pitchFamily="34" charset="-122"/>
+                <a:cs typeface="Noto Sans JP" pitchFamily="34" charset="-120"/>
               </a:rPr>
               <a:t>☐ 業務の棚卸しが10個書けた</a:t>
             </a:r>
-            <a:endParaRPr lang="en-US" sz="1350" dirty="0"/>
+            <a:endParaRPr lang="ja-JP" sz="1350" dirty="0"/>
           </a:p>
         </p:txBody>
       </p:sp>
@@ -7851,8 +8119,8 @@
         </p:nvSpPr>
         <p:spPr>
           <a:xfrm>
-            <a:off x="8229600" y="4773168"/>
-            <a:ext cx="365760" cy="228600"/>
+            <a:off x="8366760" y="4754880"/>
+            <a:ext cx="365760" cy="274320"/>
           </a:xfrm>
           <a:prstGeom prst="rect">
             <a:avLst/>
@@ -7864,20 +8132,23 @@
           </a:extLst>
         </p:spPr>
         <p:txBody>
-          <a:bodyPr/>
+          <a:bodyPr anchor="ctr"/>
           <a:lstStyle>
             <a:lvl1pPr>
-              <a:defRPr sz="900">
-                <a:solidFill>
-                  <a:srgbClr val="5A6872"/>
-                </a:solidFill>
+              <a:defRPr sz="850">
+                <a:solidFill>
+                  <a:srgbClr val="FFFFFF"/>
+                </a:solidFill>
+                <a:latin typeface="Noto Sans JP"/>
+                <a:ea typeface="Noto Sans JP"/>
+                <a:cs typeface="Noto Sans JP"/>
               </a:defRPr>
             </a:lvl1pPr>
           </a:lstStyle>
           <a:p>
             <a:pPr algn="r"/>
             <a:fld id="{F7021451-1387-4CA6-816F-3879F97B5CBC}" type="slidenum">
-              <a:rPr b="0" lang="en-US"/>
+              <a:rPr b="1" lang="en-US"/>
               <a:t>9</a:t>
             </a:fld>
             <a:endParaRPr lang="en-US"/>
@@ -7893,9 +8164,9 @@
 </file>
 
 <file path=ppt/theme/theme1.xml><?xml version="1.0" encoding="utf-8"?>
-<a:theme xmlns:a="http://schemas.openxmlformats.org/drawingml/2006/main" name="Manaberu">
+<a:theme xmlns:a="http://schemas.openxmlformats.org/drawingml/2006/main" name="SasaYell">
   <a:themeElements>
-    <a:clrScheme name="Manaberu">
+    <a:clrScheme name="SasaYell">
       <a:dk1>
         <a:srgbClr val="1A1A1A"/>
       </a:dk1>
@@ -7903,10 +8174,10 @@
         <a:srgbClr val="FFFFFF"/>
       </a:lt1>
       <a:dk2>
-        <a:srgbClr val="5A6872"/>
+        <a:srgbClr val="1A1A1A"/>
       </a:dk2>
       <a:lt2>
-        <a:srgbClr val="FFF6CC"/>
+        <a:srgbClr val="FFD600"/>
       </a:lt2>
       <a:accent1>
         <a:srgbClr val="FFD600"/>
@@ -7915,128 +8186,34 @@
         <a:srgbClr val="DD6420"/>
       </a:accent2>
       <a:accent3>
-        <a:srgbClr val="3370FF"/>
+        <a:srgbClr val="F5A623"/>
       </a:accent3>
       <a:accent4>
-        <a:srgbClr val="06C755"/>
+        <a:srgbClr val="1A1A1A"/>
       </a:accent4>
       <a:accent5>
-        <a:srgbClr val="E53935"/>
+        <a:srgbClr val="FFFFFF"/>
       </a:accent5>
       <a:accent6>
-        <a:srgbClr val="F5A623"/>
+        <a:srgbClr val="DD6420"/>
       </a:accent6>
       <a:hlink>
-        <a:srgbClr val="3370FF"/>
+        <a:srgbClr val="DD6420"/>
       </a:hlink>
       <a:folHlink>
-        <a:srgbClr val="6B4FBB"/>
+        <a:srgbClr val="F5A623"/>
       </a:folHlink>
     </a:clrScheme>
-    <a:fontScheme name="Manaberu">
+    <a:fontScheme name="SasaYell">
       <a:majorFont>
-        <a:latin typeface="Yu Gothic"/>
-        <a:ea typeface=""/>
+        <a:latin typeface="Dela Gothic One"/>
+        <a:ea typeface="けいふぉんと"/>
         <a:cs typeface=""/>
-        <a:font script="Jpan" typeface="游ゴシック Light"/>
-        <a:font script="Hang" typeface="맑은 고딕"/>
-        <a:font script="Hans" typeface="等线 Light"/>
-        <a:font script="Hant" typeface="新細明體"/>
-        <a:font script="Arab" typeface="Times New Roman"/>
-        <a:font script="Hebr" typeface="Times New Roman"/>
-        <a:font script="Thai" typeface="Angsana New"/>
-        <a:font script="Ethi" typeface="Nyala"/>
-        <a:font script="Beng" typeface="Vrinda"/>
-        <a:font script="Gujr" typeface="Shruti"/>
-        <a:font script="Khmr" typeface="MoolBoran"/>
-        <a:font script="Knda" typeface="Tunga"/>
-        <a:font script="Guru" typeface="Raavi"/>
-        <a:font script="Cans" typeface="Euphemia"/>
-        <a:font script="Cher" typeface="Plantagenet Cherokee"/>
-        <a:font script="Yiii" typeface="Microsoft Yi Baiti"/>
-        <a:font script="Tibt" typeface="Microsoft Himalaya"/>
-        <a:font script="Thaa" typeface="MV Boli"/>
-        <a:font script="Deva" typeface="Mangal"/>
-        <a:font script="Telu" typeface="Gautami"/>
-        <a:font script="Taml" typeface="Latha"/>
-        <a:font script="Syrc" typeface="Estrangelo Edessa"/>
-        <a:font script="Orya" typeface="Kalinga"/>
-        <a:font script="Mlym" typeface="Kartika"/>
-        <a:font script="Laoo" typeface="DokChampa"/>
-        <a:font script="Sinh" typeface="Iskoola Pota"/>
-        <a:font script="Mong" typeface="Mongolian Baiti"/>
-        <a:font script="Viet" typeface="Times New Roman"/>
-        <a:font script="Uigh" typeface="Microsoft Uighur"/>
-        <a:font script="Geor" typeface="Sylfaen"/>
-        <a:font script="Armn" typeface="Arial"/>
-        <a:font script="Bugi" typeface="Leelawadee UI"/>
-        <a:font script="Bopo" typeface="Microsoft JhengHei"/>
-        <a:font script="Java" typeface="Javanese Text"/>
-        <a:font script="Lisu" typeface="Segoe UI"/>
-        <a:font script="Mymr" typeface="Myanmar Text"/>
-        <a:font script="Nkoo" typeface="Ebrima"/>
-        <a:font script="Olck" typeface="Nirmala UI"/>
-        <a:font script="Osma" typeface="Ebrima"/>
-        <a:font script="Phag" typeface="Phagspa"/>
-        <a:font script="Syrn" typeface="Estrangelo Edessa"/>
-        <a:font script="Syrj" typeface="Estrangelo Edessa"/>
-        <a:font script="Syre" typeface="Estrangelo Edessa"/>
-        <a:font script="Sora" typeface="Nirmala UI"/>
-        <a:font script="Tale" typeface="Microsoft Tai Le"/>
-        <a:font script="Talu" typeface="Microsoft New Tai Lue"/>
-        <a:font script="Tfng" typeface="Ebrima"/>
       </a:majorFont>
       <a:minorFont>
-        <a:latin typeface="Yu Gothic"/>
-        <a:ea typeface=""/>
+        <a:latin typeface="Noto Sans JP"/>
+        <a:ea typeface="Noto Sans JP"/>
         <a:cs typeface=""/>
-        <a:font script="Jpan" typeface="游ゴシック"/>
-        <a:font script="Hang" typeface="맑은 고딕"/>
-        <a:font script="Hans" typeface="等线"/>
-        <a:font script="Hant" typeface="新細明體"/>
-        <a:font script="Arab" typeface="Arial"/>
-        <a:font script="Hebr" typeface="Arial"/>
-        <a:font script="Thai" typeface="Cordia New"/>
-        <a:font script="Ethi" typeface="Nyala"/>
-        <a:font script="Beng" typeface="Vrinda"/>
-        <a:font script="Gujr" typeface="Shruti"/>
-        <a:font script="Khmr" typeface="DaunPenh"/>
-        <a:font script="Knda" typeface="Tunga"/>
-        <a:font script="Guru" typeface="Raavi"/>
-        <a:font script="Cans" typeface="Euphemia"/>
-        <a:font script="Cher" typeface="Plantagenet Cherokee"/>
-        <a:font script="Yiii" typeface="Microsoft Yi Baiti"/>
-        <a:font script="Tibt" typeface="Microsoft Himalaya"/>
-        <a:font script="Thaa" typeface="MV Boli"/>
-        <a:font script="Deva" typeface="Mangal"/>
-        <a:font script="Telu" typeface="Gautami"/>
-        <a:font script="Taml" typeface="Latha"/>
-        <a:font script="Syrc" typeface="Estrangelo Edessa"/>
-        <a:font script="Orya" typeface="Kalinga"/>
-        <a:font script="Mlym" typeface="Kartika"/>
-        <a:font script="Laoo" typeface="DokChampa"/>
-        <a:font script="Sinh" typeface="Iskoola Pota"/>
-        <a:font script="Mong" typeface="Mongolian Baiti"/>
-        <a:font script="Viet" typeface="Arial"/>
-        <a:font script="Uigh" typeface="Microsoft Uighur"/>
-        <a:font script="Geor" typeface="Sylfaen"/>
-        <a:font script="Armn" typeface="Arial"/>
-        <a:font script="Bugi" typeface="Leelawadee UI"/>
-        <a:font script="Bopo" typeface="Microsoft JhengHei"/>
-        <a:font script="Java" typeface="Javanese Text"/>
-        <a:font script="Lisu" typeface="Segoe UI"/>
-        <a:font script="Mymr" typeface="Myanmar Text"/>
-        <a:font script="Nkoo" typeface="Ebrima"/>
-        <a:font script="Olck" typeface="Nirmala UI"/>
-        <a:font script="Osma" typeface="Ebrima"/>
-        <a:font script="Phag" typeface="Phagspa"/>
-        <a:font script="Syrn" typeface="Estrangelo Edessa"/>
-        <a:font script="Syrj" typeface="Estrangelo Edessa"/>
-        <a:font script="Syre" typeface="Estrangelo Edessa"/>
-        <a:font script="Sora" typeface="Nirmala UI"/>
-        <a:font script="Tale" typeface="Microsoft Tai Le"/>
-        <a:font script="Talu" typeface="Microsoft New Tai Lue"/>
-        <a:font script="Tfng" typeface="Ebrima"/>
       </a:minorFont>
     </a:fontScheme>
     <a:fmtScheme name="Office">
